--- a/datathon2026_space/deck/Datathon2026_Theme6.1_Satellites_Presentation.pptx
+++ b/datathon2026_space/deck/Datathon2026_Theme6.1_Satellites_Presentation.pptx
@@ -22,9 +22,11 @@
     <p:sldId id="270" r:id="rId16"/>
     <p:sldId id="271" r:id="rId17"/>
     <p:sldId id="272" r:id="rId18"/>
+    <p:sldId id="273" r:id="rId19"/>
+    <p:sldId id="274" r:id="rId20"/>
   </p:sldIdLst>
   <p:notesMasterIdLst>
-    <p:notesMasterId r:id="rId19"/>
+    <p:notesMasterId r:id="rId21"/>
   </p:notesMasterIdLst>
   <p:sldSz cx="12192000" cy="6858000"/>
   <p:notesSz cx="6858000" cy="12192000"/>
@@ -418,6 +420,917 @@
                 </a:solidFill>
                 <a:latin typeface="Calibri"/>
               </a:rPr>
+              <a:t>Low-orbit debris re-entering per year (%): a 12-year cycle</a:t>
+            </a:r>
+          </a:p>
+        </c:rich>
+      </c:tx>
+      <c:layout/>
+      <c:overlay val="0"/>
+    </c:title>
+    <c:autoTitleDeleted val="0"/>
+    <c:plotArea>
+      <c:layout/>
+      <c:lineChart>
+        <c:varyColors val="0"/>
+        <c:ser>
+          <c:idx val="0"/>
+          <c:order val="0"/>
+          <c:tx>
+            <c:strRef>
+              <c:f>Sheet1!$B$1</c:f>
+              <c:strCache>
+                <c:ptCount val="1"/>
+                <c:pt idx="0">
+                  <c:v>Re-entry rate %</c:v>
+                </c:pt>
+              </c:strCache>
+            </c:strRef>
+          </c:tx>
+          <c:spPr>
+            <a:solidFill>
+              <a:srgbClr val="2F5D8C"/>
+            </a:solidFill>
+            <a:ln w="25400" cap="flat">
+              <a:solidFill>
+                <a:srgbClr val="2F5D8C"/>
+              </a:solidFill>
+              <a:prstDash val="solid"/>
+              <a:round/>
+            </a:ln>
+            <a:effectLst/>
+          </c:spPr>
+          <c:invertIfNegative val="0"/>
+          <c:dLbls>
+            <c:numFmt formatCode="#,##0" sourceLinked="0"/>
+            <c:txPr>
+              <a:bodyPr/>
+              <a:lstStyle/>
+              <a:p>
+                <a:pPr>
+                  <a:defRPr b="0" i="0" strike="noStrike" sz="1200" u="none">
+                    <a:solidFill>
+                      <a:srgbClr val="000000"/>
+                    </a:solidFill>
+                    <a:latin typeface="Arial"/>
+                  </a:defRPr>
+                </a:pPr>
+              </a:p>
+            </c:txPr>
+            <c:showLegendKey val="0"/>
+            <c:showVal val="0"/>
+            <c:showCatName val="0"/>
+            <c:showSerName val="0"/>
+            <c:showPercent val="0"/>
+            <c:showBubbleSize val="0"/>
+            <c:showLeaderLines val="0"/>
+          </c:dLbls>
+          <c:marker>
+            <c:symbol val="none"/>
+            <c:size val="6"/>
+            <c:spPr>
+              <a:solidFill>
+                <a:srgbClr val="2F5D8C"/>
+              </a:solidFill>
+              <a:ln w="9525" cap="flat">
+                <a:solidFill>
+                  <a:srgbClr val="2F5D8C"/>
+                </a:solidFill>
+                <a:prstDash val="solid"/>
+                <a:round/>
+              </a:ln>
+              <a:effectLst/>
+            </c:spPr>
+          </c:marker>
+          <c:cat>
+            <c:multiLvlStrRef>
+              <c:f>Sheet1!$A$2:$A$62</c:f>
+              <c:multiLvlStrCache>
+                <c:ptCount val="61"/>
+                <c:lvl>
+                  <c:pt idx="0">
+                    <c:v>1965</c:v>
+                  </c:pt>
+                  <c:pt idx="1">
+                    <c:v>1966</c:v>
+                  </c:pt>
+                  <c:pt idx="2">
+                    <c:v>1967</c:v>
+                  </c:pt>
+                  <c:pt idx="3">
+                    <c:v>1968</c:v>
+                  </c:pt>
+                  <c:pt idx="4">
+                    <c:v>1969</c:v>
+                  </c:pt>
+                  <c:pt idx="5">
+                    <c:v>1970</c:v>
+                  </c:pt>
+                  <c:pt idx="6">
+                    <c:v>1971</c:v>
+                  </c:pt>
+                  <c:pt idx="7">
+                    <c:v>1972</c:v>
+                  </c:pt>
+                  <c:pt idx="8">
+                    <c:v>1973</c:v>
+                  </c:pt>
+                  <c:pt idx="9">
+                    <c:v>1974</c:v>
+                  </c:pt>
+                  <c:pt idx="10">
+                    <c:v>1975</c:v>
+                  </c:pt>
+                  <c:pt idx="11">
+                    <c:v>1976</c:v>
+                  </c:pt>
+                  <c:pt idx="12">
+                    <c:v>1977</c:v>
+                  </c:pt>
+                  <c:pt idx="13">
+                    <c:v>1978</c:v>
+                  </c:pt>
+                  <c:pt idx="14">
+                    <c:v>1979</c:v>
+                  </c:pt>
+                  <c:pt idx="15">
+                    <c:v>1980</c:v>
+                  </c:pt>
+                  <c:pt idx="16">
+                    <c:v>1981</c:v>
+                  </c:pt>
+                  <c:pt idx="17">
+                    <c:v>1982</c:v>
+                  </c:pt>
+                  <c:pt idx="18">
+                    <c:v>1983</c:v>
+                  </c:pt>
+                  <c:pt idx="19">
+                    <c:v>1984</c:v>
+                  </c:pt>
+                  <c:pt idx="20">
+                    <c:v>1985</c:v>
+                  </c:pt>
+                  <c:pt idx="21">
+                    <c:v>1986</c:v>
+                  </c:pt>
+                  <c:pt idx="22">
+                    <c:v>1987</c:v>
+                  </c:pt>
+                  <c:pt idx="23">
+                    <c:v>1988</c:v>
+                  </c:pt>
+                  <c:pt idx="24">
+                    <c:v>1989</c:v>
+                  </c:pt>
+                  <c:pt idx="25">
+                    <c:v>1990</c:v>
+                  </c:pt>
+                  <c:pt idx="26">
+                    <c:v>1991</c:v>
+                  </c:pt>
+                  <c:pt idx="27">
+                    <c:v>1992</c:v>
+                  </c:pt>
+                  <c:pt idx="28">
+                    <c:v>1993</c:v>
+                  </c:pt>
+                  <c:pt idx="29">
+                    <c:v>1994</c:v>
+                  </c:pt>
+                  <c:pt idx="30">
+                    <c:v>1995</c:v>
+                  </c:pt>
+                  <c:pt idx="31">
+                    <c:v>1996</c:v>
+                  </c:pt>
+                  <c:pt idx="32">
+                    <c:v>1997</c:v>
+                  </c:pt>
+                  <c:pt idx="33">
+                    <c:v>1998</c:v>
+                  </c:pt>
+                  <c:pt idx="34">
+                    <c:v>1999</c:v>
+                  </c:pt>
+                  <c:pt idx="35">
+                    <c:v>2000</c:v>
+                  </c:pt>
+                  <c:pt idx="36">
+                    <c:v>2001</c:v>
+                  </c:pt>
+                  <c:pt idx="37">
+                    <c:v>2002</c:v>
+                  </c:pt>
+                  <c:pt idx="38">
+                    <c:v>2003</c:v>
+                  </c:pt>
+                  <c:pt idx="39">
+                    <c:v>2004</c:v>
+                  </c:pt>
+                  <c:pt idx="40">
+                    <c:v>2005</c:v>
+                  </c:pt>
+                  <c:pt idx="41">
+                    <c:v>2006</c:v>
+                  </c:pt>
+                  <c:pt idx="42">
+                    <c:v>2007</c:v>
+                  </c:pt>
+                  <c:pt idx="43">
+                    <c:v>2008</c:v>
+                  </c:pt>
+                  <c:pt idx="44">
+                    <c:v>2009</c:v>
+                  </c:pt>
+                  <c:pt idx="45">
+                    <c:v>2010</c:v>
+                  </c:pt>
+                  <c:pt idx="46">
+                    <c:v>2011</c:v>
+                  </c:pt>
+                  <c:pt idx="47">
+                    <c:v>2012</c:v>
+                  </c:pt>
+                  <c:pt idx="48">
+                    <c:v>2013</c:v>
+                  </c:pt>
+                  <c:pt idx="49">
+                    <c:v>2014</c:v>
+                  </c:pt>
+                  <c:pt idx="50">
+                    <c:v>2015</c:v>
+                  </c:pt>
+                  <c:pt idx="51">
+                    <c:v>2016</c:v>
+                  </c:pt>
+                  <c:pt idx="52">
+                    <c:v>2017</c:v>
+                  </c:pt>
+                  <c:pt idx="53">
+                    <c:v>2018</c:v>
+                  </c:pt>
+                  <c:pt idx="54">
+                    <c:v>2019</c:v>
+                  </c:pt>
+                  <c:pt idx="55">
+                    <c:v>2020</c:v>
+                  </c:pt>
+                  <c:pt idx="56">
+                    <c:v>2021</c:v>
+                  </c:pt>
+                  <c:pt idx="57">
+                    <c:v>2022</c:v>
+                  </c:pt>
+                  <c:pt idx="58">
+                    <c:v>2023</c:v>
+                  </c:pt>
+                  <c:pt idx="59">
+                    <c:v>2024</c:v>
+                  </c:pt>
+                  <c:pt idx="60">
+                    <c:v>2025</c:v>
+                  </c:pt>
+                </c:lvl>
+              </c:multiLvlStrCache>
+            </c:multiLvlStrRef>
+          </c:cat>
+          <c:val>
+            <c:numRef>
+              <c:f>Sheet1!$B$2:$B$62</c:f>
+              <c:numCache>
+                <c:formatCode>General</c:formatCode>
+                <c:ptCount val="61"/>
+                <c:pt idx="0">
+                  <c:v>2.22</c:v>
+                </c:pt>
+                <c:pt idx="1">
+                  <c:v>4.26</c:v>
+                </c:pt>
+                <c:pt idx="2">
+                  <c:v>4.82</c:v>
+                </c:pt>
+                <c:pt idx="3">
+                  <c:v>4.27</c:v>
+                </c:pt>
+                <c:pt idx="4">
+                  <c:v>5.2</c:v>
+                </c:pt>
+                <c:pt idx="5">
+                  <c:v>4.04</c:v>
+                </c:pt>
+                <c:pt idx="6">
+                  <c:v>2.31</c:v>
+                </c:pt>
+                <c:pt idx="7">
+                  <c:v>3.59</c:v>
+                </c:pt>
+                <c:pt idx="8">
+                  <c:v>1.94</c:v>
+                </c:pt>
+                <c:pt idx="9">
+                  <c:v>2.44</c:v>
+                </c:pt>
+                <c:pt idx="10">
+                  <c:v>2.39</c:v>
+                </c:pt>
+                <c:pt idx="11">
+                  <c:v>2.57</c:v>
+                </c:pt>
+                <c:pt idx="12">
+                  <c:v>4.58</c:v>
+                </c:pt>
+                <c:pt idx="13">
+                  <c:v>5.19</c:v>
+                </c:pt>
+                <c:pt idx="14">
+                  <c:v>6.23</c:v>
+                </c:pt>
+                <c:pt idx="15">
+                  <c:v>4.55</c:v>
+                </c:pt>
+                <c:pt idx="16">
+                  <c:v>5.72</c:v>
+                </c:pt>
+                <c:pt idx="17">
+                  <c:v>3.95</c:v>
+                </c:pt>
+                <c:pt idx="18">
+                  <c:v>2.42</c:v>
+                </c:pt>
+                <c:pt idx="19">
+                  <c:v>2.88</c:v>
+                </c:pt>
+                <c:pt idx="20">
+                  <c:v>1.51</c:v>
+                </c:pt>
+                <c:pt idx="21">
+                  <c:v>3.12</c:v>
+                </c:pt>
+                <c:pt idx="22">
+                  <c:v>2.49</c:v>
+                </c:pt>
+                <c:pt idx="23">
+                  <c:v>6.18</c:v>
+                </c:pt>
+                <c:pt idx="24">
+                  <c:v>7.59</c:v>
+                </c:pt>
+                <c:pt idx="25">
+                  <c:v>3.09</c:v>
+                </c:pt>
+                <c:pt idx="26">
+                  <c:v>4.05</c:v>
+                </c:pt>
+                <c:pt idx="27">
+                  <c:v>1.9</c:v>
+                </c:pt>
+                <c:pt idx="28">
+                  <c:v>1.07</c:v>
+                </c:pt>
+                <c:pt idx="29">
+                  <c:v>0.6</c:v>
+                </c:pt>
+                <c:pt idx="30">
+                  <c:v>0.61</c:v>
+                </c:pt>
+                <c:pt idx="31">
+                  <c:v>1.33</c:v>
+                </c:pt>
+                <c:pt idx="32">
+                  <c:v>2.46</c:v>
+                </c:pt>
+                <c:pt idx="33">
+                  <c:v>2.17</c:v>
+                </c:pt>
+                <c:pt idx="34">
+                  <c:v>2.48</c:v>
+                </c:pt>
+                <c:pt idx="35">
+                  <c:v>1.8</c:v>
+                </c:pt>
+                <c:pt idx="36">
+                  <c:v>1.77</c:v>
+                </c:pt>
+                <c:pt idx="37">
+                  <c:v>2.4</c:v>
+                </c:pt>
+                <c:pt idx="38">
+                  <c:v>1.26</c:v>
+                </c:pt>
+                <c:pt idx="39">
+                  <c:v>0.81</c:v>
+                </c:pt>
+                <c:pt idx="40">
+                  <c:v>0.83</c:v>
+                </c:pt>
+                <c:pt idx="41">
+                  <c:v>0.92</c:v>
+                </c:pt>
+                <c:pt idx="42">
+                  <c:v>0.75</c:v>
+                </c:pt>
+                <c:pt idx="43">
+                  <c:v>3.82</c:v>
+                </c:pt>
+                <c:pt idx="44">
+                  <c:v>1.4</c:v>
+                </c:pt>
+                <c:pt idx="45">
+                  <c:v>1.79</c:v>
+                </c:pt>
+                <c:pt idx="46">
+                  <c:v>2.4</c:v>
+                </c:pt>
+                <c:pt idx="47">
+                  <c:v>2.22</c:v>
+                </c:pt>
+                <c:pt idx="48">
+                  <c:v>2.15</c:v>
+                </c:pt>
+                <c:pt idx="49">
+                  <c:v>3.21</c:v>
+                </c:pt>
+                <c:pt idx="50">
+                  <c:v>2.11</c:v>
+                </c:pt>
+                <c:pt idx="51">
+                  <c:v>0.93</c:v>
+                </c:pt>
+                <c:pt idx="52">
+                  <c:v>0.67</c:v>
+                </c:pt>
+                <c:pt idx="53">
+                  <c:v>0.66</c:v>
+                </c:pt>
+                <c:pt idx="54">
+                  <c:v>0.61</c:v>
+                </c:pt>
+                <c:pt idx="55">
+                  <c:v>1.38</c:v>
+                </c:pt>
+                <c:pt idx="56">
+                  <c:v>1.61</c:v>
+                </c:pt>
+                <c:pt idx="57">
+                  <c:v>11.82</c:v>
+                </c:pt>
+                <c:pt idx="58">
+                  <c:v>8.24</c:v>
+                </c:pt>
+                <c:pt idx="59">
+                  <c:v>7.09</c:v>
+                </c:pt>
+                <c:pt idx="60">
+                  <c:v>5.12</c:v>
+                </c:pt>
+              </c:numCache>
+            </c:numRef>
+          </c:val>
+          <c:smooth val="0"/>
+        </c:ser>
+        <c:dLbls>
+          <c:numFmt formatCode="#,##0" sourceLinked="0"/>
+          <c:txPr>
+            <a:bodyPr/>
+            <a:lstStyle/>
+            <a:p>
+              <a:pPr>
+                <a:defRPr b="0" i="0" strike="noStrike" sz="1200" u="none">
+                  <a:solidFill>
+                    <a:srgbClr val="000000"/>
+                  </a:solidFill>
+                  <a:latin typeface="Arial"/>
+                </a:defRPr>
+              </a:pPr>
+            </a:p>
+          </c:txPr>
+          <c:showLegendKey val="0"/>
+          <c:showVal val="0"/>
+          <c:showCatName val="0"/>
+          <c:showSerName val="0"/>
+          <c:showPercent val="0"/>
+          <c:showBubbleSize val="0"/>
+          <c:showLeaderLines val="0"/>
+        </c:dLbls>
+        <c:marker val="1"/>
+        <c:axId val="2094734554"/>
+        <c:axId val="2094734552"/>
+        <c:axId val="2094734556"/>
+      </c:lineChart>
+      <c:catAx>
+        <c:axId val="2094734554"/>
+        <c:scaling>
+          <c:orientation val="minMax"/>
+        </c:scaling>
+        <c:delete val="0"/>
+        <c:axPos val="b"/>
+        <c:numFmt formatCode="General" sourceLinked="1"/>
+        <c:majorTickMark val="out"/>
+        <c:minorTickMark val="none"/>
+        <c:tickLblPos val="low"/>
+        <c:spPr>
+          <a:ln w="12700" cap="flat">
+            <a:solidFill>
+              <a:srgbClr val="888888"/>
+            </a:solidFill>
+            <a:prstDash val="solid"/>
+            <a:round/>
+          </a:ln>
+        </c:spPr>
+        <c:txPr>
+          <a:bodyPr/>
+          <a:lstStyle/>
+          <a:p>
+            <a:pPr>
+              <a:defRPr sz="1000" b="0" i="0" u="none" strike="noStrike">
+                <a:solidFill>
+                  <a:srgbClr val="5B6573"/>
+                </a:solidFill>
+                <a:latin typeface="Calibri"/>
+              </a:defRPr>
+            </a:pPr>
+            <a:endParaRPr lang="en-US"/>
+          </a:p>
+        </c:txPr>
+        <c:crossAx val="2094734552"/>
+        <c:crosses val="autoZero"/>
+        <c:auto val="1"/>
+        <c:lblAlgn val="ctr"/>
+        <c:noMultiLvlLbl val="1"/>
+        <c:tickLblSkip val="10"/>
+      </c:catAx>
+      <c:valAx>
+        <c:axId val="2094734552"/>
+        <c:scaling>
+          <c:orientation val="minMax"/>
+        </c:scaling>
+        <c:delete val="0"/>
+        <c:axPos val="l"/>
+        <c:majorGridlines>
+          <c:spPr>
+            <a:ln w="6350" cap="flat">
+              <a:solidFill>
+                <a:srgbClr val="E3E6EA"/>
+              </a:solidFill>
+              <a:prstDash val="solid"/>
+              <a:round/>
+            </a:ln>
+          </c:spPr>
+        </c:majorGridlines>
+        <c:numFmt formatCode="General" sourceLinked="0"/>
+        <c:majorTickMark val="out"/>
+        <c:minorTickMark val="none"/>
+        <c:tickLblPos val="nextTo"/>
+        <c:spPr>
+          <a:ln w="12700" cap="flat">
+            <a:solidFill>
+              <a:srgbClr val="888888"/>
+            </a:solidFill>
+            <a:prstDash val="solid"/>
+            <a:round/>
+          </a:ln>
+        </c:spPr>
+        <c:txPr>
+          <a:bodyPr/>
+          <a:lstStyle/>
+          <a:p>
+            <a:pPr>
+              <a:defRPr sz="1000" b="0" i="0" u="none" strike="noStrike">
+                <a:solidFill>
+                  <a:srgbClr val="5B6573"/>
+                </a:solidFill>
+                <a:latin typeface="Calibri"/>
+              </a:defRPr>
+            </a:pPr>
+            <a:endParaRPr lang="en-US"/>
+          </a:p>
+        </c:txPr>
+        <c:crossAx val="2094734554"/>
+        <c:crosses val="autoZero"/>
+        <c:crossBetween val="between"/>
+      </c:valAx>
+      <c:spPr>
+        <a:noFill/>
+        <a:ln>
+          <a:noFill/>
+        </a:ln>
+        <a:effectLst/>
+      </c:spPr>
+    </c:plotArea>
+    <c:plotVisOnly val="1"/>
+    <c:dispBlanksAs val="span"/>
+  </c:chart>
+  <c:spPr>
+    <a:noFill/>
+    <a:ln>
+      <a:noFill/>
+    </a:ln>
+    <a:effectLst/>
+  </c:spPr>
+  <c:externalData r:id="rId1">
+    <c:autoUpdate val="0"/>
+  </c:externalData>
+</c:chartSpace>
+</file>
+
+<file path=ppt/charts/chart11.xml><?xml version="1.0" encoding="utf-8"?>
+<c:chartSpace xmlns:c="http://schemas.openxmlformats.org/drawingml/2006/chart" xmlns:a="http://schemas.openxmlformats.org/drawingml/2006/main" xmlns:r="http://schemas.openxmlformats.org/officeDocument/2006/relationships">
+  <c:date1904 val="0"/>
+  <c:roundedCorners val="1"/>
+  <c:chart>
+    <c:title>
+      <c:tx>
+        <c:rich>
+          <a:bodyPr/>
+          <a:lstStyle/>
+          <a:p>
+            <a:pPr>
+              <a:defRPr sz="1300" b="0" i="0" u="none" strike="noStrike">
+                <a:solidFill>
+                  <a:srgbClr val="1B2433"/>
+                </a:solidFill>
+                <a:latin typeface="Calibri"/>
+              </a:defRPr>
+            </a:pPr>
+            <a:r>
+              <a:rPr sz="1300" b="0" i="0" u="none" strike="noStrike">
+                <a:solidFill>
+                  <a:srgbClr val="1B2433"/>
+                </a:solidFill>
+                <a:latin typeface="Calibri"/>
+              </a:rPr>
+              <a:t>Who saw each fire-day (10 km grid)</a:t>
+            </a:r>
+          </a:p>
+        </c:rich>
+      </c:tx>
+      <c:layout/>
+      <c:overlay val="0"/>
+    </c:title>
+    <c:autoTitleDeleted val="0"/>
+    <c:plotArea>
+      <c:layout/>
+      <c:doughnutChart>
+        <c:varyColors val="1"/>
+        <c:ser>
+          <c:idx val="0"/>
+          <c:order val="0"/>
+          <c:tx>
+            <c:strRef>
+              <c:f>Sheet1!$B$1</c:f>
+              <c:strCache>
+                <c:ptCount val="1"/>
+                <c:pt idx="0">
+                  <c:v>Fire-days</c:v>
+                </c:pt>
+              </c:strCache>
+            </c:strRef>
+          </c:tx>
+          <c:spPr>
+            <a:solidFill>
+              <a:schemeClr val="accent1"/>
+            </a:solidFill>
+            <a:ln w="9525" cap="flat">
+              <a:solidFill>
+                <a:srgbClr val="F9F9F9"/>
+              </a:solidFill>
+              <a:prstDash val="solid"/>
+              <a:round/>
+            </a:ln>
+            <a:effectLst/>
+          </c:spPr>
+          <c:dPt>
+            <c:idx val="0"/>
+            <c:bubble3D val="0"/>
+            <c:spPr>
+              <a:solidFill>
+                <a:srgbClr val="2F5D8C"/>
+              </a:solidFill>
+              <a:effectLst/>
+            </c:spPr>
+          </c:dPt>
+          <c:dPt>
+            <c:idx val="1"/>
+            <c:bubble3D val="0"/>
+            <c:spPr>
+              <a:solidFill>
+                <a:srgbClr val="D99A1E"/>
+              </a:solidFill>
+              <a:effectLst/>
+            </c:spPr>
+          </c:dPt>
+          <c:dPt>
+            <c:idx val="2"/>
+            <c:bubble3D val="0"/>
+            <c:spPr>
+              <a:solidFill>
+                <a:srgbClr val="0B1D3A"/>
+              </a:solidFill>
+              <a:effectLst/>
+            </c:spPr>
+          </c:dPt>
+          <c:dLbls>
+            <c:dLbl>
+              <c:idx val="0"/>
+              <c:numFmt formatCode="0%" sourceLinked="0"/>
+              <c:spPr/>
+              <c:txPr>
+                <a:bodyPr/>
+                <a:lstStyle/>
+                <a:p>
+                  <a:pPr>
+                    <a:defRPr sz="1100" b="0" i="0" u="none" strike="noStrike">
+                      <a:solidFill>
+                        <a:srgbClr val="FFFFFF"/>
+                      </a:solidFill>
+                      <a:latin typeface="Arial"/>
+                    </a:defRPr>
+                  </a:pPr>
+                </a:p>
+              </c:txPr>
+              <c:showLegendKey val="0"/>
+              <c:showVal val="0"/>
+              <c:showCatName val="0"/>
+              <c:showSerName val="0"/>
+              <c:showPercent val="1"/>
+              <c:showBubbleSize val="0"/>
+            </c:dLbl>
+            <c:dLbl>
+              <c:idx val="1"/>
+              <c:numFmt formatCode="0%" sourceLinked="0"/>
+              <c:spPr/>
+              <c:txPr>
+                <a:bodyPr/>
+                <a:lstStyle/>
+                <a:p>
+                  <a:pPr>
+                    <a:defRPr sz="1100" b="0" i="0" u="none" strike="noStrike">
+                      <a:solidFill>
+                        <a:srgbClr val="FFFFFF"/>
+                      </a:solidFill>
+                      <a:latin typeface="Arial"/>
+                    </a:defRPr>
+                  </a:pPr>
+                </a:p>
+              </c:txPr>
+              <c:showLegendKey val="0"/>
+              <c:showVal val="0"/>
+              <c:showCatName val="0"/>
+              <c:showSerName val="0"/>
+              <c:showPercent val="1"/>
+              <c:showBubbleSize val="0"/>
+            </c:dLbl>
+            <c:dLbl>
+              <c:idx val="2"/>
+              <c:numFmt formatCode="0%" sourceLinked="0"/>
+              <c:spPr/>
+              <c:txPr>
+                <a:bodyPr/>
+                <a:lstStyle/>
+                <a:p>
+                  <a:pPr>
+                    <a:defRPr sz="1100" b="0" i="0" u="none" strike="noStrike">
+                      <a:solidFill>
+                        <a:srgbClr val="FFFFFF"/>
+                      </a:solidFill>
+                      <a:latin typeface="Arial"/>
+                    </a:defRPr>
+                  </a:pPr>
+                </a:p>
+              </c:txPr>
+              <c:showLegendKey val="0"/>
+              <c:showVal val="0"/>
+              <c:showCatName val="0"/>
+              <c:showSerName val="0"/>
+              <c:showPercent val="1"/>
+              <c:showBubbleSize val="0"/>
+            </c:dLbl>
+            <c:numFmt formatCode="0%" sourceLinked="0"/>
+            <c:txPr>
+              <a:bodyPr/>
+              <a:lstStyle/>
+              <a:p>
+                <a:pPr>
+                  <a:defRPr sz="1800" b="0" i="0" u="none" strike="noStrike">
+                    <a:solidFill>
+                      <a:srgbClr val="000000"/>
+                    </a:solidFill>
+                    <a:latin typeface="Arial"/>
+                  </a:defRPr>
+                </a:pPr>
+              </a:p>
+            </c:txPr>
+            <c:showLegendKey val="0"/>
+            <c:showVal val="0"/>
+            <c:showCatName val="1"/>
+            <c:showSerName val="0"/>
+            <c:showPercent val="1"/>
+            <c:showBubbleSize val="0"/>
+            <c:showLeaderLines val="0"/>
+          </c:dLbls>
+          <c:cat>
+            <c:strRef>
+              <c:f>Sheet1!$A$2:$A$4</c:f>
+              <c:strCache>
+                <c:ptCount val="3"/>
+                <c:pt idx="0">
+                  <c:v>Aqua only</c:v>
+                </c:pt>
+                <c:pt idx="1">
+                  <c:v>Terra only</c:v>
+                </c:pt>
+                <c:pt idx="2">
+                  <c:v>Both</c:v>
+                </c:pt>
+              </c:strCache>
+            </c:strRef>
+          </c:cat>
+          <c:val>
+            <c:numRef>
+              <c:f>Sheet1!$B$2:$B$4</c:f>
+              <c:numCache>
+                <c:ptCount val="3"/>
+                <c:pt idx="0">
+                  <c:v>45.5</c:v>
+                </c:pt>
+                <c:pt idx="1">
+                  <c:v>38.5</c:v>
+                </c:pt>
+                <c:pt idx="2">
+                  <c:v>16</c:v>
+                </c:pt>
+              </c:numCache>
+            </c:numRef>
+          </c:val>
+        </c:ser>
+        <c:firstSliceAng val="0"/>
+        <c:holeSize val="55"/>
+      </c:doughnutChart>
+      <c:spPr>
+        <a:noFill/>
+        <a:ln>
+          <a:noFill/>
+        </a:ln>
+        <a:effectLst/>
+      </c:spPr>
+    </c:plotArea>
+    <c:legend>
+      <c:legendPos val="r"/>
+      <c:overlay val="0"/>
+      <c:txPr>
+        <a:bodyPr/>
+        <a:lstStyle/>
+        <a:p>
+          <a:pPr>
+            <a:defRPr sz="1100">      </a:defRPr>
+          </a:pPr>
+          <a:endParaRPr lang="en-US"/>
+        </a:p>
+      </c:txPr>
+    </c:legend>
+    <c:plotVisOnly val="1"/>
+    <c:dispBlanksAs val="span"/>
+  </c:chart>
+  <c:spPr>
+    <a:noFill/>
+    <a:ln>
+      <a:noFill/>
+    </a:ln>
+    <a:effectLst/>
+  </c:spPr>
+  <c:externalData r:id="rId1">
+    <c:autoUpdate val="0"/>
+  </c:externalData>
+</c:chartSpace>
+</file>
+
+<file path=ppt/charts/chart12.xml><?xml version="1.0" encoding="utf-8"?>
+<c:chartSpace xmlns:c="http://schemas.openxmlformats.org/drawingml/2006/chart" xmlns:a="http://schemas.openxmlformats.org/drawingml/2006/main" xmlns:r="http://schemas.openxmlformats.org/officeDocument/2006/relationships">
+  <c:date1904 val="0"/>
+  <c:roundedCorners val="1"/>
+  <c:chart>
+    <c:title>
+      <c:tx>
+        <c:rich>
+          <a:bodyPr/>
+          <a:lstStyle/>
+          <a:p>
+            <a:pPr>
+              <a:defRPr sz="1300" b="0" i="0" u="none" strike="noStrike">
+                <a:solidFill>
+                  <a:srgbClr val="1B2433"/>
+                </a:solidFill>
+                <a:latin typeface="Calibri"/>
+              </a:defRPr>
+            </a:pPr>
+            <a:r>
+              <a:rPr sz="1300" b="0" i="0" u="none" strike="noStrike">
+                <a:solidFill>
+                  <a:srgbClr val="1B2433"/>
+                </a:solidFill>
+                <a:latin typeface="Calibri"/>
+              </a:rPr>
               <a:t>Satellites in orbit, 2000-2030</a:t>
             </a:r>
           </a:p>
@@ -1142,7 +2055,7 @@
 </c:chartSpace>
 </file>
 
-<file path=ppt/charts/chart11.xml><?xml version="1.0" encoding="utf-8"?>
+<file path=ppt/charts/chart13.xml><?xml version="1.0" encoding="utf-8"?>
 <c:chartSpace xmlns:c="http://schemas.openxmlformats.org/drawingml/2006/chart" xmlns:a="http://schemas.openxmlformats.org/drawingml/2006/main" xmlns:r="http://schemas.openxmlformats.org/officeDocument/2006/relationships">
   <c:date1904 val="0"/>
   <c:roundedCorners val="1"/>
@@ -4034,6 +4947,275 @@
                 </a:solidFill>
                 <a:latin typeface="Calibri"/>
               </a:rPr>
+              <a:t>Close approaches under 5 km in 24 hours (SGP4 screening)</a:t>
+            </a:r>
+          </a:p>
+        </c:rich>
+      </c:tx>
+      <c:layout/>
+      <c:overlay val="0"/>
+    </c:title>
+    <c:autoTitleDeleted val="0"/>
+    <c:plotArea>
+      <c:layout/>
+      <c:barChart>
+        <c:barDir val="bar"/>
+        <c:grouping val="clustered"/>
+        <c:varyColors val="0"/>
+        <c:ser>
+          <c:idx val="0"/>
+          <c:order val="0"/>
+          <c:tx>
+            <c:strRef>
+              <c:f>Sheet1!$B$1</c:f>
+              <c:strCache>
+                <c:ptCount val="1"/>
+                <c:pt idx="0">
+                  <c:v>Encounters &lt; 5 km</c:v>
+                </c:pt>
+              </c:strCache>
+            </c:strRef>
+          </c:tx>
+          <c:spPr>
+            <a:solidFill>
+              <a:srgbClr val="2F5D8C"/>
+            </a:solidFill>
+            <a:effectLst/>
+          </c:spPr>
+          <c:invertIfNegative val="0"/>
+          <c:dLbls>
+            <c:numFmt formatCode="#,##0" sourceLinked="0"/>
+            <c:txPr>
+              <a:bodyPr/>
+              <a:lstStyle/>
+              <a:p>
+                <a:pPr>
+                  <a:defRPr b="0" i="0" strike="noStrike" sz="1200" u="none">
+                    <a:solidFill>
+                      <a:srgbClr val="1B2433"/>
+                    </a:solidFill>
+                    <a:latin typeface="Arial"/>
+                  </a:defRPr>
+                </a:pPr>
+              </a:p>
+            </c:txPr>
+            <c:showLegendKey val="0"/>
+            <c:showVal val="1"/>
+            <c:showCatName val="0"/>
+            <c:showSerName val="0"/>
+            <c:showPercent val="0"/>
+            <c:showBubbleSize val="0"/>
+            <c:showLeaderLines val="0"/>
+          </c:dLbls>
+          <c:cat>
+            <c:multiLvlStrRef>
+              <c:f>Sheet1!$A$2:$A$4</c:f>
+              <c:multiLvlStrCache>
+                <c:ptCount val="3"/>
+                <c:lvl>
+                  <c:pt idx="0">
+                    <c:v>Different operators, crossing</c:v>
+                  </c:pt>
+                  <c:pt idx="1">
+                    <c:v>Same constellation, crossing</c:v>
+                  </c:pt>
+                  <c:pt idx="2">
+                    <c:v>Satellite vs debris</c:v>
+                  </c:pt>
+                </c:lvl>
+              </c:multiLvlStrCache>
+            </c:multiLvlStrRef>
+          </c:cat>
+          <c:val>
+            <c:numRef>
+              <c:f>Sheet1!$B$2:$B$4</c:f>
+              <c:numCache>
+                <c:formatCode>General</c:formatCode>
+                <c:ptCount val="3"/>
+                <c:pt idx="0">
+                  <c:v>5043</c:v>
+                </c:pt>
+                <c:pt idx="1">
+                  <c:v>12844</c:v>
+                </c:pt>
+                <c:pt idx="2">
+                  <c:v>468</c:v>
+                </c:pt>
+              </c:numCache>
+            </c:numRef>
+          </c:val>
+        </c:ser>
+        <c:dLbls>
+          <c:numFmt formatCode="#,##0" sourceLinked="0"/>
+          <c:txPr>
+            <a:bodyPr/>
+            <a:lstStyle/>
+            <a:p>
+              <a:pPr>
+                <a:defRPr b="0" i="0" strike="noStrike" sz="1200" u="none">
+                  <a:solidFill>
+                    <a:srgbClr val="1B2433"/>
+                  </a:solidFill>
+                  <a:latin typeface="Arial"/>
+                </a:defRPr>
+              </a:pPr>
+            </a:p>
+          </c:txPr>
+          <c:showLegendKey val="0"/>
+          <c:showVal val="1"/>
+          <c:showCatName val="0"/>
+          <c:showSerName val="0"/>
+          <c:showPercent val="0"/>
+          <c:showBubbleSize val="0"/>
+          <c:showLeaderLines val="0"/>
+        </c:dLbls>
+        <c:gapWidth val="150"/>
+        <c:overlap val="0"/>
+        <c:axId val="2094734554"/>
+        <c:axId val="2094734552"/>
+        <c:axId val="2094734556"/>
+      </c:barChart>
+      <c:catAx>
+        <c:axId val="2094734554"/>
+        <c:scaling>
+          <c:orientation val="minMax"/>
+        </c:scaling>
+        <c:delete val="0"/>
+        <c:axPos val="l"/>
+        <c:numFmt formatCode="General" sourceLinked="1"/>
+        <c:majorTickMark val="out"/>
+        <c:minorTickMark val="none"/>
+        <c:tickLblPos val="nextTo"/>
+        <c:spPr>
+          <a:ln w="12700" cap="flat">
+            <a:solidFill>
+              <a:srgbClr val="888888"/>
+            </a:solidFill>
+            <a:prstDash val="solid"/>
+            <a:round/>
+          </a:ln>
+        </c:spPr>
+        <c:txPr>
+          <a:bodyPr/>
+          <a:lstStyle/>
+          <a:p>
+            <a:pPr>
+              <a:defRPr sz="1000" b="0" i="0" u="none" strike="noStrike">
+                <a:solidFill>
+                  <a:srgbClr val="5B6573"/>
+                </a:solidFill>
+                <a:latin typeface="Calibri"/>
+              </a:defRPr>
+            </a:pPr>
+            <a:endParaRPr lang="en-US"/>
+          </a:p>
+        </c:txPr>
+        <c:crossAx val="2094734552"/>
+        <c:crosses val="autoZero"/>
+        <c:auto val="1"/>
+        <c:lblAlgn val="ctr"/>
+        <c:noMultiLvlLbl val="1"/>
+      </c:catAx>
+      <c:valAx>
+        <c:axId val="2094734552"/>
+        <c:scaling>
+          <c:orientation val="minMax"/>
+        </c:scaling>
+        <c:delete val="0"/>
+        <c:axPos val="b"/>
+        <c:majorGridlines>
+          <c:spPr>
+            <a:ln w="6350" cap="flat">
+              <a:solidFill>
+                <a:srgbClr val="E3E6EA"/>
+              </a:solidFill>
+              <a:prstDash val="solid"/>
+              <a:round/>
+            </a:ln>
+          </c:spPr>
+        </c:majorGridlines>
+        <c:numFmt formatCode="#,##0" sourceLinked="0"/>
+        <c:majorTickMark val="out"/>
+        <c:minorTickMark val="none"/>
+        <c:tickLblPos val="low"/>
+        <c:spPr>
+          <a:ln w="12700" cap="flat">
+            <a:solidFill>
+              <a:srgbClr val="888888"/>
+            </a:solidFill>
+            <a:prstDash val="solid"/>
+            <a:round/>
+          </a:ln>
+        </c:spPr>
+        <c:txPr>
+          <a:bodyPr/>
+          <a:lstStyle/>
+          <a:p>
+            <a:pPr>
+              <a:defRPr sz="1000" b="0" i="0" u="none" strike="noStrike">
+                <a:solidFill>
+                  <a:srgbClr val="5B6573"/>
+                </a:solidFill>
+                <a:latin typeface="Calibri"/>
+              </a:defRPr>
+            </a:pPr>
+            <a:endParaRPr lang="en-US"/>
+          </a:p>
+        </c:txPr>
+        <c:crossAx val="2094734554"/>
+        <c:crosses val="autoZero"/>
+        <c:crossBetween val="between"/>
+      </c:valAx>
+      <c:spPr>
+        <a:noFill/>
+        <a:ln>
+          <a:noFill/>
+        </a:ln>
+        <a:effectLst/>
+      </c:spPr>
+    </c:plotArea>
+    <c:plotVisOnly val="1"/>
+    <c:dispBlanksAs val="span"/>
+  </c:chart>
+  <c:spPr>
+    <a:noFill/>
+    <a:ln>
+      <a:noFill/>
+    </a:ln>
+    <a:effectLst/>
+  </c:spPr>
+  <c:externalData r:id="rId1">
+    <c:autoUpdate val="0"/>
+  </c:externalData>
+</c:chartSpace>
+</file>
+
+<file path=ppt/charts/chart7.xml><?xml version="1.0" encoding="utf-8"?>
+<c:chartSpace xmlns:c="http://schemas.openxmlformats.org/drawingml/2006/chart" xmlns:a="http://schemas.openxmlformats.org/drawingml/2006/main" xmlns:r="http://schemas.openxmlformats.org/officeDocument/2006/relationships">
+  <c:date1904 val="0"/>
+  <c:roundedCorners val="1"/>
+  <c:chart>
+    <c:title>
+      <c:tx>
+        <c:rich>
+          <a:bodyPr/>
+          <a:lstStyle/>
+          <a:p>
+            <a:pPr>
+              <a:defRPr sz="1300" b="0" i="0" u="none" strike="noStrike">
+                <a:solidFill>
+                  <a:srgbClr val="1B2433"/>
+                </a:solidFill>
+                <a:latin typeface="Calibri"/>
+              </a:defRPr>
+            </a:pPr>
+            <a:r>
+              <a:rPr sz="1300" b="0" i="0" u="none" strike="noStrike">
+                <a:solidFill>
+                  <a:srgbClr val="1B2433"/>
+                </a:solidFill>
+                <a:latin typeface="Calibri"/>
+              </a:rPr>
               <a:t>Military, state-ISR and imaging satellites working, Sep 2026 (name-based lower bound)</a:t>
             </a:r>
           </a:p>
@@ -4289,7 +5471,387 @@
 </c:chartSpace>
 </file>
 
-<file path=ppt/charts/chart7.xml><?xml version="1.0" encoding="utf-8"?>
+<file path=ppt/charts/chart8.xml><?xml version="1.0" encoding="utf-8"?>
+<c:chartSpace xmlns:c="http://schemas.openxmlformats.org/drawingml/2006/chart" xmlns:a="http://schemas.openxmlformats.org/drawingml/2006/main" xmlns:r="http://schemas.openxmlformats.org/officeDocument/2006/relationships">
+  <c:date1904 val="0"/>
+  <c:roundedCorners val="1"/>
+  <c:chart>
+    <c:title>
+      <c:tx>
+        <c:rich>
+          <a:bodyPr/>
+          <a:lstStyle/>
+          <a:p>
+            <a:pPr>
+              <a:defRPr sz="1300" b="0" i="0" u="none" strike="noStrike">
+                <a:solidFill>
+                  <a:srgbClr val="1B2433"/>
+                </a:solidFill>
+                <a:latin typeface="Calibri"/>
+              </a:defRPr>
+            </a:pPr>
+            <a:r>
+              <a:rPr sz="1300" b="0" i="0" u="none" strike="noStrike">
+                <a:solidFill>
+                  <a:srgbClr val="1B2433"/>
+                </a:solidFill>
+                <a:latin typeface="Calibri"/>
+              </a:rPr>
+              <a:t>ROC-AUC (0.5 = coin toss): the honest out-of-time test picks the simpler model</a:t>
+            </a:r>
+          </a:p>
+        </c:rich>
+      </c:tx>
+      <c:layout/>
+      <c:overlay val="0"/>
+    </c:title>
+    <c:autoTitleDeleted val="0"/>
+    <c:plotArea>
+      <c:layout/>
+      <c:barChart>
+        <c:barDir val="col"/>
+        <c:grouping val="clustered"/>
+        <c:varyColors val="0"/>
+        <c:ser>
+          <c:idx val="0"/>
+          <c:order val="0"/>
+          <c:tx>
+            <c:strRef>
+              <c:f>Sheet1!$B$1</c:f>
+              <c:strCache>
+                <c:ptCount val="1"/>
+                <c:pt idx="0">
+                  <c:v>Cross-validation 2014</c:v>
+                </c:pt>
+              </c:strCache>
+            </c:strRef>
+          </c:tx>
+          <c:spPr>
+            <a:solidFill>
+              <a:srgbClr val="9AA3AE"/>
+            </a:solidFill>
+            <a:effectLst/>
+          </c:spPr>
+          <c:invertIfNegative val="0"/>
+          <c:dLbls>
+            <c:numFmt formatCode="0.00" sourceLinked="0"/>
+            <c:txPr>
+              <a:bodyPr/>
+              <a:lstStyle/>
+              <a:p>
+                <a:pPr>
+                  <a:defRPr b="0" i="0" strike="noStrike" sz="1100" u="none">
+                    <a:solidFill>
+                      <a:srgbClr val="1B2433"/>
+                    </a:solidFill>
+                    <a:latin typeface="Arial"/>
+                  </a:defRPr>
+                </a:pPr>
+              </a:p>
+            </c:txPr>
+            <c:showLegendKey val="0"/>
+            <c:showVal val="1"/>
+            <c:showCatName val="0"/>
+            <c:showSerName val="0"/>
+            <c:showPercent val="0"/>
+            <c:showBubbleSize val="0"/>
+            <c:showLeaderLines val="0"/>
+          </c:dLbls>
+          <c:cat>
+            <c:multiLvlStrRef>
+              <c:f>Sheet1!$A$2:$A$5</c:f>
+              <c:multiLvlStrCache>
+                <c:ptCount val="4"/>
+                <c:lvl>
+                  <c:pt idx="0">
+                    <c:v>Physics, logistic</c:v>
+                  </c:pt>
+                  <c:pt idx="1">
+                    <c:v>Physics, trees</c:v>
+                  </c:pt>
+                  <c:pt idx="2">
+                    <c:v>Physics + country, logistic</c:v>
+                  </c:pt>
+                  <c:pt idx="3">
+                    <c:v>Physics + country, trees</c:v>
+                  </c:pt>
+                </c:lvl>
+              </c:multiLvlStrCache>
+            </c:multiLvlStrRef>
+          </c:cat>
+          <c:val>
+            <c:numRef>
+              <c:f>Sheet1!$B$2:$B$5</c:f>
+              <c:numCache>
+                <c:formatCode>General</c:formatCode>
+                <c:ptCount val="4"/>
+                <c:pt idx="0">
+                  <c:v>0.835</c:v>
+                </c:pt>
+                <c:pt idx="1">
+                  <c:v>0.941</c:v>
+                </c:pt>
+                <c:pt idx="2">
+                  <c:v>0.845</c:v>
+                </c:pt>
+                <c:pt idx="3">
+                  <c:v>0.942</c:v>
+                </c:pt>
+              </c:numCache>
+            </c:numRef>
+          </c:val>
+        </c:ser>
+        <c:ser>
+          <c:idx val="1"/>
+          <c:order val="1"/>
+          <c:tx>
+            <c:strRef>
+              <c:f>Sheet1!$C$1</c:f>
+              <c:strCache>
+                <c:ptCount val="1"/>
+                <c:pt idx="0">
+                  <c:v>Out-of-time (2014-2020 launches)</c:v>
+                </c:pt>
+              </c:strCache>
+            </c:strRef>
+          </c:tx>
+          <c:spPr>
+            <a:solidFill>
+              <a:srgbClr val="0B1D3A"/>
+            </a:solidFill>
+            <a:effectLst/>
+          </c:spPr>
+          <c:invertIfNegative val="0"/>
+          <c:dLbls>
+            <c:numFmt formatCode="0.00" sourceLinked="0"/>
+            <c:txPr>
+              <a:bodyPr/>
+              <a:lstStyle/>
+              <a:p>
+                <a:pPr>
+                  <a:defRPr b="0" i="0" strike="noStrike" sz="1100" u="none">
+                    <a:solidFill>
+                      <a:srgbClr val="1B2433"/>
+                    </a:solidFill>
+                    <a:latin typeface="Arial"/>
+                  </a:defRPr>
+                </a:pPr>
+              </a:p>
+            </c:txPr>
+            <c:showLegendKey val="0"/>
+            <c:showVal val="1"/>
+            <c:showCatName val="0"/>
+            <c:showSerName val="0"/>
+            <c:showPercent val="0"/>
+            <c:showBubbleSize val="0"/>
+            <c:showLeaderLines val="0"/>
+          </c:dLbls>
+          <c:cat>
+            <c:multiLvlStrRef>
+              <c:f>Sheet1!$A$2:$A$5</c:f>
+              <c:multiLvlStrCache>
+                <c:ptCount val="4"/>
+                <c:lvl>
+                  <c:pt idx="0">
+                    <c:v>Physics, logistic</c:v>
+                  </c:pt>
+                  <c:pt idx="1">
+                    <c:v>Physics, trees</c:v>
+                  </c:pt>
+                  <c:pt idx="2">
+                    <c:v>Physics + country, logistic</c:v>
+                  </c:pt>
+                  <c:pt idx="3">
+                    <c:v>Physics + country, trees</c:v>
+                  </c:pt>
+                </c:lvl>
+              </c:multiLvlStrCache>
+            </c:multiLvlStrRef>
+          </c:cat>
+          <c:val>
+            <c:numRef>
+              <c:f>Sheet1!$C$2:$C$5</c:f>
+              <c:numCache>
+                <c:formatCode>General</c:formatCode>
+                <c:ptCount val="4"/>
+                <c:pt idx="0">
+                  <c:v>0.793</c:v>
+                </c:pt>
+                <c:pt idx="1">
+                  <c:v>0.644</c:v>
+                </c:pt>
+                <c:pt idx="2">
+                  <c:v>0.759</c:v>
+                </c:pt>
+                <c:pt idx="3">
+                  <c:v>0.634</c:v>
+                </c:pt>
+              </c:numCache>
+            </c:numRef>
+          </c:val>
+        </c:ser>
+        <c:dLbls>
+          <c:numFmt formatCode="0.00" sourceLinked="0"/>
+          <c:txPr>
+            <a:bodyPr/>
+            <a:lstStyle/>
+            <a:p>
+              <a:pPr>
+                <a:defRPr b="0" i="0" strike="noStrike" sz="1100" u="none">
+                  <a:solidFill>
+                    <a:srgbClr val="1B2433"/>
+                  </a:solidFill>
+                  <a:latin typeface="Arial"/>
+                </a:defRPr>
+              </a:pPr>
+            </a:p>
+          </c:txPr>
+          <c:showLegendKey val="0"/>
+          <c:showVal val="1"/>
+          <c:showCatName val="0"/>
+          <c:showSerName val="0"/>
+          <c:showPercent val="0"/>
+          <c:showBubbleSize val="0"/>
+          <c:showLeaderLines val="0"/>
+        </c:dLbls>
+        <c:gapWidth val="150"/>
+        <c:overlap val="0"/>
+        <c:axId val="2094734554"/>
+        <c:axId val="2094734552"/>
+        <c:axId val="2094734556"/>
+      </c:barChart>
+      <c:catAx>
+        <c:axId val="2094734554"/>
+        <c:scaling>
+          <c:orientation val="minMax"/>
+        </c:scaling>
+        <c:delete val="0"/>
+        <c:axPos val="b"/>
+        <c:numFmt formatCode="General" sourceLinked="1"/>
+        <c:majorTickMark val="out"/>
+        <c:minorTickMark val="none"/>
+        <c:tickLblPos val="low"/>
+        <c:spPr>
+          <a:ln w="12700" cap="flat">
+            <a:solidFill>
+              <a:srgbClr val="888888"/>
+            </a:solidFill>
+            <a:prstDash val="solid"/>
+            <a:round/>
+          </a:ln>
+        </c:spPr>
+        <c:txPr>
+          <a:bodyPr/>
+          <a:lstStyle/>
+          <a:p>
+            <a:pPr>
+              <a:defRPr sz="1000" b="0" i="0" u="none" strike="noStrike">
+                <a:solidFill>
+                  <a:srgbClr val="5B6573"/>
+                </a:solidFill>
+                <a:latin typeface="Calibri"/>
+              </a:defRPr>
+            </a:pPr>
+            <a:endParaRPr lang="en-US"/>
+          </a:p>
+        </c:txPr>
+        <c:crossAx val="2094734552"/>
+        <c:crosses val="autoZero"/>
+        <c:auto val="1"/>
+        <c:lblAlgn val="ctr"/>
+        <c:noMultiLvlLbl val="1"/>
+      </c:catAx>
+      <c:valAx>
+        <c:axId val="2094734552"/>
+        <c:scaling>
+          <c:orientation val="minMax"/>
+          <c:max val="1"/>
+          <c:min val="0.5"/>
+        </c:scaling>
+        <c:delete val="0"/>
+        <c:axPos val="l"/>
+        <c:majorGridlines>
+          <c:spPr>
+            <a:ln w="6350" cap="flat">
+              <a:solidFill>
+                <a:srgbClr val="E3E6EA"/>
+              </a:solidFill>
+              <a:prstDash val="solid"/>
+              <a:round/>
+            </a:ln>
+          </c:spPr>
+        </c:majorGridlines>
+        <c:numFmt formatCode="General" sourceLinked="0"/>
+        <c:majorTickMark val="out"/>
+        <c:minorTickMark val="none"/>
+        <c:tickLblPos val="nextTo"/>
+        <c:spPr>
+          <a:ln w="12700" cap="flat">
+            <a:solidFill>
+              <a:srgbClr val="888888"/>
+            </a:solidFill>
+            <a:prstDash val="solid"/>
+            <a:round/>
+          </a:ln>
+        </c:spPr>
+        <c:txPr>
+          <a:bodyPr/>
+          <a:lstStyle/>
+          <a:p>
+            <a:pPr>
+              <a:defRPr sz="1000" b="0" i="0" u="none" strike="noStrike">
+                <a:solidFill>
+                  <a:srgbClr val="5B6573"/>
+                </a:solidFill>
+                <a:latin typeface="Calibri"/>
+              </a:defRPr>
+            </a:pPr>
+            <a:endParaRPr lang="en-US"/>
+          </a:p>
+        </c:txPr>
+        <c:crossAx val="2094734554"/>
+        <c:crosses val="autoZero"/>
+        <c:crossBetween val="between"/>
+      </c:valAx>
+      <c:spPr>
+        <a:noFill/>
+        <a:ln>
+          <a:noFill/>
+        </a:ln>
+        <a:effectLst/>
+      </c:spPr>
+    </c:plotArea>
+    <c:legend>
+      <c:legendPos val="t"/>
+      <c:overlay val="0"/>
+      <c:txPr>
+        <a:bodyPr/>
+        <a:lstStyle/>
+        <a:p>
+          <a:pPr>
+            <a:defRPr sz="1100">      </a:defRPr>
+          </a:pPr>
+          <a:endParaRPr lang="en-US"/>
+        </a:p>
+      </c:txPr>
+    </c:legend>
+    <c:plotVisOnly val="1"/>
+    <c:dispBlanksAs val="span"/>
+  </c:chart>
+  <c:spPr>
+    <a:noFill/>
+    <a:ln>
+      <a:noFill/>
+    </a:ln>
+    <a:effectLst/>
+  </c:spPr>
+  <c:externalData r:id="rId1">
+    <c:autoUpdate val="0"/>
+  </c:externalData>
+</c:chartSpace>
+</file>
+
+<file path=ppt/charts/chart9.xml><?xml version="1.0" encoding="utf-8"?>
 <c:chartSpace xmlns:c="http://schemas.openxmlformats.org/drawingml/2006/chart" xmlns:a="http://schemas.openxmlformats.org/drawingml/2006/main" xmlns:r="http://schemas.openxmlformats.org/officeDocument/2006/relationships">
   <c:date1904 val="0"/>
   <c:roundedCorners val="1"/>
@@ -4577,917 +6139,6 @@
         <a:effectLst/>
       </c:spPr>
     </c:plotArea>
-    <c:plotVisOnly val="1"/>
-    <c:dispBlanksAs val="span"/>
-  </c:chart>
-  <c:spPr>
-    <a:noFill/>
-    <a:ln>
-      <a:noFill/>
-    </a:ln>
-    <a:effectLst/>
-  </c:spPr>
-  <c:externalData r:id="rId1">
-    <c:autoUpdate val="0"/>
-  </c:externalData>
-</c:chartSpace>
-</file>
-
-<file path=ppt/charts/chart8.xml><?xml version="1.0" encoding="utf-8"?>
-<c:chartSpace xmlns:c="http://schemas.openxmlformats.org/drawingml/2006/chart" xmlns:a="http://schemas.openxmlformats.org/drawingml/2006/main" xmlns:r="http://schemas.openxmlformats.org/officeDocument/2006/relationships">
-  <c:date1904 val="0"/>
-  <c:roundedCorners val="1"/>
-  <c:chart>
-    <c:title>
-      <c:tx>
-        <c:rich>
-          <a:bodyPr/>
-          <a:lstStyle/>
-          <a:p>
-            <a:pPr>
-              <a:defRPr sz="1300" b="0" i="0" u="none" strike="noStrike">
-                <a:solidFill>
-                  <a:srgbClr val="1B2433"/>
-                </a:solidFill>
-                <a:latin typeface="Calibri"/>
-              </a:defRPr>
-            </a:pPr>
-            <a:r>
-              <a:rPr sz="1300" b="0" i="0" u="none" strike="noStrike">
-                <a:solidFill>
-                  <a:srgbClr val="1B2433"/>
-                </a:solidFill>
-                <a:latin typeface="Calibri"/>
-              </a:rPr>
-              <a:t>Low-orbit debris re-entering per year (%): a 12-year cycle</a:t>
-            </a:r>
-          </a:p>
-        </c:rich>
-      </c:tx>
-      <c:layout/>
-      <c:overlay val="0"/>
-    </c:title>
-    <c:autoTitleDeleted val="0"/>
-    <c:plotArea>
-      <c:layout/>
-      <c:lineChart>
-        <c:varyColors val="0"/>
-        <c:ser>
-          <c:idx val="0"/>
-          <c:order val="0"/>
-          <c:tx>
-            <c:strRef>
-              <c:f>Sheet1!$B$1</c:f>
-              <c:strCache>
-                <c:ptCount val="1"/>
-                <c:pt idx="0">
-                  <c:v>Re-entry rate %</c:v>
-                </c:pt>
-              </c:strCache>
-            </c:strRef>
-          </c:tx>
-          <c:spPr>
-            <a:solidFill>
-              <a:srgbClr val="2F5D8C"/>
-            </a:solidFill>
-            <a:ln w="25400" cap="flat">
-              <a:solidFill>
-                <a:srgbClr val="2F5D8C"/>
-              </a:solidFill>
-              <a:prstDash val="solid"/>
-              <a:round/>
-            </a:ln>
-            <a:effectLst/>
-          </c:spPr>
-          <c:invertIfNegative val="0"/>
-          <c:dLbls>
-            <c:numFmt formatCode="#,##0" sourceLinked="0"/>
-            <c:txPr>
-              <a:bodyPr/>
-              <a:lstStyle/>
-              <a:p>
-                <a:pPr>
-                  <a:defRPr b="0" i="0" strike="noStrike" sz="1200" u="none">
-                    <a:solidFill>
-                      <a:srgbClr val="000000"/>
-                    </a:solidFill>
-                    <a:latin typeface="Arial"/>
-                  </a:defRPr>
-                </a:pPr>
-              </a:p>
-            </c:txPr>
-            <c:showLegendKey val="0"/>
-            <c:showVal val="0"/>
-            <c:showCatName val="0"/>
-            <c:showSerName val="0"/>
-            <c:showPercent val="0"/>
-            <c:showBubbleSize val="0"/>
-            <c:showLeaderLines val="0"/>
-          </c:dLbls>
-          <c:marker>
-            <c:symbol val="none"/>
-            <c:size val="6"/>
-            <c:spPr>
-              <a:solidFill>
-                <a:srgbClr val="2F5D8C"/>
-              </a:solidFill>
-              <a:ln w="9525" cap="flat">
-                <a:solidFill>
-                  <a:srgbClr val="2F5D8C"/>
-                </a:solidFill>
-                <a:prstDash val="solid"/>
-                <a:round/>
-              </a:ln>
-              <a:effectLst/>
-            </c:spPr>
-          </c:marker>
-          <c:cat>
-            <c:multiLvlStrRef>
-              <c:f>Sheet1!$A$2:$A$62</c:f>
-              <c:multiLvlStrCache>
-                <c:ptCount val="61"/>
-                <c:lvl>
-                  <c:pt idx="0">
-                    <c:v>1965</c:v>
-                  </c:pt>
-                  <c:pt idx="1">
-                    <c:v>1966</c:v>
-                  </c:pt>
-                  <c:pt idx="2">
-                    <c:v>1967</c:v>
-                  </c:pt>
-                  <c:pt idx="3">
-                    <c:v>1968</c:v>
-                  </c:pt>
-                  <c:pt idx="4">
-                    <c:v>1969</c:v>
-                  </c:pt>
-                  <c:pt idx="5">
-                    <c:v>1970</c:v>
-                  </c:pt>
-                  <c:pt idx="6">
-                    <c:v>1971</c:v>
-                  </c:pt>
-                  <c:pt idx="7">
-                    <c:v>1972</c:v>
-                  </c:pt>
-                  <c:pt idx="8">
-                    <c:v>1973</c:v>
-                  </c:pt>
-                  <c:pt idx="9">
-                    <c:v>1974</c:v>
-                  </c:pt>
-                  <c:pt idx="10">
-                    <c:v>1975</c:v>
-                  </c:pt>
-                  <c:pt idx="11">
-                    <c:v>1976</c:v>
-                  </c:pt>
-                  <c:pt idx="12">
-                    <c:v>1977</c:v>
-                  </c:pt>
-                  <c:pt idx="13">
-                    <c:v>1978</c:v>
-                  </c:pt>
-                  <c:pt idx="14">
-                    <c:v>1979</c:v>
-                  </c:pt>
-                  <c:pt idx="15">
-                    <c:v>1980</c:v>
-                  </c:pt>
-                  <c:pt idx="16">
-                    <c:v>1981</c:v>
-                  </c:pt>
-                  <c:pt idx="17">
-                    <c:v>1982</c:v>
-                  </c:pt>
-                  <c:pt idx="18">
-                    <c:v>1983</c:v>
-                  </c:pt>
-                  <c:pt idx="19">
-                    <c:v>1984</c:v>
-                  </c:pt>
-                  <c:pt idx="20">
-                    <c:v>1985</c:v>
-                  </c:pt>
-                  <c:pt idx="21">
-                    <c:v>1986</c:v>
-                  </c:pt>
-                  <c:pt idx="22">
-                    <c:v>1987</c:v>
-                  </c:pt>
-                  <c:pt idx="23">
-                    <c:v>1988</c:v>
-                  </c:pt>
-                  <c:pt idx="24">
-                    <c:v>1989</c:v>
-                  </c:pt>
-                  <c:pt idx="25">
-                    <c:v>1990</c:v>
-                  </c:pt>
-                  <c:pt idx="26">
-                    <c:v>1991</c:v>
-                  </c:pt>
-                  <c:pt idx="27">
-                    <c:v>1992</c:v>
-                  </c:pt>
-                  <c:pt idx="28">
-                    <c:v>1993</c:v>
-                  </c:pt>
-                  <c:pt idx="29">
-                    <c:v>1994</c:v>
-                  </c:pt>
-                  <c:pt idx="30">
-                    <c:v>1995</c:v>
-                  </c:pt>
-                  <c:pt idx="31">
-                    <c:v>1996</c:v>
-                  </c:pt>
-                  <c:pt idx="32">
-                    <c:v>1997</c:v>
-                  </c:pt>
-                  <c:pt idx="33">
-                    <c:v>1998</c:v>
-                  </c:pt>
-                  <c:pt idx="34">
-                    <c:v>1999</c:v>
-                  </c:pt>
-                  <c:pt idx="35">
-                    <c:v>2000</c:v>
-                  </c:pt>
-                  <c:pt idx="36">
-                    <c:v>2001</c:v>
-                  </c:pt>
-                  <c:pt idx="37">
-                    <c:v>2002</c:v>
-                  </c:pt>
-                  <c:pt idx="38">
-                    <c:v>2003</c:v>
-                  </c:pt>
-                  <c:pt idx="39">
-                    <c:v>2004</c:v>
-                  </c:pt>
-                  <c:pt idx="40">
-                    <c:v>2005</c:v>
-                  </c:pt>
-                  <c:pt idx="41">
-                    <c:v>2006</c:v>
-                  </c:pt>
-                  <c:pt idx="42">
-                    <c:v>2007</c:v>
-                  </c:pt>
-                  <c:pt idx="43">
-                    <c:v>2008</c:v>
-                  </c:pt>
-                  <c:pt idx="44">
-                    <c:v>2009</c:v>
-                  </c:pt>
-                  <c:pt idx="45">
-                    <c:v>2010</c:v>
-                  </c:pt>
-                  <c:pt idx="46">
-                    <c:v>2011</c:v>
-                  </c:pt>
-                  <c:pt idx="47">
-                    <c:v>2012</c:v>
-                  </c:pt>
-                  <c:pt idx="48">
-                    <c:v>2013</c:v>
-                  </c:pt>
-                  <c:pt idx="49">
-                    <c:v>2014</c:v>
-                  </c:pt>
-                  <c:pt idx="50">
-                    <c:v>2015</c:v>
-                  </c:pt>
-                  <c:pt idx="51">
-                    <c:v>2016</c:v>
-                  </c:pt>
-                  <c:pt idx="52">
-                    <c:v>2017</c:v>
-                  </c:pt>
-                  <c:pt idx="53">
-                    <c:v>2018</c:v>
-                  </c:pt>
-                  <c:pt idx="54">
-                    <c:v>2019</c:v>
-                  </c:pt>
-                  <c:pt idx="55">
-                    <c:v>2020</c:v>
-                  </c:pt>
-                  <c:pt idx="56">
-                    <c:v>2021</c:v>
-                  </c:pt>
-                  <c:pt idx="57">
-                    <c:v>2022</c:v>
-                  </c:pt>
-                  <c:pt idx="58">
-                    <c:v>2023</c:v>
-                  </c:pt>
-                  <c:pt idx="59">
-                    <c:v>2024</c:v>
-                  </c:pt>
-                  <c:pt idx="60">
-                    <c:v>2025</c:v>
-                  </c:pt>
-                </c:lvl>
-              </c:multiLvlStrCache>
-            </c:multiLvlStrRef>
-          </c:cat>
-          <c:val>
-            <c:numRef>
-              <c:f>Sheet1!$B$2:$B$62</c:f>
-              <c:numCache>
-                <c:formatCode>General</c:formatCode>
-                <c:ptCount val="61"/>
-                <c:pt idx="0">
-                  <c:v>2.22</c:v>
-                </c:pt>
-                <c:pt idx="1">
-                  <c:v>4.26</c:v>
-                </c:pt>
-                <c:pt idx="2">
-                  <c:v>4.82</c:v>
-                </c:pt>
-                <c:pt idx="3">
-                  <c:v>4.27</c:v>
-                </c:pt>
-                <c:pt idx="4">
-                  <c:v>5.2</c:v>
-                </c:pt>
-                <c:pt idx="5">
-                  <c:v>4.04</c:v>
-                </c:pt>
-                <c:pt idx="6">
-                  <c:v>2.31</c:v>
-                </c:pt>
-                <c:pt idx="7">
-                  <c:v>3.59</c:v>
-                </c:pt>
-                <c:pt idx="8">
-                  <c:v>1.94</c:v>
-                </c:pt>
-                <c:pt idx="9">
-                  <c:v>2.44</c:v>
-                </c:pt>
-                <c:pt idx="10">
-                  <c:v>2.39</c:v>
-                </c:pt>
-                <c:pt idx="11">
-                  <c:v>2.57</c:v>
-                </c:pt>
-                <c:pt idx="12">
-                  <c:v>4.58</c:v>
-                </c:pt>
-                <c:pt idx="13">
-                  <c:v>5.19</c:v>
-                </c:pt>
-                <c:pt idx="14">
-                  <c:v>6.23</c:v>
-                </c:pt>
-                <c:pt idx="15">
-                  <c:v>4.55</c:v>
-                </c:pt>
-                <c:pt idx="16">
-                  <c:v>5.72</c:v>
-                </c:pt>
-                <c:pt idx="17">
-                  <c:v>3.95</c:v>
-                </c:pt>
-                <c:pt idx="18">
-                  <c:v>2.42</c:v>
-                </c:pt>
-                <c:pt idx="19">
-                  <c:v>2.88</c:v>
-                </c:pt>
-                <c:pt idx="20">
-                  <c:v>1.51</c:v>
-                </c:pt>
-                <c:pt idx="21">
-                  <c:v>3.12</c:v>
-                </c:pt>
-                <c:pt idx="22">
-                  <c:v>2.49</c:v>
-                </c:pt>
-                <c:pt idx="23">
-                  <c:v>6.18</c:v>
-                </c:pt>
-                <c:pt idx="24">
-                  <c:v>7.59</c:v>
-                </c:pt>
-                <c:pt idx="25">
-                  <c:v>3.09</c:v>
-                </c:pt>
-                <c:pt idx="26">
-                  <c:v>4.05</c:v>
-                </c:pt>
-                <c:pt idx="27">
-                  <c:v>1.9</c:v>
-                </c:pt>
-                <c:pt idx="28">
-                  <c:v>1.07</c:v>
-                </c:pt>
-                <c:pt idx="29">
-                  <c:v>0.6</c:v>
-                </c:pt>
-                <c:pt idx="30">
-                  <c:v>0.61</c:v>
-                </c:pt>
-                <c:pt idx="31">
-                  <c:v>1.33</c:v>
-                </c:pt>
-                <c:pt idx="32">
-                  <c:v>2.46</c:v>
-                </c:pt>
-                <c:pt idx="33">
-                  <c:v>2.17</c:v>
-                </c:pt>
-                <c:pt idx="34">
-                  <c:v>2.48</c:v>
-                </c:pt>
-                <c:pt idx="35">
-                  <c:v>1.8</c:v>
-                </c:pt>
-                <c:pt idx="36">
-                  <c:v>1.77</c:v>
-                </c:pt>
-                <c:pt idx="37">
-                  <c:v>2.4</c:v>
-                </c:pt>
-                <c:pt idx="38">
-                  <c:v>1.26</c:v>
-                </c:pt>
-                <c:pt idx="39">
-                  <c:v>0.81</c:v>
-                </c:pt>
-                <c:pt idx="40">
-                  <c:v>0.83</c:v>
-                </c:pt>
-                <c:pt idx="41">
-                  <c:v>0.92</c:v>
-                </c:pt>
-                <c:pt idx="42">
-                  <c:v>0.75</c:v>
-                </c:pt>
-                <c:pt idx="43">
-                  <c:v>3.82</c:v>
-                </c:pt>
-                <c:pt idx="44">
-                  <c:v>1.4</c:v>
-                </c:pt>
-                <c:pt idx="45">
-                  <c:v>1.79</c:v>
-                </c:pt>
-                <c:pt idx="46">
-                  <c:v>2.4</c:v>
-                </c:pt>
-                <c:pt idx="47">
-                  <c:v>2.22</c:v>
-                </c:pt>
-                <c:pt idx="48">
-                  <c:v>2.15</c:v>
-                </c:pt>
-                <c:pt idx="49">
-                  <c:v>3.21</c:v>
-                </c:pt>
-                <c:pt idx="50">
-                  <c:v>2.11</c:v>
-                </c:pt>
-                <c:pt idx="51">
-                  <c:v>0.93</c:v>
-                </c:pt>
-                <c:pt idx="52">
-                  <c:v>0.67</c:v>
-                </c:pt>
-                <c:pt idx="53">
-                  <c:v>0.66</c:v>
-                </c:pt>
-                <c:pt idx="54">
-                  <c:v>0.61</c:v>
-                </c:pt>
-                <c:pt idx="55">
-                  <c:v>1.38</c:v>
-                </c:pt>
-                <c:pt idx="56">
-                  <c:v>1.61</c:v>
-                </c:pt>
-                <c:pt idx="57">
-                  <c:v>11.82</c:v>
-                </c:pt>
-                <c:pt idx="58">
-                  <c:v>8.24</c:v>
-                </c:pt>
-                <c:pt idx="59">
-                  <c:v>7.09</c:v>
-                </c:pt>
-                <c:pt idx="60">
-                  <c:v>5.12</c:v>
-                </c:pt>
-              </c:numCache>
-            </c:numRef>
-          </c:val>
-          <c:smooth val="0"/>
-        </c:ser>
-        <c:dLbls>
-          <c:numFmt formatCode="#,##0" sourceLinked="0"/>
-          <c:txPr>
-            <a:bodyPr/>
-            <a:lstStyle/>
-            <a:p>
-              <a:pPr>
-                <a:defRPr b="0" i="0" strike="noStrike" sz="1200" u="none">
-                  <a:solidFill>
-                    <a:srgbClr val="000000"/>
-                  </a:solidFill>
-                  <a:latin typeface="Arial"/>
-                </a:defRPr>
-              </a:pPr>
-            </a:p>
-          </c:txPr>
-          <c:showLegendKey val="0"/>
-          <c:showVal val="0"/>
-          <c:showCatName val="0"/>
-          <c:showSerName val="0"/>
-          <c:showPercent val="0"/>
-          <c:showBubbleSize val="0"/>
-          <c:showLeaderLines val="0"/>
-        </c:dLbls>
-        <c:marker val="1"/>
-        <c:axId val="2094734554"/>
-        <c:axId val="2094734552"/>
-        <c:axId val="2094734556"/>
-      </c:lineChart>
-      <c:catAx>
-        <c:axId val="2094734554"/>
-        <c:scaling>
-          <c:orientation val="minMax"/>
-        </c:scaling>
-        <c:delete val="0"/>
-        <c:axPos val="b"/>
-        <c:numFmt formatCode="General" sourceLinked="1"/>
-        <c:majorTickMark val="out"/>
-        <c:minorTickMark val="none"/>
-        <c:tickLblPos val="low"/>
-        <c:spPr>
-          <a:ln w="12700" cap="flat">
-            <a:solidFill>
-              <a:srgbClr val="888888"/>
-            </a:solidFill>
-            <a:prstDash val="solid"/>
-            <a:round/>
-          </a:ln>
-        </c:spPr>
-        <c:txPr>
-          <a:bodyPr/>
-          <a:lstStyle/>
-          <a:p>
-            <a:pPr>
-              <a:defRPr sz="1000" b="0" i="0" u="none" strike="noStrike">
-                <a:solidFill>
-                  <a:srgbClr val="5B6573"/>
-                </a:solidFill>
-                <a:latin typeface="Calibri"/>
-              </a:defRPr>
-            </a:pPr>
-            <a:endParaRPr lang="en-US"/>
-          </a:p>
-        </c:txPr>
-        <c:crossAx val="2094734552"/>
-        <c:crosses val="autoZero"/>
-        <c:auto val="1"/>
-        <c:lblAlgn val="ctr"/>
-        <c:noMultiLvlLbl val="1"/>
-        <c:tickLblSkip val="10"/>
-      </c:catAx>
-      <c:valAx>
-        <c:axId val="2094734552"/>
-        <c:scaling>
-          <c:orientation val="minMax"/>
-        </c:scaling>
-        <c:delete val="0"/>
-        <c:axPos val="l"/>
-        <c:majorGridlines>
-          <c:spPr>
-            <a:ln w="6350" cap="flat">
-              <a:solidFill>
-                <a:srgbClr val="E3E6EA"/>
-              </a:solidFill>
-              <a:prstDash val="solid"/>
-              <a:round/>
-            </a:ln>
-          </c:spPr>
-        </c:majorGridlines>
-        <c:numFmt formatCode="General" sourceLinked="0"/>
-        <c:majorTickMark val="out"/>
-        <c:minorTickMark val="none"/>
-        <c:tickLblPos val="nextTo"/>
-        <c:spPr>
-          <a:ln w="12700" cap="flat">
-            <a:solidFill>
-              <a:srgbClr val="888888"/>
-            </a:solidFill>
-            <a:prstDash val="solid"/>
-            <a:round/>
-          </a:ln>
-        </c:spPr>
-        <c:txPr>
-          <a:bodyPr/>
-          <a:lstStyle/>
-          <a:p>
-            <a:pPr>
-              <a:defRPr sz="1000" b="0" i="0" u="none" strike="noStrike">
-                <a:solidFill>
-                  <a:srgbClr val="5B6573"/>
-                </a:solidFill>
-                <a:latin typeface="Calibri"/>
-              </a:defRPr>
-            </a:pPr>
-            <a:endParaRPr lang="en-US"/>
-          </a:p>
-        </c:txPr>
-        <c:crossAx val="2094734554"/>
-        <c:crosses val="autoZero"/>
-        <c:crossBetween val="between"/>
-      </c:valAx>
-      <c:spPr>
-        <a:noFill/>
-        <a:ln>
-          <a:noFill/>
-        </a:ln>
-        <a:effectLst/>
-      </c:spPr>
-    </c:plotArea>
-    <c:plotVisOnly val="1"/>
-    <c:dispBlanksAs val="span"/>
-  </c:chart>
-  <c:spPr>
-    <a:noFill/>
-    <a:ln>
-      <a:noFill/>
-    </a:ln>
-    <a:effectLst/>
-  </c:spPr>
-  <c:externalData r:id="rId1">
-    <c:autoUpdate val="0"/>
-  </c:externalData>
-</c:chartSpace>
-</file>
-
-<file path=ppt/charts/chart9.xml><?xml version="1.0" encoding="utf-8"?>
-<c:chartSpace xmlns:c="http://schemas.openxmlformats.org/drawingml/2006/chart" xmlns:a="http://schemas.openxmlformats.org/drawingml/2006/main" xmlns:r="http://schemas.openxmlformats.org/officeDocument/2006/relationships">
-  <c:date1904 val="0"/>
-  <c:roundedCorners val="1"/>
-  <c:chart>
-    <c:title>
-      <c:tx>
-        <c:rich>
-          <a:bodyPr/>
-          <a:lstStyle/>
-          <a:p>
-            <a:pPr>
-              <a:defRPr sz="1300" b="0" i="0" u="none" strike="noStrike">
-                <a:solidFill>
-                  <a:srgbClr val="1B2433"/>
-                </a:solidFill>
-                <a:latin typeface="Calibri"/>
-              </a:defRPr>
-            </a:pPr>
-            <a:r>
-              <a:rPr sz="1300" b="0" i="0" u="none" strike="noStrike">
-                <a:solidFill>
-                  <a:srgbClr val="1B2433"/>
-                </a:solidFill>
-                <a:latin typeface="Calibri"/>
-              </a:rPr>
-              <a:t>Who saw each fire-day (10 km grid)</a:t>
-            </a:r>
-          </a:p>
-        </c:rich>
-      </c:tx>
-      <c:layout/>
-      <c:overlay val="0"/>
-    </c:title>
-    <c:autoTitleDeleted val="0"/>
-    <c:plotArea>
-      <c:layout/>
-      <c:doughnutChart>
-        <c:varyColors val="1"/>
-        <c:ser>
-          <c:idx val="0"/>
-          <c:order val="0"/>
-          <c:tx>
-            <c:strRef>
-              <c:f>Sheet1!$B$1</c:f>
-              <c:strCache>
-                <c:ptCount val="1"/>
-                <c:pt idx="0">
-                  <c:v>Fire-days</c:v>
-                </c:pt>
-              </c:strCache>
-            </c:strRef>
-          </c:tx>
-          <c:spPr>
-            <a:solidFill>
-              <a:schemeClr val="accent1"/>
-            </a:solidFill>
-            <a:ln w="9525" cap="flat">
-              <a:solidFill>
-                <a:srgbClr val="F9F9F9"/>
-              </a:solidFill>
-              <a:prstDash val="solid"/>
-              <a:round/>
-            </a:ln>
-            <a:effectLst/>
-          </c:spPr>
-          <c:dPt>
-            <c:idx val="0"/>
-            <c:bubble3D val="0"/>
-            <c:spPr>
-              <a:solidFill>
-                <a:srgbClr val="2F5D8C"/>
-              </a:solidFill>
-              <a:effectLst/>
-            </c:spPr>
-          </c:dPt>
-          <c:dPt>
-            <c:idx val="1"/>
-            <c:bubble3D val="0"/>
-            <c:spPr>
-              <a:solidFill>
-                <a:srgbClr val="D99A1E"/>
-              </a:solidFill>
-              <a:effectLst/>
-            </c:spPr>
-          </c:dPt>
-          <c:dPt>
-            <c:idx val="2"/>
-            <c:bubble3D val="0"/>
-            <c:spPr>
-              <a:solidFill>
-                <a:srgbClr val="0B1D3A"/>
-              </a:solidFill>
-              <a:effectLst/>
-            </c:spPr>
-          </c:dPt>
-          <c:dLbls>
-            <c:dLbl>
-              <c:idx val="0"/>
-              <c:numFmt formatCode="0%" sourceLinked="0"/>
-              <c:spPr/>
-              <c:txPr>
-                <a:bodyPr/>
-                <a:lstStyle/>
-                <a:p>
-                  <a:pPr>
-                    <a:defRPr sz="1100" b="0" i="0" u="none" strike="noStrike">
-                      <a:solidFill>
-                        <a:srgbClr val="FFFFFF"/>
-                      </a:solidFill>
-                      <a:latin typeface="Arial"/>
-                    </a:defRPr>
-                  </a:pPr>
-                </a:p>
-              </c:txPr>
-              <c:showLegendKey val="0"/>
-              <c:showVal val="0"/>
-              <c:showCatName val="0"/>
-              <c:showSerName val="0"/>
-              <c:showPercent val="1"/>
-              <c:showBubbleSize val="0"/>
-            </c:dLbl>
-            <c:dLbl>
-              <c:idx val="1"/>
-              <c:numFmt formatCode="0%" sourceLinked="0"/>
-              <c:spPr/>
-              <c:txPr>
-                <a:bodyPr/>
-                <a:lstStyle/>
-                <a:p>
-                  <a:pPr>
-                    <a:defRPr sz="1100" b="0" i="0" u="none" strike="noStrike">
-                      <a:solidFill>
-                        <a:srgbClr val="FFFFFF"/>
-                      </a:solidFill>
-                      <a:latin typeface="Arial"/>
-                    </a:defRPr>
-                  </a:pPr>
-                </a:p>
-              </c:txPr>
-              <c:showLegendKey val="0"/>
-              <c:showVal val="0"/>
-              <c:showCatName val="0"/>
-              <c:showSerName val="0"/>
-              <c:showPercent val="1"/>
-              <c:showBubbleSize val="0"/>
-            </c:dLbl>
-            <c:dLbl>
-              <c:idx val="2"/>
-              <c:numFmt formatCode="0%" sourceLinked="0"/>
-              <c:spPr/>
-              <c:txPr>
-                <a:bodyPr/>
-                <a:lstStyle/>
-                <a:p>
-                  <a:pPr>
-                    <a:defRPr sz="1100" b="0" i="0" u="none" strike="noStrike">
-                      <a:solidFill>
-                        <a:srgbClr val="FFFFFF"/>
-                      </a:solidFill>
-                      <a:latin typeface="Arial"/>
-                    </a:defRPr>
-                  </a:pPr>
-                </a:p>
-              </c:txPr>
-              <c:showLegendKey val="0"/>
-              <c:showVal val="0"/>
-              <c:showCatName val="0"/>
-              <c:showSerName val="0"/>
-              <c:showPercent val="1"/>
-              <c:showBubbleSize val="0"/>
-            </c:dLbl>
-            <c:numFmt formatCode="0%" sourceLinked="0"/>
-            <c:txPr>
-              <a:bodyPr/>
-              <a:lstStyle/>
-              <a:p>
-                <a:pPr>
-                  <a:defRPr sz="1800" b="0" i="0" u="none" strike="noStrike">
-                    <a:solidFill>
-                      <a:srgbClr val="000000"/>
-                    </a:solidFill>
-                    <a:latin typeface="Arial"/>
-                  </a:defRPr>
-                </a:pPr>
-              </a:p>
-            </c:txPr>
-            <c:showLegendKey val="0"/>
-            <c:showVal val="0"/>
-            <c:showCatName val="1"/>
-            <c:showSerName val="0"/>
-            <c:showPercent val="1"/>
-            <c:showBubbleSize val="0"/>
-            <c:showLeaderLines val="0"/>
-          </c:dLbls>
-          <c:cat>
-            <c:strRef>
-              <c:f>Sheet1!$A$2:$A$4</c:f>
-              <c:strCache>
-                <c:ptCount val="3"/>
-                <c:pt idx="0">
-                  <c:v>Aqua only</c:v>
-                </c:pt>
-                <c:pt idx="1">
-                  <c:v>Terra only</c:v>
-                </c:pt>
-                <c:pt idx="2">
-                  <c:v>Both</c:v>
-                </c:pt>
-              </c:strCache>
-            </c:strRef>
-          </c:cat>
-          <c:val>
-            <c:numRef>
-              <c:f>Sheet1!$B$2:$B$4</c:f>
-              <c:numCache>
-                <c:ptCount val="3"/>
-                <c:pt idx="0">
-                  <c:v>45.5</c:v>
-                </c:pt>
-                <c:pt idx="1">
-                  <c:v>38.5</c:v>
-                </c:pt>
-                <c:pt idx="2">
-                  <c:v>16</c:v>
-                </c:pt>
-              </c:numCache>
-            </c:numRef>
-          </c:val>
-        </c:ser>
-        <c:firstSliceAng val="0"/>
-        <c:holeSize val="55"/>
-      </c:doughnutChart>
-      <c:spPr>
-        <a:noFill/>
-        <a:ln>
-          <a:noFill/>
-        </a:ln>
-        <a:effectLst/>
-      </c:spPr>
-    </c:plotArea>
-    <c:legend>
-      <c:legendPos val="r"/>
-      <c:overlay val="0"/>
-      <c:txPr>
-        <a:bodyPr/>
-        <a:lstStyle/>
-        <a:p>
-          <a:pPr>
-            <a:defRPr sz="1100">      </a:defRPr>
-          </a:pPr>
-          <a:endParaRPr lang="en-US"/>
-        </a:p>
-      </c:txPr>
-    </c:legend>
     <c:plotVisOnly val="1"/>
     <c:dispBlanksAs val="span"/>
   </c:chart>
@@ -5987,7 +6638,7 @@
           <a:p>
             <a:r>
               <a:rPr lang="en-US" dirty="0"/>
-              <a:t>Why take all this risk? Because of what satellites see. Terra passes in the morning, Aqua in the afternoon. On a ten-kilometre grid, 84% of fire-days were seen by only one of them: a single satellite would have missed nearly half. For the Services the lesson is direct: persistence comes from numbers, and revisit decides whether a mobilisation or a launcher is caught in time.</a:t>
+              <a:t>Names can hide a military satellite; physics cannot. Trained on the CDM census using only orbit, mass, power and design life, the model scores 0.79 on satellites launched after 2014. The honest test changed the answer: trees looked best in ordinary cross-validation, 0.94, but fell to 0.64 on later satellites, so the simpler model was chosen. Launch mass and apogee give a satellite away most. It flags 83 registered civil or commercial satellites as military-like, led by navigation satellites with encrypted government services.</a:t>
             </a:r>
             <a:endParaRPr lang="en-US" dirty="0"/>
           </a:p>
@@ -6075,7 +6726,7 @@
           <a:p>
             <a:r>
               <a:rPr lang="en-US" dirty="0"/>
-              <a:t>Two routes agree. A damped-trend forecast reaches about 36,000 satellites in orbit by 2030; tested on held-back years it erred by 8.6 percent. A bottom-up build from the announced constellations gives 20,901, 30,875 or 43,606 working satellites. The collision-risk index rises to about 17 times the 2014 level in the base case. China's planned shells at 1,050 to 1,200 kilometres are the concern: debris there stays for centuries.</a:t>
+              <a:t>The Sun is the adversary nobody can deter. In the CDM records, when sunspots are high, the chance of an intense magnetic storm in a month is 39%; when quiet, 6%. A Poisson model gives 1.88 times the rate per 50 sunspots. A periodogram of debris re-entries finds a 12-year cycle on its own: the solar cycle heats the upper atmosphere and drags objects down.</a:t>
             </a:r>
             <a:endParaRPr lang="en-US" dirty="0"/>
           </a:p>
@@ -6163,7 +6814,7 @@
           <a:p>
             <a:r>
               <a:rPr lang="en-US" dirty="0"/>
-              <a:t>Before a commander acts, he asks how sure we are. Each headline was checked by a second source or a second method: UN registrations for growth, a second shell size for congestion, a sensitivity test for the intelligence count, two statistical tests for storms, and a back-test for the forecast. The intelligence count is a lower bound: covert satellites would only widen the gap.</a:t>
+              <a:t>Why take all this risk? Because of what satellites see. Terra passes in the morning, Aqua in the afternoon. On a ten-kilometre grid, 84% of fire-days were seen by only one of them: a single satellite would have missed nearly half. For the Services the lesson is direct: persistence comes from numbers, and revisit decides whether a mobilisation or a launcher is caught in time.</a:t>
             </a:r>
             <a:endParaRPr lang="en-US" dirty="0"/>
           </a:p>
@@ -6251,7 +6902,7 @@
           <a:p>
             <a:r>
               <a:rPr lang="en-US" dirty="0"/>
-              <a:t>For India the problem is structural: rising dependence on space for banking, navigation, communications and warning, a falling share of working satellites, and a launch rate far behind China's. For the Services: plan on being watched, and plan on losing some space services in war.</a:t>
+              <a:t>Two routes agree. A damped-trend forecast reaches about 36,000 satellites in orbit by 2030; tested on held-back years it erred by 8.6 percent. A bottom-up build from the announced constellations gives 20,901, 30,875 or 43,606 working satellites. The collision-risk index rises to about 17 times the 2014 level in the base case. China's planned shells at 1,050 to 1,200 kilometres are the concern: debris there stays for centuries.</a:t>
             </a:r>
             <a:endParaRPr lang="en-US" dirty="0"/>
           </a:p>
@@ -6339,7 +6990,7 @@
           <a:p>
             <a:r>
               <a:rPr lang="en-US" dirty="0"/>
-              <a:t>The study becomes a standing monitor. Seven indicators, each with thresholds and an action on Red. Today six are Red: collision risk, growth rate, Chinese ISR build rate, India's share, storm odds, and crowding of our geostationary arc. The anti-satellite test indicator is Amber.</a:t>
+              <a:t>Before a commander acts, he asks how sure we are. Each headline was checked by a second source or a second method: UN registrations for growth, a second shell size for congestion, a sensitivity test for the intelligence count, two statistical tests for storms, and a back-test for the forecast. The intelligence count is a lower bound: covert satellites would only widen the gap.</a:t>
             </a:r>
             <a:endParaRPr lang="en-US" dirty="0"/>
           </a:p>
@@ -6427,7 +7078,7 @@
           <a:p>
             <a:r>
               <a:rPr lang="en-US" dirty="0"/>
-              <a:t>Seven actions from the booklet, each with a lead, a timeline and a measure of success. The first costs almost nothing: the open catalogue and the pipeline already exist. The others build capacity and resilience.</a:t>
+              <a:t>For India the problem is structural: rising dependence on space for banking, navigation, communications and warning, a falling share of working satellites, and a launch rate far behind China's. For the Services: plan on being watched, and plan on losing some space services in war.</a:t>
             </a:r>
             <a:endParaRPr lang="en-US" dirty="0"/>
           </a:p>
@@ -6515,7 +7166,7 @@
           <a:p>
             <a:r>
               <a:rPr lang="en-US" dirty="0"/>
-              <a:t>For the technical criteria: everything is code. One command rebuilds every figure, table and number, and the Power BI dashboard uses the same tables. I can show the dashboard live if the panel wishes.</a:t>
+              <a:t>The study becomes a standing monitor. Seven indicators, each with thresholds and an action on Red. Today six are Red: collision risk, growth rate, Chinese ISR build rate, India's share, storm odds, and crowding of our geostationary arc. The anti-satellite test indicator is Amber.</a:t>
             </a:r>
             <a:endParaRPr lang="en-US" dirty="0"/>
           </a:p>
@@ -6603,6 +7254,182 @@
           <a:p>
             <a:r>
               <a:rPr lang="en-US" dirty="0"/>
+              <a:t>Seven actions from the booklet, each with a lead, a timeline and a measure of success. The first costs almost nothing: the open catalogue and the pipeline already exist. The others build capacity and resilience.</a:t>
+            </a:r>
+            <a:endParaRPr lang="en-US" dirty="0"/>
+          </a:p>
+        </p:txBody>
+      </p:sp>
+      <p:sp>
+        <p:nvSpPr>
+          <p:cNvPr id="4" name="Slide Number Placeholder 3"/>
+          <p:cNvSpPr>
+            <a:spLocks noGrp="1"/>
+          </p:cNvSpPr>
+          <p:nvPr>
+            <p:ph type="sldNum" sz="quarter" idx="10"/>
+          </p:nvPr>
+        </p:nvSpPr>
+        <p:spPr/>
+        <p:txBody>
+          <a:bodyPr/>
+          <a:lstStyle/>
+          <a:p>
+            <a:fld id="{F7021451-1387-4CA6-816F-3879F97B5CBC}" type="slidenum">
+              <a:rPr lang="en-US"/>
+              <a:t>17</a:t>
+            </a:fld>
+            <a:endParaRPr lang="en-US"/>
+          </a:p>
+        </p:txBody>
+      </p:sp>
+    </p:spTree>
+    <p:extLst>
+      <p:ext uri="{BB962C8B-B14F-4D97-AF65-F5344CB8AC3E}">
+        <p14:creationId xmlns:p14="http://schemas.microsoft.com/office/powerpoint/2010/main" val="1024086991"/>
+      </p:ext>
+    </p:extLst>
+  </p:cSld>
+  <p:clrMapOvr>
+    <a:masterClrMapping/>
+  </p:clrMapOvr>
+</p:notes>
+</file>
+
+<file path=ppt/notesSlides/notesSlide18.xml><?xml version="1.0" encoding="utf-8"?>
+<p:notes xmlns:a="http://schemas.openxmlformats.org/drawingml/2006/main" xmlns:r="http://schemas.openxmlformats.org/officeDocument/2006/relationships" xmlns:p="http://schemas.openxmlformats.org/presentationml/2006/main">
+  <p:cSld>
+    <p:spTree>
+      <p:nvGrpSpPr>
+        <p:cNvPr id="1" name=""/>
+        <p:cNvGrpSpPr/>
+        <p:nvPr/>
+      </p:nvGrpSpPr>
+      <p:grpSpPr>
+        <a:xfrm>
+          <a:off x="0" y="0"/>
+          <a:ext cx="0" cy="0"/>
+          <a:chOff x="0" y="0"/>
+          <a:chExt cx="0" cy="0"/>
+        </a:xfrm>
+      </p:grpSpPr>
+      <p:sp>
+        <p:nvSpPr>
+          <p:cNvPr id="2" name="Slide Image Placeholder 1"/>
+          <p:cNvSpPr>
+            <a:spLocks noGrp="1" noRot="1" noChangeAspect="1"/>
+          </p:cNvSpPr>
+          <p:nvPr>
+            <p:ph type="sldImg"/>
+          </p:nvPr>
+        </p:nvSpPr>
+        <p:spPr/>
+      </p:sp>
+      <p:sp>
+        <p:nvSpPr>
+          <p:cNvPr id="3" name="Notes Placeholder 2"/>
+          <p:cNvSpPr>
+            <a:spLocks noGrp="1"/>
+          </p:cNvSpPr>
+          <p:nvPr>
+            <p:ph type="body" idx="1"/>
+          </p:nvPr>
+        </p:nvSpPr>
+        <p:spPr/>
+        <p:txBody>
+          <a:bodyPr/>
+          <a:lstStyle/>
+          <a:p>
+            <a:r>
+              <a:rPr lang="en-US" dirty="0"/>
+              <a:t>For the technical criteria: everything is code. One command rebuilds every figure, table and number, and the Power BI dashboard uses the same tables. I can show the dashboard live if the panel wishes.</a:t>
+            </a:r>
+            <a:endParaRPr lang="en-US" dirty="0"/>
+          </a:p>
+        </p:txBody>
+      </p:sp>
+      <p:sp>
+        <p:nvSpPr>
+          <p:cNvPr id="4" name="Slide Number Placeholder 3"/>
+          <p:cNvSpPr>
+            <a:spLocks noGrp="1"/>
+          </p:cNvSpPr>
+          <p:nvPr>
+            <p:ph type="sldNum" sz="quarter" idx="10"/>
+          </p:nvPr>
+        </p:nvSpPr>
+        <p:spPr/>
+        <p:txBody>
+          <a:bodyPr/>
+          <a:lstStyle/>
+          <a:p>
+            <a:fld id="{F7021451-1387-4CA6-816F-3879F97B5CBC}" type="slidenum">
+              <a:rPr lang="en-US"/>
+              <a:t>18</a:t>
+            </a:fld>
+            <a:endParaRPr lang="en-US"/>
+          </a:p>
+        </p:txBody>
+      </p:sp>
+    </p:spTree>
+    <p:extLst>
+      <p:ext uri="{BB962C8B-B14F-4D97-AF65-F5344CB8AC3E}">
+        <p14:creationId xmlns:p14="http://schemas.microsoft.com/office/powerpoint/2010/main" val="1024086991"/>
+      </p:ext>
+    </p:extLst>
+  </p:cSld>
+  <p:clrMapOvr>
+    <a:masterClrMapping/>
+  </p:clrMapOvr>
+</p:notes>
+</file>
+
+<file path=ppt/notesSlides/notesSlide19.xml><?xml version="1.0" encoding="utf-8"?>
+<p:notes xmlns:a="http://schemas.openxmlformats.org/drawingml/2006/main" xmlns:r="http://schemas.openxmlformats.org/officeDocument/2006/relationships" xmlns:p="http://schemas.openxmlformats.org/presentationml/2006/main">
+  <p:cSld>
+    <p:spTree>
+      <p:nvGrpSpPr>
+        <p:cNvPr id="1" name=""/>
+        <p:cNvGrpSpPr/>
+        <p:nvPr/>
+      </p:nvGrpSpPr>
+      <p:grpSpPr>
+        <a:xfrm>
+          <a:off x="0" y="0"/>
+          <a:ext cx="0" cy="0"/>
+          <a:chOff x="0" y="0"/>
+          <a:chExt cx="0" cy="0"/>
+        </a:xfrm>
+      </p:grpSpPr>
+      <p:sp>
+        <p:nvSpPr>
+          <p:cNvPr id="2" name="Slide Image Placeholder 1"/>
+          <p:cNvSpPr>
+            <a:spLocks noGrp="1" noRot="1" noChangeAspect="1"/>
+          </p:cNvSpPr>
+          <p:nvPr>
+            <p:ph type="sldImg"/>
+          </p:nvPr>
+        </p:nvSpPr>
+        <p:spPr/>
+      </p:sp>
+      <p:sp>
+        <p:nvSpPr>
+          <p:cNvPr id="3" name="Notes Placeholder 2"/>
+          <p:cNvSpPr>
+            <a:spLocks noGrp="1"/>
+          </p:cNvSpPr>
+          <p:nvPr>
+            <p:ph type="body" idx="1"/>
+          </p:nvPr>
+        </p:nvSpPr>
+        <p:spPr/>
+        <p:txBody>
+          <a:bodyPr/>
+          <a:lstStyle/>
+          <a:p>
+            <a:r>
+              <a:rPr lang="en-US" dirty="0"/>
               <a:t>To close: in twelve years orbit became crowded, concentrated and contested, and India's share shrank while its dependence grew. The remedy is numbers, resilience and awareness. The ask is small and time-bound, with a clear stop test. Thank you, sir.</a:t>
             </a:r>
             <a:endParaRPr lang="en-US" dirty="0"/>
@@ -6626,7 +7453,7 @@
           <a:p>
             <a:fld id="{F7021451-1387-4CA6-816F-3879F97B5CBC}" type="slidenum">
               <a:rPr lang="en-US"/>
-              <a:t>17</a:t>
+              <a:t>19</a:t>
             </a:fld>
             <a:endParaRPr lang="en-US"/>
           </a:p>
@@ -7219,7 +8046,7 @@
           <a:p>
             <a:r>
               <a:rPr lang="en-US" dirty="0"/>
-              <a:t>Grouping satellites by official programme names gives a transparent lower bound. China operates about 406, including 164 Yaogan reconnaissance satellites, and adds about 43 a year. India operates about 17. SBS-III is the right answer but closes only about 13% of today's gap. During Operation Sindoor ten Indian satellites worked round the clock: the need is proven, the capacity is thin.</a:t>
+              <a:t>To see congestion directly, I screened current orbits. Every active satellite in low orbit, 15,656 of them, was propagated with SGP4 every ten seconds for a day and every pair checked. Result: 18,355 passes closer than 5 km, most involving Starlink. A second screening against the big debris clouds found 468 encounters, and 10 Indian satellites among them, including EMISAT and SARAL. This is exactly the watch ORBITWATCH would run every day.</a:t>
             </a:r>
             <a:endParaRPr lang="en-US" dirty="0"/>
           </a:p>
@@ -7307,7 +8134,7 @@
           <a:p>
             <a:r>
               <a:rPr lang="en-US" dirty="0"/>
-              <a:t>The Sun is the adversary nobody can deter. In the CDM records, when sunspots are high, the chance of an intense magnetic storm in a month is 39%; when quiet, 6%. A Poisson model gives 1.88 times the rate per 50 sunspots. A periodogram of debris re-entries finds a 12-year cycle on its own: the solar cycle heats the upper atmosphere and drags objects down.</a:t>
+              <a:t>Grouping satellites by official programme names gives a transparent lower bound. China operates about 406, including 164 Yaogan reconnaissance satellites, and adds about 43 a year. India operates about 17. SBS-III is the right answer but closes only about 13% of today's gap. During Operation Sindoor ten Indian satellites worked round the clock: the need is proven, the capacity is thin.</a:t>
             </a:r>
             <a:endParaRPr lang="en-US" dirty="0"/>
           </a:p>
@@ -7993,6 +8820,726 @@
                 <a:ea typeface="Calibri" pitchFamily="34" charset="-122"/>
                 <a:cs typeface="Calibri" pitchFamily="34" charset="-120"/>
               </a:rPr>
+              <a:t>FINDING 5B · MACHINE LEARNING</a:t>
+            </a:r>
+            <a:endParaRPr lang="en-US" sz="1200" dirty="0"/>
+          </a:p>
+        </p:txBody>
+      </p:sp>
+      <p:sp>
+        <p:nvSpPr>
+          <p:cNvPr id="3" name="Text 1"/>
+          <p:cNvSpPr txBox="1"/>
+          <p:nvPr/>
+        </p:nvSpPr>
+        <p:spPr>
+          <a:xfrm>
+            <a:off x="548640" y="658368"/>
+            <a:ext cx="11064240" cy="685800"/>
+          </a:xfrm>
+          <a:prstGeom prst="rect">
+            <a:avLst/>
+          </a:prstGeom>
+          <a:noFill/>
+          <a:ln/>
+        </p:spPr>
+        <p:txBody>
+          <a:bodyPr wrap="square" lIns="0" tIns="0" rIns="0" bIns="0" rtlCol="0" anchor="t"/>
+          <a:lstStyle/>
+          <a:p>
+            <a:pPr indent="0" marL="0">
+              <a:buNone/>
+            </a:pPr>
+            <a:r>
+              <a:rPr lang="en-US" sz="2800" b="1" dirty="0">
+                <a:solidFill>
+                  <a:srgbClr val="0B1D3A"/>
+                </a:solidFill>
+                <a:latin typeface="Cambria" pitchFamily="34" charset="0"/>
+                <a:ea typeface="Cambria" pitchFamily="34" charset="-122"/>
+                <a:cs typeface="Cambria" pitchFamily="34" charset="-120"/>
+              </a:rPr>
+              <a:t>Physics alone gives a military satellite away</a:t>
+            </a:r>
+            <a:endParaRPr lang="en-US" sz="2800" dirty="0"/>
+          </a:p>
+        </p:txBody>
+      </p:sp>
+      <p:graphicFrame>
+        <p:nvGraphicFramePr>
+          <p:cNvPr id="4" name="Chart 0" descr=""/>
+          <p:cNvGraphicFramePr/>
+          <p:nvPr/>
+        </p:nvGraphicFramePr>
+        <p:xfrm>
+          <a:off x="548640" y="1554480"/>
+          <a:ext cx="6400800" cy="4480560"/>
+        </p:xfrm>
+        <a:graphic xmlns:a="http://schemas.openxmlformats.org/drawingml/2006/main">
+          <a:graphicData uri="http://schemas.openxmlformats.org/drawingml/2006/chart">
+            <c:chart xmlns:c="http://schemas.openxmlformats.org/drawingml/2006/chart" r:id="rId1"/>
+          </a:graphicData>
+        </a:graphic>
+      </p:graphicFrame>
+      <p:sp>
+        <p:nvSpPr>
+          <p:cNvPr id="5" name="Text 2"/>
+          <p:cNvSpPr txBox="1"/>
+          <p:nvPr/>
+        </p:nvSpPr>
+        <p:spPr>
+          <a:xfrm>
+            <a:off x="7406640" y="1737360"/>
+            <a:ext cx="4206240" cy="566928"/>
+          </a:xfrm>
+          <a:prstGeom prst="rect">
+            <a:avLst/>
+          </a:prstGeom>
+          <a:noFill/>
+          <a:ln/>
+        </p:spPr>
+        <p:txBody>
+          <a:bodyPr wrap="square" lIns="0" tIns="0" rIns="0" bIns="0" rtlCol="0" anchor="b"/>
+          <a:lstStyle/>
+          <a:p>
+            <a:pPr indent="0" marL="0">
+              <a:buNone/>
+            </a:pPr>
+            <a:r>
+              <a:rPr lang="en-US" sz="3600" b="1" dirty="0">
+                <a:solidFill>
+                  <a:srgbClr val="0B1D3A"/>
+                </a:solidFill>
+                <a:latin typeface="Cambria" pitchFamily="34" charset="0"/>
+                <a:ea typeface="Cambria" pitchFamily="34" charset="-122"/>
+                <a:cs typeface="Cambria" pitchFamily="34" charset="-120"/>
+              </a:rPr>
+              <a:t>0.79</a:t>
+            </a:r>
+            <a:endParaRPr lang="en-US" sz="3600" dirty="0"/>
+          </a:p>
+        </p:txBody>
+      </p:sp>
+      <p:sp>
+        <p:nvSpPr>
+          <p:cNvPr id="6" name="Text 3"/>
+          <p:cNvSpPr txBox="1"/>
+          <p:nvPr/>
+        </p:nvSpPr>
+        <p:spPr>
+          <a:xfrm>
+            <a:off x="7406640" y="2340864"/>
+            <a:ext cx="4206240" cy="566928"/>
+          </a:xfrm>
+          <a:prstGeom prst="rect">
+            <a:avLst/>
+          </a:prstGeom>
+          <a:noFill/>
+          <a:ln/>
+        </p:spPr>
+        <p:txBody>
+          <a:bodyPr wrap="square" lIns="0" tIns="0" rIns="0" bIns="0" rtlCol="0" anchor="t"/>
+          <a:lstStyle/>
+          <a:p>
+            <a:pPr indent="0" marL="0">
+              <a:buNone/>
+            </a:pPr>
+            <a:r>
+              <a:rPr lang="en-US" sz="1300" dirty="0">
+                <a:solidFill>
+                  <a:srgbClr val="5B6573"/>
+                </a:solidFill>
+                <a:latin typeface="Calibri" pitchFamily="34" charset="0"/>
+                <a:ea typeface="Calibri" pitchFamily="34" charset="-122"/>
+                <a:cs typeface="Calibri" pitchFamily="34" charset="-120"/>
+              </a:rPr>
+              <a:t>ROC-AUC on 1,851 satellites launched after the 2014 census</a:t>
+            </a:r>
+            <a:endParaRPr lang="en-US" sz="1300" dirty="0"/>
+          </a:p>
+        </p:txBody>
+      </p:sp>
+      <p:sp>
+        <p:nvSpPr>
+          <p:cNvPr id="7" name="Text 4"/>
+          <p:cNvSpPr txBox="1"/>
+          <p:nvPr/>
+        </p:nvSpPr>
+        <p:spPr>
+          <a:xfrm>
+            <a:off x="7406640" y="3154680"/>
+            <a:ext cx="4206240" cy="566928"/>
+          </a:xfrm>
+          <a:prstGeom prst="rect">
+            <a:avLst/>
+          </a:prstGeom>
+          <a:noFill/>
+          <a:ln/>
+        </p:spPr>
+        <p:txBody>
+          <a:bodyPr wrap="square" lIns="0" tIns="0" rIns="0" bIns="0" rtlCol="0" anchor="b"/>
+          <a:lstStyle/>
+          <a:p>
+            <a:pPr indent="0" marL="0">
+              <a:buNone/>
+            </a:pPr>
+            <a:r>
+              <a:rPr lang="en-US" sz="3600" b="1" dirty="0">
+                <a:solidFill>
+                  <a:srgbClr val="C0392B"/>
+                </a:solidFill>
+                <a:latin typeface="Cambria" pitchFamily="34" charset="0"/>
+                <a:ea typeface="Cambria" pitchFamily="34" charset="-122"/>
+                <a:cs typeface="Cambria" pitchFamily="34" charset="-120"/>
+              </a:rPr>
+              <a:t>0.94 → 0.64</a:t>
+            </a:r>
+            <a:endParaRPr lang="en-US" sz="3600" dirty="0"/>
+          </a:p>
+        </p:txBody>
+      </p:sp>
+      <p:sp>
+        <p:nvSpPr>
+          <p:cNvPr id="8" name="Text 5"/>
+          <p:cNvSpPr txBox="1"/>
+          <p:nvPr/>
+        </p:nvSpPr>
+        <p:spPr>
+          <a:xfrm>
+            <a:off x="7406640" y="3758184"/>
+            <a:ext cx="4206240" cy="566928"/>
+          </a:xfrm>
+          <a:prstGeom prst="rect">
+            <a:avLst/>
+          </a:prstGeom>
+          <a:noFill/>
+          <a:ln/>
+        </p:spPr>
+        <p:txBody>
+          <a:bodyPr wrap="square" lIns="0" tIns="0" rIns="0" bIns="0" rtlCol="0" anchor="t"/>
+          <a:lstStyle/>
+          <a:p>
+            <a:pPr indent="0" marL="0">
+              <a:buNone/>
+            </a:pPr>
+            <a:r>
+              <a:rPr lang="en-US" sz="1300" dirty="0">
+                <a:solidFill>
+                  <a:srgbClr val="5B6573"/>
+                </a:solidFill>
+                <a:latin typeface="Calibri" pitchFamily="34" charset="0"/>
+                <a:ea typeface="Calibri" pitchFamily="34" charset="-122"/>
+                <a:cs typeface="Calibri" pitchFamily="34" charset="-120"/>
+              </a:rPr>
+              <a:t>trees looked best in cross-validation, then failed on later launches</a:t>
+            </a:r>
+            <a:endParaRPr lang="en-US" sz="1300" dirty="0"/>
+          </a:p>
+        </p:txBody>
+      </p:sp>
+      <p:sp>
+        <p:nvSpPr>
+          <p:cNvPr id="9" name="Text 6"/>
+          <p:cNvSpPr txBox="1"/>
+          <p:nvPr/>
+        </p:nvSpPr>
+        <p:spPr>
+          <a:xfrm>
+            <a:off x="7406640" y="4572000"/>
+            <a:ext cx="4206240" cy="566928"/>
+          </a:xfrm>
+          <a:prstGeom prst="rect">
+            <a:avLst/>
+          </a:prstGeom>
+          <a:noFill/>
+          <a:ln/>
+        </p:spPr>
+        <p:txBody>
+          <a:bodyPr wrap="square" lIns="0" tIns="0" rIns="0" bIns="0" rtlCol="0" anchor="b"/>
+          <a:lstStyle/>
+          <a:p>
+            <a:pPr indent="0" marL="0">
+              <a:buNone/>
+            </a:pPr>
+            <a:r>
+              <a:rPr lang="en-US" sz="3600" b="1" dirty="0">
+                <a:solidFill>
+                  <a:srgbClr val="0B1D3A"/>
+                </a:solidFill>
+                <a:latin typeface="Cambria" pitchFamily="34" charset="0"/>
+                <a:ea typeface="Cambria" pitchFamily="34" charset="-122"/>
+                <a:cs typeface="Cambria" pitchFamily="34" charset="-120"/>
+              </a:rPr>
+              <a:t>83 (5%)</a:t>
+            </a:r>
+            <a:endParaRPr lang="en-US" sz="3600" dirty="0"/>
+          </a:p>
+        </p:txBody>
+      </p:sp>
+      <p:sp>
+        <p:nvSpPr>
+          <p:cNvPr id="10" name="Text 7"/>
+          <p:cNvSpPr txBox="1"/>
+          <p:nvPr/>
+        </p:nvSpPr>
+        <p:spPr>
+          <a:xfrm>
+            <a:off x="7406640" y="5175504"/>
+            <a:ext cx="4206240" cy="566928"/>
+          </a:xfrm>
+          <a:prstGeom prst="rect">
+            <a:avLst/>
+          </a:prstGeom>
+          <a:noFill/>
+          <a:ln/>
+        </p:spPr>
+        <p:txBody>
+          <a:bodyPr wrap="square" lIns="0" tIns="0" rIns="0" bIns="0" rtlCol="0" anchor="t"/>
+          <a:lstStyle/>
+          <a:p>
+            <a:pPr indent="0" marL="0">
+              <a:buNone/>
+            </a:pPr>
+            <a:r>
+              <a:rPr lang="en-US" sz="1300" dirty="0">
+                <a:solidFill>
+                  <a:srgbClr val="5B6573"/>
+                </a:solidFill>
+                <a:latin typeface="Calibri" pitchFamily="34" charset="0"/>
+                <a:ea typeface="Calibri" pitchFamily="34" charset="-122"/>
+                <a:cs typeface="Calibri" pitchFamily="34" charset="-120"/>
+              </a:rPr>
+              <a:t>'civil' or 'commercial' satellites that look military: the dual-use blur</a:t>
+            </a:r>
+            <a:endParaRPr lang="en-US" sz="1300" dirty="0"/>
+          </a:p>
+        </p:txBody>
+      </p:sp>
+      <p:sp>
+        <p:nvSpPr>
+          <p:cNvPr id="11" name="Text 8"/>
+          <p:cNvSpPr txBox="1"/>
+          <p:nvPr/>
+        </p:nvSpPr>
+        <p:spPr>
+          <a:xfrm>
+            <a:off x="548640" y="6400800"/>
+            <a:ext cx="7315200" cy="274320"/>
+          </a:xfrm>
+          <a:prstGeom prst="rect">
+            <a:avLst/>
+          </a:prstGeom>
+          <a:noFill/>
+          <a:ln/>
+        </p:spPr>
+        <p:txBody>
+          <a:bodyPr wrap="square" lIns="0" tIns="0" rIns="0" bIns="0" rtlCol="0" anchor="ctr"/>
+          <a:lstStyle/>
+          <a:p>
+            <a:pPr indent="0" marL="0">
+              <a:buNone/>
+            </a:pPr>
+            <a:r>
+              <a:rPr lang="en-US" sz="1000" dirty="0">
+                <a:solidFill>
+                  <a:srgbClr val="5B6573"/>
+                </a:solidFill>
+                <a:latin typeface="Calibri" pitchFamily="34" charset="0"/>
+                <a:ea typeface="Calibri" pitchFamily="34" charset="-122"/>
+                <a:cs typeface="Calibri" pitchFamily="34" charset="-120"/>
+              </a:rPr>
+              <a:t>PROJECT HIGH GROUND  ·  CDM Datathon-2026  ·  Theme 6.1</a:t>
+            </a:r>
+            <a:endParaRPr lang="en-US" sz="1000" dirty="0"/>
+          </a:p>
+        </p:txBody>
+      </p:sp>
+      <p:sp>
+        <p:nvSpPr>
+          <p:cNvPr id="12" name="Text 9"/>
+          <p:cNvSpPr txBox="1"/>
+          <p:nvPr/>
+        </p:nvSpPr>
+        <p:spPr>
+          <a:xfrm>
+            <a:off x="10725912" y="6400800"/>
+            <a:ext cx="914400" cy="274320"/>
+          </a:xfrm>
+          <a:prstGeom prst="rect">
+            <a:avLst/>
+          </a:prstGeom>
+          <a:noFill/>
+          <a:ln/>
+        </p:spPr>
+        <p:txBody>
+          <a:bodyPr wrap="square" lIns="0" tIns="0" rIns="0" bIns="0" rtlCol="0" anchor="ctr"/>
+          <a:lstStyle/>
+          <a:p>
+            <a:pPr algn="r" indent="0" marL="0">
+              <a:buNone/>
+            </a:pPr>
+            <a:r>
+              <a:rPr lang="en-US" sz="1000" dirty="0">
+                <a:solidFill>
+                  <a:srgbClr val="5B6573"/>
+                </a:solidFill>
+                <a:latin typeface="Calibri" pitchFamily="34" charset="0"/>
+                <a:ea typeface="Calibri" pitchFamily="34" charset="-122"/>
+                <a:cs typeface="Calibri" pitchFamily="34" charset="-120"/>
+              </a:rPr>
+              <a:t>10 / 19</a:t>
+            </a:r>
+            <a:endParaRPr lang="en-US" sz="1000" dirty="0"/>
+          </a:p>
+        </p:txBody>
+      </p:sp>
+    </p:spTree>
+  </p:cSld>
+  <p:clrMapOvr>
+    <a:masterClrMapping/>
+  </p:clrMapOvr>
+</p:sld>
+</file>
+
+<file path=ppt/slides/slide11.xml><?xml version="1.0" encoding="utf-8"?>
+<p:sld xmlns:a="http://schemas.openxmlformats.org/drawingml/2006/main" xmlns:r="http://schemas.openxmlformats.org/officeDocument/2006/relationships" xmlns:p="http://schemas.openxmlformats.org/presentationml/2006/main">
+  <p:cSld name="Slide 11">
+    <p:bg>
+      <p:bgPr>
+        <a:solidFill>
+          <a:srgbClr val="FFFFFF"/>
+        </a:solidFill>
+      </p:bgPr>
+    </p:bg>
+    <p:spTree>
+      <p:nvGrpSpPr>
+        <p:cNvPr id="1" name=""/>
+        <p:cNvGrpSpPr/>
+        <p:nvPr/>
+      </p:nvGrpSpPr>
+      <p:grpSpPr>
+        <a:xfrm>
+          <a:off x="0" y="0"/>
+          <a:ext cx="0" cy="0"/>
+          <a:chOff x="0" y="0"/>
+          <a:chExt cx="0" cy="0"/>
+        </a:xfrm>
+      </p:grpSpPr>
+      <p:sp>
+        <p:nvSpPr>
+          <p:cNvPr id="2" name="Text 0"/>
+          <p:cNvSpPr txBox="1"/>
+          <p:nvPr/>
+        </p:nvSpPr>
+        <p:spPr>
+          <a:xfrm>
+            <a:off x="548640" y="365760"/>
+            <a:ext cx="10972800" cy="274320"/>
+          </a:xfrm>
+          <a:prstGeom prst="rect">
+            <a:avLst/>
+          </a:prstGeom>
+          <a:noFill/>
+          <a:ln/>
+        </p:spPr>
+        <p:txBody>
+          <a:bodyPr wrap="square" lIns="0" tIns="0" rIns="0" bIns="0" rtlCol="0" anchor="ctr"/>
+          <a:lstStyle/>
+          <a:p>
+            <a:pPr indent="0" marL="0">
+              <a:buNone/>
+            </a:pPr>
+            <a:r>
+              <a:rPr lang="en-US" sz="1200" b="1" spc="200" kern="0" dirty="0">
+                <a:solidFill>
+                  <a:srgbClr val="D99A1E"/>
+                </a:solidFill>
+                <a:latin typeface="Calibri" pitchFamily="34" charset="0"/>
+                <a:ea typeface="Calibri" pitchFamily="34" charset="-122"/>
+                <a:cs typeface="Calibri" pitchFamily="34" charset="-120"/>
+              </a:rPr>
+              <a:t>FINDING 6 · THE NATURAL ADVERSARY</a:t>
+            </a:r>
+            <a:endParaRPr lang="en-US" sz="1200" dirty="0"/>
+          </a:p>
+        </p:txBody>
+      </p:sp>
+      <p:sp>
+        <p:nvSpPr>
+          <p:cNvPr id="3" name="Text 1"/>
+          <p:cNvSpPr txBox="1"/>
+          <p:nvPr/>
+        </p:nvSpPr>
+        <p:spPr>
+          <a:xfrm>
+            <a:off x="548640" y="658368"/>
+            <a:ext cx="11064240" cy="685800"/>
+          </a:xfrm>
+          <a:prstGeom prst="rect">
+            <a:avLst/>
+          </a:prstGeom>
+          <a:noFill/>
+          <a:ln/>
+        </p:spPr>
+        <p:txBody>
+          <a:bodyPr wrap="square" lIns="0" tIns="0" rIns="0" bIns="0" rtlCol="0" anchor="t"/>
+          <a:lstStyle/>
+          <a:p>
+            <a:pPr indent="0" marL="0">
+              <a:buNone/>
+            </a:pPr>
+            <a:r>
+              <a:rPr lang="en-US" sz="2800" b="1" dirty="0">
+                <a:solidFill>
+                  <a:srgbClr val="0B1D3A"/>
+                </a:solidFill>
+                <a:latin typeface="Cambria" pitchFamily="34" charset="0"/>
+                <a:ea typeface="Cambria" pitchFamily="34" charset="-122"/>
+                <a:cs typeface="Cambria" pitchFamily="34" charset="-120"/>
+              </a:rPr>
+              <a:t>Storm odds rise ~7-fold when the Sun is active</a:t>
+            </a:r>
+            <a:endParaRPr lang="en-US" sz="2800" dirty="0"/>
+          </a:p>
+        </p:txBody>
+      </p:sp>
+      <p:graphicFrame>
+        <p:nvGraphicFramePr>
+          <p:cNvPr id="4" name="Chart 0" descr=""/>
+          <p:cNvGraphicFramePr/>
+          <p:nvPr/>
+        </p:nvGraphicFramePr>
+        <p:xfrm>
+          <a:off x="548640" y="1554480"/>
+          <a:ext cx="4572000" cy="4572000"/>
+        </p:xfrm>
+        <a:graphic xmlns:a="http://schemas.openxmlformats.org/drawingml/2006/main">
+          <a:graphicData uri="http://schemas.openxmlformats.org/drawingml/2006/chart">
+            <c:chart xmlns:c="http://schemas.openxmlformats.org/drawingml/2006/chart" r:id="rId1"/>
+          </a:graphicData>
+        </a:graphic>
+      </p:graphicFrame>
+      <p:graphicFrame>
+        <p:nvGraphicFramePr>
+          <p:cNvPr id="5" name="Chart 1" descr=""/>
+          <p:cNvGraphicFramePr/>
+          <p:nvPr/>
+        </p:nvGraphicFramePr>
+        <p:xfrm>
+          <a:off x="5303520" y="1554480"/>
+          <a:ext cx="6309360" cy="3017520"/>
+        </p:xfrm>
+        <a:graphic xmlns:a="http://schemas.openxmlformats.org/drawingml/2006/main">
+          <a:graphicData uri="http://schemas.openxmlformats.org/drawingml/2006/chart">
+            <c:chart xmlns:c="http://schemas.openxmlformats.org/drawingml/2006/chart" r:id="rId2"/>
+          </a:graphicData>
+        </a:graphic>
+      </p:graphicFrame>
+      <p:sp>
+        <p:nvSpPr>
+          <p:cNvPr id="6" name="Text 2"/>
+          <p:cNvSpPr txBox="1"/>
+          <p:nvPr/>
+        </p:nvSpPr>
+        <p:spPr>
+          <a:xfrm>
+            <a:off x="5303520" y="4754880"/>
+            <a:ext cx="6309360" cy="1371600"/>
+          </a:xfrm>
+          <a:prstGeom prst="rect">
+            <a:avLst/>
+          </a:prstGeom>
+          <a:noFill/>
+          <a:ln/>
+        </p:spPr>
+        <p:txBody>
+          <a:bodyPr wrap="square" lIns="0" tIns="0" rIns="0" bIns="0" rtlCol="0" anchor="ctr"/>
+          <a:lstStyle/>
+          <a:p>
+            <a:pPr indent="0" marL="0">
+              <a:spcAft>
+                <a:spcPts val="400"/>
+              </a:spcAft>
+              <a:buNone/>
+            </a:pPr>
+            <a:r>
+              <a:rPr lang="en-US" sz="1400" b="1" dirty="0">
+                <a:solidFill>
+                  <a:srgbClr val="C0392B"/>
+                </a:solidFill>
+                <a:latin typeface="Calibri" pitchFamily="34" charset="0"/>
+                <a:ea typeface="Calibri" pitchFamily="34" charset="-122"/>
+                <a:cs typeface="Calibri" pitchFamily="34" charset="-120"/>
+              </a:rPr>
+              <a:t>39% vs 6%</a:t>
+            </a:r>
+            <a:endParaRPr lang="en-US" sz="1400" dirty="0"/>
+          </a:p>
+          <a:p>
+            <a:pPr indent="0" marL="0">
+              <a:spcAft>
+                <a:spcPts val="400"/>
+              </a:spcAft>
+              <a:buNone/>
+            </a:pPr>
+            <a:r>
+              <a:rPr lang="en-US" sz="1400" dirty="0">
+                <a:solidFill>
+                  <a:srgbClr val="1B2433"/>
+                </a:solidFill>
+                <a:latin typeface="Calibri" pitchFamily="34" charset="0"/>
+                <a:ea typeface="Calibri" pitchFamily="34" charset="-122"/>
+                <a:cs typeface="Calibri" pitchFamily="34" charset="-120"/>
+              </a:rPr>
+              <a:t>chance of an intense storm in any 30 days, active vs quiet Sun. Storms killed 38 new Starlink satellites (Feb 2022); solar cycle 25 peaked in Oct 2024.</a:t>
+            </a:r>
+            <a:endParaRPr lang="en-US" sz="1400" dirty="0"/>
+          </a:p>
+        </p:txBody>
+      </p:sp>
+      <p:sp>
+        <p:nvSpPr>
+          <p:cNvPr id="7" name="Text 3"/>
+          <p:cNvSpPr txBox="1"/>
+          <p:nvPr/>
+        </p:nvSpPr>
+        <p:spPr>
+          <a:xfrm>
+            <a:off x="548640" y="6400800"/>
+            <a:ext cx="7315200" cy="274320"/>
+          </a:xfrm>
+          <a:prstGeom prst="rect">
+            <a:avLst/>
+          </a:prstGeom>
+          <a:noFill/>
+          <a:ln/>
+        </p:spPr>
+        <p:txBody>
+          <a:bodyPr wrap="square" lIns="0" tIns="0" rIns="0" bIns="0" rtlCol="0" anchor="ctr"/>
+          <a:lstStyle/>
+          <a:p>
+            <a:pPr indent="0" marL="0">
+              <a:buNone/>
+            </a:pPr>
+            <a:r>
+              <a:rPr lang="en-US" sz="1000" dirty="0">
+                <a:solidFill>
+                  <a:srgbClr val="5B6573"/>
+                </a:solidFill>
+                <a:latin typeface="Calibri" pitchFamily="34" charset="0"/>
+                <a:ea typeface="Calibri" pitchFamily="34" charset="-122"/>
+                <a:cs typeface="Calibri" pitchFamily="34" charset="-120"/>
+              </a:rPr>
+              <a:t>PROJECT HIGH GROUND  ·  CDM Datathon-2026  ·  Theme 6.1</a:t>
+            </a:r>
+            <a:endParaRPr lang="en-US" sz="1000" dirty="0"/>
+          </a:p>
+        </p:txBody>
+      </p:sp>
+      <p:sp>
+        <p:nvSpPr>
+          <p:cNvPr id="8" name="Text 4"/>
+          <p:cNvSpPr txBox="1"/>
+          <p:nvPr/>
+        </p:nvSpPr>
+        <p:spPr>
+          <a:xfrm>
+            <a:off x="10725912" y="6400800"/>
+            <a:ext cx="914400" cy="274320"/>
+          </a:xfrm>
+          <a:prstGeom prst="rect">
+            <a:avLst/>
+          </a:prstGeom>
+          <a:noFill/>
+          <a:ln/>
+        </p:spPr>
+        <p:txBody>
+          <a:bodyPr wrap="square" lIns="0" tIns="0" rIns="0" bIns="0" rtlCol="0" anchor="ctr"/>
+          <a:lstStyle/>
+          <a:p>
+            <a:pPr algn="r" indent="0" marL="0">
+              <a:buNone/>
+            </a:pPr>
+            <a:r>
+              <a:rPr lang="en-US" sz="1000" dirty="0">
+                <a:solidFill>
+                  <a:srgbClr val="5B6573"/>
+                </a:solidFill>
+                <a:latin typeface="Calibri" pitchFamily="34" charset="0"/>
+                <a:ea typeface="Calibri" pitchFamily="34" charset="-122"/>
+                <a:cs typeface="Calibri" pitchFamily="34" charset="-120"/>
+              </a:rPr>
+              <a:t>11 / 19</a:t>
+            </a:r>
+            <a:endParaRPr lang="en-US" sz="1000" dirty="0"/>
+          </a:p>
+        </p:txBody>
+      </p:sp>
+    </p:spTree>
+  </p:cSld>
+  <p:clrMapOvr>
+    <a:masterClrMapping/>
+  </p:clrMapOvr>
+</p:sld>
+</file>
+
+<file path=ppt/slides/slide12.xml><?xml version="1.0" encoding="utf-8"?>
+<p:sld xmlns:a="http://schemas.openxmlformats.org/drawingml/2006/main" xmlns:r="http://schemas.openxmlformats.org/officeDocument/2006/relationships" xmlns:p="http://schemas.openxmlformats.org/presentationml/2006/main">
+  <p:cSld name="Slide 12">
+    <p:bg>
+      <p:bgPr>
+        <a:solidFill>
+          <a:srgbClr val="FFFFFF"/>
+        </a:solidFill>
+      </p:bgPr>
+    </p:bg>
+    <p:spTree>
+      <p:nvGrpSpPr>
+        <p:cNvPr id="1" name=""/>
+        <p:cNvGrpSpPr/>
+        <p:nvPr/>
+      </p:nvGrpSpPr>
+      <p:grpSpPr>
+        <a:xfrm>
+          <a:off x="0" y="0"/>
+          <a:ext cx="0" cy="0"/>
+          <a:chOff x="0" y="0"/>
+          <a:chExt cx="0" cy="0"/>
+        </a:xfrm>
+      </p:grpSpPr>
+      <p:sp>
+        <p:nvSpPr>
+          <p:cNvPr id="2" name="Text 0"/>
+          <p:cNvSpPr txBox="1"/>
+          <p:nvPr/>
+        </p:nvSpPr>
+        <p:spPr>
+          <a:xfrm>
+            <a:off x="548640" y="365760"/>
+            <a:ext cx="10972800" cy="274320"/>
+          </a:xfrm>
+          <a:prstGeom prst="rect">
+            <a:avLst/>
+          </a:prstGeom>
+          <a:noFill/>
+          <a:ln/>
+        </p:spPr>
+        <p:txBody>
+          <a:bodyPr wrap="square" lIns="0" tIns="0" rIns="0" bIns="0" rtlCol="0" anchor="ctr"/>
+          <a:lstStyle/>
+          <a:p>
+            <a:pPr indent="0" marL="0">
+              <a:buNone/>
+            </a:pPr>
+            <a:r>
+              <a:rPr lang="en-US" sz="1200" b="1" spc="200" kern="0" dirty="0">
+                <a:solidFill>
+                  <a:srgbClr val="D99A1E"/>
+                </a:solidFill>
+                <a:latin typeface="Calibri" pitchFamily="34" charset="0"/>
+                <a:ea typeface="Calibri" pitchFamily="34" charset="-122"/>
+                <a:cs typeface="Calibri" pitchFamily="34" charset="-120"/>
+              </a:rPr>
               <a:t>FINDING 7 · WHAT EYES IN ORBIT BUY</a:t>
             </a:r>
             <a:endParaRPr lang="en-US" sz="1200" dirty="0"/>
@@ -8422,7 +9969,7 @@
                 <a:ea typeface="Calibri" pitchFamily="34" charset="-122"/>
                 <a:cs typeface="Calibri" pitchFamily="34" charset="-120"/>
               </a:rPr>
-              <a:t>10 / 17</a:t>
+              <a:t>12 / 19</a:t>
             </a:r>
             <a:endParaRPr lang="en-US" sz="1000" dirty="0"/>
           </a:p>
@@ -8436,9 +9983,9 @@
 </p:sld>
 </file>
 
-<file path=ppt/slides/slide11.xml><?xml version="1.0" encoding="utf-8"?>
+<file path=ppt/slides/slide13.xml><?xml version="1.0" encoding="utf-8"?>
 <p:sld xmlns:a="http://schemas.openxmlformats.org/drawingml/2006/main" xmlns:r="http://schemas.openxmlformats.org/officeDocument/2006/relationships" xmlns:p="http://schemas.openxmlformats.org/presentationml/2006/main">
-  <p:cSld name="Slide 11">
+  <p:cSld name="Slide 13">
     <p:bg>
       <p:bgPr>
         <a:solidFill>
@@ -8572,7 +10119,7 @@
       </p:graphicFrame>
       <p:graphicFrame>
         <p:nvGraphicFramePr>
-          <p:cNvPr id="12" name="Table 0"/>
+          <p:cNvPr id="14" name="Table 0"/>
           <p:cNvGraphicFramePr>
             <a:graphicFrameLocks noGrp="1"/>
           </p:cNvGraphicFramePr>
@@ -10526,7 +12073,7 @@
                 <a:ea typeface="Calibri" pitchFamily="34" charset="-122"/>
                 <a:cs typeface="Calibri" pitchFamily="34" charset="-120"/>
               </a:rPr>
-              <a:t>11 / 17</a:t>
+              <a:t>13 / 19</a:t>
             </a:r>
             <a:endParaRPr lang="en-US" sz="1000" dirty="0"/>
           </a:p>
@@ -10540,9 +12087,9 @@
 </p:sld>
 </file>
 
-<file path=ppt/slides/slide12.xml><?xml version="1.0" encoding="utf-8"?>
+<file path=ppt/slides/slide14.xml><?xml version="1.0" encoding="utf-8"?>
 <p:sld xmlns:a="http://schemas.openxmlformats.org/drawingml/2006/main" xmlns:r="http://schemas.openxmlformats.org/officeDocument/2006/relationships" xmlns:p="http://schemas.openxmlformats.org/presentationml/2006/main">
-  <p:cSld name="Slide 12">
+  <p:cSld name="Slide 14">
     <p:bg>
       <p:bgPr>
         <a:solidFill>
@@ -10644,7 +12191,7 @@
       </p:sp>
       <p:graphicFrame>
         <p:nvGraphicFramePr>
-          <p:cNvPr id="13" name="Table 0"/>
+          <p:cNvPr id="15" name="Table 0"/>
           <p:cNvGraphicFramePr>
             <a:graphicFrameLocks noGrp="1"/>
           </p:cNvGraphicFramePr>
@@ -12468,6 +14015,530 @@
                           <a:cs typeface="Calibri" pitchFamily="34" charset="-120"/>
                         </a:rPr>
                         <a:t>Moderate confidence</a:t>
+                      </a:r>
+                      <a:endParaRPr lang="en-US" sz="1200" dirty="0">
+                        <a:latin typeface="Calibri" charset="0"/>
+                        <a:ea typeface="Calibri" charset="0"/>
+                        <a:cs typeface="Calibri" charset="0"/>
+                      </a:endParaRPr>
+                    </a:p>
+                  </a:txBody>
+                  <a:tcPr marL="91440" marR="91440" marT="45720" marB="45720" anchor="ctr">
+                    <a:lnL w="6350" cap="flat" cmpd="sng" algn="ctr">
+                      <a:solidFill>
+                        <a:srgbClr val="D5DAE1"/>
+                      </a:solidFill>
+                      <a:prstDash val="solid"/>
+                      <a:round/>
+                      <a:headEnd type="none" w="med" len="med"/>
+                      <a:tailEnd type="none" w="med" len="med"/>
+                    </a:lnL>
+                    <a:lnR w="6350" cap="flat" cmpd="sng" algn="ctr">
+                      <a:solidFill>
+                        <a:srgbClr val="D5DAE1"/>
+                      </a:solidFill>
+                      <a:prstDash val="solid"/>
+                      <a:round/>
+                      <a:headEnd type="none" w="med" len="med"/>
+                      <a:tailEnd type="none" w="med" len="med"/>
+                    </a:lnR>
+                    <a:lnT w="6350" cap="flat" cmpd="sng" algn="ctr">
+                      <a:solidFill>
+                        <a:srgbClr val="D5DAE1"/>
+                      </a:solidFill>
+                      <a:prstDash val="solid"/>
+                      <a:round/>
+                      <a:headEnd type="none" w="med" len="med"/>
+                      <a:tailEnd type="none" w="med" len="med"/>
+                    </a:lnT>
+                    <a:lnB w="6350" cap="flat" cmpd="sng" algn="ctr">
+                      <a:solidFill>
+                        <a:srgbClr val="D5DAE1"/>
+                      </a:solidFill>
+                      <a:prstDash val="solid"/>
+                      <a:round/>
+                      <a:headEnd type="none" w="med" len="med"/>
+                      <a:tailEnd type="none" w="med" len="med"/>
+                    </a:lnB>
+                  </a:tcPr>
+                </a:tc>
+              </a:tr>
+              <a:tr h="0">
+                <a:tc>
+                  <a:txBody>
+                    <a:bodyPr/>
+                    <a:lstStyle/>
+                    <a:p>
+                      <a:pPr indent="0" marL="0">
+                        <a:buNone/>
+                      </a:pPr>
+                      <a:r>
+                        <a:rPr lang="en-US" sz="1200" dirty="0">
+                          <a:solidFill>
+                            <a:srgbClr val="1B2433"/>
+                          </a:solidFill>
+                          <a:latin typeface="Calibri" pitchFamily="34" charset="0"/>
+                          <a:ea typeface="Calibri" pitchFamily="34" charset="-122"/>
+                          <a:cs typeface="Calibri" pitchFamily="34" charset="-120"/>
+                        </a:rPr>
+                        <a:t>Military-use classifier</a:t>
+                      </a:r>
+                      <a:endParaRPr lang="en-US" sz="1200" dirty="0">
+                        <a:latin typeface="Calibri" charset="0"/>
+                        <a:ea typeface="Calibri" charset="0"/>
+                        <a:cs typeface="Calibri" charset="0"/>
+                      </a:endParaRPr>
+                    </a:p>
+                  </a:txBody>
+                  <a:tcPr marL="91440" marR="91440" marT="45720" marB="45720" anchor="ctr">
+                    <a:lnL w="6350" cap="flat" cmpd="sng" algn="ctr">
+                      <a:solidFill>
+                        <a:srgbClr val="D5DAE1"/>
+                      </a:solidFill>
+                      <a:prstDash val="solid"/>
+                      <a:round/>
+                      <a:headEnd type="none" w="med" len="med"/>
+                      <a:tailEnd type="none" w="med" len="med"/>
+                    </a:lnL>
+                    <a:lnR w="6350" cap="flat" cmpd="sng" algn="ctr">
+                      <a:solidFill>
+                        <a:srgbClr val="D5DAE1"/>
+                      </a:solidFill>
+                      <a:prstDash val="solid"/>
+                      <a:round/>
+                      <a:headEnd type="none" w="med" len="med"/>
+                      <a:tailEnd type="none" w="med" len="med"/>
+                    </a:lnR>
+                    <a:lnT w="6350" cap="flat" cmpd="sng" algn="ctr">
+                      <a:solidFill>
+                        <a:srgbClr val="D5DAE1"/>
+                      </a:solidFill>
+                      <a:prstDash val="solid"/>
+                      <a:round/>
+                      <a:headEnd type="none" w="med" len="med"/>
+                      <a:tailEnd type="none" w="med" len="med"/>
+                    </a:lnT>
+                    <a:lnB w="6350" cap="flat" cmpd="sng" algn="ctr">
+                      <a:solidFill>
+                        <a:srgbClr val="D5DAE1"/>
+                      </a:solidFill>
+                      <a:prstDash val="solid"/>
+                      <a:round/>
+                      <a:headEnd type="none" w="med" len="med"/>
+                      <a:tailEnd type="none" w="med" len="med"/>
+                    </a:lnB>
+                  </a:tcPr>
+                </a:tc>
+                <a:tc>
+                  <a:txBody>
+                    <a:bodyPr/>
+                    <a:lstStyle/>
+                    <a:p>
+                      <a:pPr indent="0" marL="0">
+                        <a:buNone/>
+                      </a:pPr>
+                      <a:r>
+                        <a:rPr lang="en-US" sz="1200" dirty="0">
+                          <a:solidFill>
+                            <a:srgbClr val="1B2433"/>
+                          </a:solidFill>
+                          <a:latin typeface="Calibri" pitchFamily="34" charset="0"/>
+                          <a:ea typeface="Calibri" pitchFamily="34" charset="-122"/>
+                          <a:cs typeface="Calibri" pitchFamily="34" charset="-120"/>
+                        </a:rPr>
+                        <a:t>out-of-time ROC-AUC 0.79 (trained 2014, tested on 2014-2020 launches)</a:t>
+                      </a:r>
+                      <a:endParaRPr lang="en-US" sz="1200" dirty="0">
+                        <a:latin typeface="Calibri" charset="0"/>
+                        <a:ea typeface="Calibri" charset="0"/>
+                        <a:cs typeface="Calibri" charset="0"/>
+                      </a:endParaRPr>
+                    </a:p>
+                  </a:txBody>
+                  <a:tcPr marL="91440" marR="91440" marT="45720" marB="45720" anchor="ctr">
+                    <a:lnL w="6350" cap="flat" cmpd="sng" algn="ctr">
+                      <a:solidFill>
+                        <a:srgbClr val="D5DAE1"/>
+                      </a:solidFill>
+                      <a:prstDash val="solid"/>
+                      <a:round/>
+                      <a:headEnd type="none" w="med" len="med"/>
+                      <a:tailEnd type="none" w="med" len="med"/>
+                    </a:lnL>
+                    <a:lnR w="6350" cap="flat" cmpd="sng" algn="ctr">
+                      <a:solidFill>
+                        <a:srgbClr val="D5DAE1"/>
+                      </a:solidFill>
+                      <a:prstDash val="solid"/>
+                      <a:round/>
+                      <a:headEnd type="none" w="med" len="med"/>
+                      <a:tailEnd type="none" w="med" len="med"/>
+                    </a:lnR>
+                    <a:lnT w="6350" cap="flat" cmpd="sng" algn="ctr">
+                      <a:solidFill>
+                        <a:srgbClr val="D5DAE1"/>
+                      </a:solidFill>
+                      <a:prstDash val="solid"/>
+                      <a:round/>
+                      <a:headEnd type="none" w="med" len="med"/>
+                      <a:tailEnd type="none" w="med" len="med"/>
+                    </a:lnT>
+                    <a:lnB w="6350" cap="flat" cmpd="sng" algn="ctr">
+                      <a:solidFill>
+                        <a:srgbClr val="D5DAE1"/>
+                      </a:solidFill>
+                      <a:prstDash val="solid"/>
+                      <a:round/>
+                      <a:headEnd type="none" w="med" len="med"/>
+                      <a:tailEnd type="none" w="med" len="med"/>
+                    </a:lnB>
+                  </a:tcPr>
+                </a:tc>
+                <a:tc>
+                  <a:txBody>
+                    <a:bodyPr/>
+                    <a:lstStyle/>
+                    <a:p>
+                      <a:pPr indent="0" marL="0">
+                        <a:buNone/>
+                      </a:pPr>
+                      <a:r>
+                        <a:rPr lang="en-US" sz="1200" dirty="0">
+                          <a:solidFill>
+                            <a:srgbClr val="1B2433"/>
+                          </a:solidFill>
+                          <a:latin typeface="Calibri" pitchFamily="34" charset="0"/>
+                          <a:ea typeface="Calibri" pitchFamily="34" charset="-122"/>
+                          <a:cs typeface="Calibri" pitchFamily="34" charset="-120"/>
+                        </a:rPr>
+                        <a:t>Cross-validation alone would have picked gradient-boosted trees (CV 0.94); out of time they fell to 0.64, so the simpler model was chosen</a:t>
+                      </a:r>
+                      <a:endParaRPr lang="en-US" sz="1200" dirty="0">
+                        <a:latin typeface="Calibri" charset="0"/>
+                        <a:ea typeface="Calibri" charset="0"/>
+                        <a:cs typeface="Calibri" charset="0"/>
+                      </a:endParaRPr>
+                    </a:p>
+                  </a:txBody>
+                  <a:tcPr marL="91440" marR="91440" marT="45720" marB="45720" anchor="ctr">
+                    <a:lnL w="6350" cap="flat" cmpd="sng" algn="ctr">
+                      <a:solidFill>
+                        <a:srgbClr val="D5DAE1"/>
+                      </a:solidFill>
+                      <a:prstDash val="solid"/>
+                      <a:round/>
+                      <a:headEnd type="none" w="med" len="med"/>
+                      <a:tailEnd type="none" w="med" len="med"/>
+                    </a:lnL>
+                    <a:lnR w="6350" cap="flat" cmpd="sng" algn="ctr">
+                      <a:solidFill>
+                        <a:srgbClr val="D5DAE1"/>
+                      </a:solidFill>
+                      <a:prstDash val="solid"/>
+                      <a:round/>
+                      <a:headEnd type="none" w="med" len="med"/>
+                      <a:tailEnd type="none" w="med" len="med"/>
+                    </a:lnR>
+                    <a:lnT w="6350" cap="flat" cmpd="sng" algn="ctr">
+                      <a:solidFill>
+                        <a:srgbClr val="D5DAE1"/>
+                      </a:solidFill>
+                      <a:prstDash val="solid"/>
+                      <a:round/>
+                      <a:headEnd type="none" w="med" len="med"/>
+                      <a:tailEnd type="none" w="med" len="med"/>
+                    </a:lnT>
+                    <a:lnB w="6350" cap="flat" cmpd="sng" algn="ctr">
+                      <a:solidFill>
+                        <a:srgbClr val="D5DAE1"/>
+                      </a:solidFill>
+                      <a:prstDash val="solid"/>
+                      <a:round/>
+                      <a:headEnd type="none" w="med" len="med"/>
+                      <a:tailEnd type="none" w="med" len="med"/>
+                    </a:lnB>
+                  </a:tcPr>
+                </a:tc>
+                <a:tc>
+                  <a:txBody>
+                    <a:bodyPr/>
+                    <a:lstStyle/>
+                    <a:p>
+                      <a:pPr indent="0" marL="0">
+                        <a:buNone/>
+                      </a:pPr>
+                      <a:r>
+                        <a:rPr lang="en-US" sz="1200" b="1" dirty="0">
+                          <a:solidFill>
+                            <a:srgbClr val="2E7D32"/>
+                          </a:solidFill>
+                          <a:latin typeface="Calibri" pitchFamily="34" charset="0"/>
+                          <a:ea typeface="Calibri" pitchFamily="34" charset="-122"/>
+                          <a:cs typeface="Calibri" pitchFamily="34" charset="-120"/>
+                        </a:rPr>
+                        <a:t>Confirmed (out of time)</a:t>
+                      </a:r>
+                      <a:endParaRPr lang="en-US" sz="1200" dirty="0">
+                        <a:latin typeface="Calibri" charset="0"/>
+                        <a:ea typeface="Calibri" charset="0"/>
+                        <a:cs typeface="Calibri" charset="0"/>
+                      </a:endParaRPr>
+                    </a:p>
+                  </a:txBody>
+                  <a:tcPr marL="91440" marR="91440" marT="45720" marB="45720" anchor="ctr">
+                    <a:lnL w="6350" cap="flat" cmpd="sng" algn="ctr">
+                      <a:solidFill>
+                        <a:srgbClr val="D5DAE1"/>
+                      </a:solidFill>
+                      <a:prstDash val="solid"/>
+                      <a:round/>
+                      <a:headEnd type="none" w="med" len="med"/>
+                      <a:tailEnd type="none" w="med" len="med"/>
+                    </a:lnL>
+                    <a:lnR w="6350" cap="flat" cmpd="sng" algn="ctr">
+                      <a:solidFill>
+                        <a:srgbClr val="D5DAE1"/>
+                      </a:solidFill>
+                      <a:prstDash val="solid"/>
+                      <a:round/>
+                      <a:headEnd type="none" w="med" len="med"/>
+                      <a:tailEnd type="none" w="med" len="med"/>
+                    </a:lnR>
+                    <a:lnT w="6350" cap="flat" cmpd="sng" algn="ctr">
+                      <a:solidFill>
+                        <a:srgbClr val="D5DAE1"/>
+                      </a:solidFill>
+                      <a:prstDash val="solid"/>
+                      <a:round/>
+                      <a:headEnd type="none" w="med" len="med"/>
+                      <a:tailEnd type="none" w="med" len="med"/>
+                    </a:lnT>
+                    <a:lnB w="6350" cap="flat" cmpd="sng" algn="ctr">
+                      <a:solidFill>
+                        <a:srgbClr val="D5DAE1"/>
+                      </a:solidFill>
+                      <a:prstDash val="solid"/>
+                      <a:round/>
+                      <a:headEnd type="none" w="med" len="med"/>
+                      <a:tailEnd type="none" w="med" len="med"/>
+                    </a:lnB>
+                  </a:tcPr>
+                </a:tc>
+              </a:tr>
+              <a:tr h="0">
+                <a:tc>
+                  <a:txBody>
+                    <a:bodyPr/>
+                    <a:lstStyle/>
+                    <a:p>
+                      <a:pPr indent="0" marL="0">
+                        <a:buNone/>
+                      </a:pPr>
+                      <a:r>
+                        <a:rPr lang="en-US" sz="1200" dirty="0">
+                          <a:solidFill>
+                            <a:srgbClr val="1B2433"/>
+                          </a:solidFill>
+                          <a:latin typeface="Calibri" pitchFamily="34" charset="0"/>
+                          <a:ea typeface="Calibri" pitchFamily="34" charset="-122"/>
+                          <a:cs typeface="Calibri" pitchFamily="34" charset="-120"/>
+                        </a:rPr>
+                        <a:t>Close-approach screening</a:t>
+                      </a:r>
+                      <a:endParaRPr lang="en-US" sz="1200" dirty="0">
+                        <a:latin typeface="Calibri" charset="0"/>
+                        <a:ea typeface="Calibri" charset="0"/>
+                        <a:cs typeface="Calibri" charset="0"/>
+                      </a:endParaRPr>
+                    </a:p>
+                  </a:txBody>
+                  <a:tcPr marL="91440" marR="91440" marT="45720" marB="45720" anchor="ctr">
+                    <a:lnL w="6350" cap="flat" cmpd="sng" algn="ctr">
+                      <a:solidFill>
+                        <a:srgbClr val="D5DAE1"/>
+                      </a:solidFill>
+                      <a:prstDash val="solid"/>
+                      <a:round/>
+                      <a:headEnd type="none" w="med" len="med"/>
+                      <a:tailEnd type="none" w="med" len="med"/>
+                    </a:lnL>
+                    <a:lnR w="6350" cap="flat" cmpd="sng" algn="ctr">
+                      <a:solidFill>
+                        <a:srgbClr val="D5DAE1"/>
+                      </a:solidFill>
+                      <a:prstDash val="solid"/>
+                      <a:round/>
+                      <a:headEnd type="none" w="med" len="med"/>
+                      <a:tailEnd type="none" w="med" len="med"/>
+                    </a:lnR>
+                    <a:lnT w="6350" cap="flat" cmpd="sng" algn="ctr">
+                      <a:solidFill>
+                        <a:srgbClr val="D5DAE1"/>
+                      </a:solidFill>
+                      <a:prstDash val="solid"/>
+                      <a:round/>
+                      <a:headEnd type="none" w="med" len="med"/>
+                      <a:tailEnd type="none" w="med" len="med"/>
+                    </a:lnT>
+                    <a:lnB w="6350" cap="flat" cmpd="sng" algn="ctr">
+                      <a:solidFill>
+                        <a:srgbClr val="D5DAE1"/>
+                      </a:solidFill>
+                      <a:prstDash val="solid"/>
+                      <a:round/>
+                      <a:headEnd type="none" w="med" len="med"/>
+                      <a:tailEnd type="none" w="med" len="med"/>
+                    </a:lnB>
+                  </a:tcPr>
+                </a:tc>
+                <a:tc>
+                  <a:txBody>
+                    <a:bodyPr/>
+                    <a:lstStyle/>
+                    <a:p>
+                      <a:pPr indent="0" marL="0">
+                        <a:buNone/>
+                      </a:pPr>
+                      <a:r>
+                        <a:rPr lang="en-US" sz="1200" dirty="0">
+                          <a:solidFill>
+                            <a:srgbClr val="1B2433"/>
+                          </a:solidFill>
+                          <a:latin typeface="Calibri" pitchFamily="34" charset="0"/>
+                          <a:ea typeface="Calibri" pitchFamily="34" charset="-122"/>
+                          <a:cs typeface="Calibri" pitchFamily="34" charset="-120"/>
+                        </a:rPr>
+                        <a:t>18,355 crossing encounters &lt; 5 km in two 24-hour screenings</a:t>
+                      </a:r>
+                      <a:endParaRPr lang="en-US" sz="1200" dirty="0">
+                        <a:latin typeface="Calibri" charset="0"/>
+                        <a:ea typeface="Calibri" charset="0"/>
+                        <a:cs typeface="Calibri" charset="0"/>
+                      </a:endParaRPr>
+                    </a:p>
+                  </a:txBody>
+                  <a:tcPr marL="91440" marR="91440" marT="45720" marB="45720" anchor="ctr">
+                    <a:lnL w="6350" cap="flat" cmpd="sng" algn="ctr">
+                      <a:solidFill>
+                        <a:srgbClr val="D5DAE1"/>
+                      </a:solidFill>
+                      <a:prstDash val="solid"/>
+                      <a:round/>
+                      <a:headEnd type="none" w="med" len="med"/>
+                      <a:tailEnd type="none" w="med" len="med"/>
+                    </a:lnL>
+                    <a:lnR w="6350" cap="flat" cmpd="sng" algn="ctr">
+                      <a:solidFill>
+                        <a:srgbClr val="D5DAE1"/>
+                      </a:solidFill>
+                      <a:prstDash val="solid"/>
+                      <a:round/>
+                      <a:headEnd type="none" w="med" len="med"/>
+                      <a:tailEnd type="none" w="med" len="med"/>
+                    </a:lnR>
+                    <a:lnT w="6350" cap="flat" cmpd="sng" algn="ctr">
+                      <a:solidFill>
+                        <a:srgbClr val="D5DAE1"/>
+                      </a:solidFill>
+                      <a:prstDash val="solid"/>
+                      <a:round/>
+                      <a:headEnd type="none" w="med" len="med"/>
+                      <a:tailEnd type="none" w="med" len="med"/>
+                    </a:lnT>
+                    <a:lnB w="6350" cap="flat" cmpd="sng" algn="ctr">
+                      <a:solidFill>
+                        <a:srgbClr val="D5DAE1"/>
+                      </a:solidFill>
+                      <a:prstDash val="solid"/>
+                      <a:round/>
+                      <a:headEnd type="none" w="med" len="med"/>
+                      <a:tailEnd type="none" w="med" len="med"/>
+                    </a:lnB>
+                  </a:tcPr>
+                </a:tc>
+                <a:tc>
+                  <a:txBody>
+                    <a:bodyPr/>
+                    <a:lstStyle/>
+                    <a:p>
+                      <a:pPr indent="0" marL="0">
+                        <a:buNone/>
+                      </a:pPr>
+                      <a:r>
+                        <a:rPr lang="en-US" sz="1200" dirty="0">
+                          <a:solidFill>
+                            <a:srgbClr val="1B2433"/>
+                          </a:solidFill>
+                          <a:latin typeface="Calibri" pitchFamily="34" charset="0"/>
+                          <a:ea typeface="Calibri" pitchFamily="34" charset="-122"/>
+                          <a:cs typeface="Calibri" pitchFamily="34" charset="-120"/>
+                        </a:rPr>
+                        <a:t>Elements used only inside their fresh window (under ~3 days old); co-orbiting and docked pairs removed</a:t>
+                      </a:r>
+                      <a:endParaRPr lang="en-US" sz="1200" dirty="0">
+                        <a:latin typeface="Calibri" charset="0"/>
+                        <a:ea typeface="Calibri" charset="0"/>
+                        <a:cs typeface="Calibri" charset="0"/>
+                      </a:endParaRPr>
+                    </a:p>
+                  </a:txBody>
+                  <a:tcPr marL="91440" marR="91440" marT="45720" marB="45720" anchor="ctr">
+                    <a:lnL w="6350" cap="flat" cmpd="sng" algn="ctr">
+                      <a:solidFill>
+                        <a:srgbClr val="D5DAE1"/>
+                      </a:solidFill>
+                      <a:prstDash val="solid"/>
+                      <a:round/>
+                      <a:headEnd type="none" w="med" len="med"/>
+                      <a:tailEnd type="none" w="med" len="med"/>
+                    </a:lnL>
+                    <a:lnR w="6350" cap="flat" cmpd="sng" algn="ctr">
+                      <a:solidFill>
+                        <a:srgbClr val="D5DAE1"/>
+                      </a:solidFill>
+                      <a:prstDash val="solid"/>
+                      <a:round/>
+                      <a:headEnd type="none" w="med" len="med"/>
+                      <a:tailEnd type="none" w="med" len="med"/>
+                    </a:lnR>
+                    <a:lnT w="6350" cap="flat" cmpd="sng" algn="ctr">
+                      <a:solidFill>
+                        <a:srgbClr val="D5DAE1"/>
+                      </a:solidFill>
+                      <a:prstDash val="solid"/>
+                      <a:round/>
+                      <a:headEnd type="none" w="med" len="med"/>
+                      <a:tailEnd type="none" w="med" len="med"/>
+                    </a:lnT>
+                    <a:lnB w="6350" cap="flat" cmpd="sng" algn="ctr">
+                      <a:solidFill>
+                        <a:srgbClr val="D5DAE1"/>
+                      </a:solidFill>
+                      <a:prstDash val="solid"/>
+                      <a:round/>
+                      <a:headEnd type="none" w="med" len="med"/>
+                      <a:tailEnd type="none" w="med" len="med"/>
+                    </a:lnB>
+                  </a:tcPr>
+                </a:tc>
+                <a:tc>
+                  <a:txBody>
+                    <a:bodyPr/>
+                    <a:lstStyle/>
+                    <a:p>
+                      <a:pPr indent="0" marL="0">
+                        <a:buNone/>
+                      </a:pPr>
+                      <a:r>
+                        <a:rPr lang="en-US" sz="1200" b="1" dirty="0">
+                          <a:solidFill>
+                            <a:srgbClr val="2E7D32"/>
+                          </a:solidFill>
+                          <a:latin typeface="Calibri" pitchFamily="34" charset="0"/>
+                          <a:ea typeface="Calibri" pitchFamily="34" charset="-122"/>
+                          <a:cs typeface="Calibri" pitchFamily="34" charset="-120"/>
+                        </a:rPr>
+                        <a:t>Screening grade (~1 km)</a:t>
                       </a:r>
                       <a:endParaRPr lang="en-US" sz="1200" dirty="0">
                         <a:latin typeface="Calibri" charset="0"/>
@@ -12592,7 +14663,7 @@
                 <a:ea typeface="Calibri" pitchFamily="34" charset="-122"/>
                 <a:cs typeface="Calibri" pitchFamily="34" charset="-120"/>
               </a:rPr>
-              <a:t>12 / 17</a:t>
+              <a:t>14 / 19</a:t>
             </a:r>
             <a:endParaRPr lang="en-US" sz="1000" dirty="0"/>
           </a:p>
@@ -12606,9 +14677,9 @@
 </p:sld>
 </file>
 
-<file path=ppt/slides/slide13.xml><?xml version="1.0" encoding="utf-8"?>
+<file path=ppt/slides/slide15.xml><?xml version="1.0" encoding="utf-8"?>
 <p:sld xmlns:a="http://schemas.openxmlformats.org/drawingml/2006/main" xmlns:r="http://schemas.openxmlformats.org/officeDocument/2006/relationships" xmlns:p="http://schemas.openxmlformats.org/presentationml/2006/main">
-  <p:cSld name="Slide 13">
+  <p:cSld name="Slide 15">
     <p:bg>
       <p:bgPr>
         <a:solidFill>
@@ -12710,7 +14781,7 @@
       </p:sp>
       <p:graphicFrame>
         <p:nvGraphicFramePr>
-          <p:cNvPr id="14" name="Table 0"/>
+          <p:cNvPr id="16" name="Table 0"/>
           <p:cNvGraphicFramePr>
             <a:graphicFrameLocks noGrp="1"/>
           </p:cNvGraphicFramePr>
@@ -14943,7 +17014,7 @@
                 <a:ea typeface="Calibri" pitchFamily="34" charset="-122"/>
                 <a:cs typeface="Calibri" pitchFamily="34" charset="-120"/>
               </a:rPr>
-              <a:t>13 / 17</a:t>
+              <a:t>15 / 19</a:t>
             </a:r>
             <a:endParaRPr lang="en-US" sz="1000" dirty="0"/>
           </a:p>
@@ -14957,9 +17028,9 @@
 </p:sld>
 </file>
 
-<file path=ppt/slides/slide14.xml><?xml version="1.0" encoding="utf-8"?>
+<file path=ppt/slides/slide16.xml><?xml version="1.0" encoding="utf-8"?>
 <p:sld xmlns:a="http://schemas.openxmlformats.org/drawingml/2006/main" xmlns:r="http://schemas.openxmlformats.org/officeDocument/2006/relationships" xmlns:p="http://schemas.openxmlformats.org/presentationml/2006/main">
-  <p:cSld name="Slide 14">
+  <p:cSld name="Slide 16">
     <p:bg>
       <p:bgPr>
         <a:solidFill>
@@ -16353,7 +18424,7 @@
                 <a:ea typeface="Calibri" pitchFamily="34" charset="-122"/>
                 <a:cs typeface="Calibri" pitchFamily="34" charset="-120"/>
               </a:rPr>
-              <a:t>14 / 17</a:t>
+              <a:t>16 / 19</a:t>
             </a:r>
             <a:endParaRPr lang="en-US" sz="1000" dirty="0"/>
           </a:p>
@@ -16367,9 +18438,9 @@
 </p:sld>
 </file>
 
-<file path=ppt/slides/slide15.xml><?xml version="1.0" encoding="utf-8"?>
+<file path=ppt/slides/slide17.xml><?xml version="1.0" encoding="utf-8"?>
 <p:sld xmlns:a="http://schemas.openxmlformats.org/drawingml/2006/main" xmlns:r="http://schemas.openxmlformats.org/officeDocument/2006/relationships" xmlns:p="http://schemas.openxmlformats.org/presentationml/2006/main">
-  <p:cSld name="Slide 15">
+  <p:cSld name="Slide 17">
     <p:bg>
       <p:bgPr>
         <a:solidFill>
@@ -16471,7 +18542,7 @@
       </p:sp>
       <p:graphicFrame>
         <p:nvGraphicFramePr>
-          <p:cNvPr id="16" name="Table 0"/>
+          <p:cNvPr id="18" name="Table 0"/>
           <p:cNvGraphicFramePr>
             <a:graphicFrameLocks noGrp="1"/>
           </p:cNvGraphicFramePr>
@@ -18157,7 +20228,7 @@
                 <a:ea typeface="Calibri" pitchFamily="34" charset="-122"/>
                 <a:cs typeface="Calibri" pitchFamily="34" charset="-120"/>
               </a:rPr>
-              <a:t>15 / 17</a:t>
+              <a:t>17 / 19</a:t>
             </a:r>
             <a:endParaRPr lang="en-US" sz="1000" dirty="0"/>
           </a:p>
@@ -18171,9 +20242,9 @@
 </p:sld>
 </file>
 
-<file path=ppt/slides/slide16.xml><?xml version="1.0" encoding="utf-8"?>
+<file path=ppt/slides/slide18.xml><?xml version="1.0" encoding="utf-8"?>
 <p:sld xmlns:a="http://schemas.openxmlformats.org/drawingml/2006/main" xmlns:r="http://schemas.openxmlformats.org/officeDocument/2006/relationships" xmlns:p="http://schemas.openxmlformats.org/presentationml/2006/main">
-  <p:cSld name="Slide 16">
+  <p:cSld name="Slide 18">
     <p:bg>
       <p:bgPr>
         <a:solidFill>
@@ -18421,7 +20492,7 @@
                 <a:ea typeface="Calibri" pitchFamily="34" charset="-122"/>
                 <a:cs typeface="Calibri" pitchFamily="34" charset="-120"/>
               </a:rPr>
-              <a:t>10 stages, one command, deterministic: two runs give identical results for all headline numbers.</a:t>
+              <a:t>12 stages, one command, deterministic: two runs give identical results for all headline numbers.</a:t>
             </a:r>
             <a:endParaRPr lang="en-US" sz="1300" dirty="0"/>
           </a:p>
@@ -18575,7 +20646,7 @@
                 <a:ea typeface="Calibri" pitchFamily="34" charset="-122"/>
                 <a:cs typeface="Calibri" pitchFamily="34" charset="-120"/>
               </a:rPr>
-              <a:t>Change-points, concentration index, kinetic-gas risk index, survival curves, Poisson regression, periodogram, damped-trend forecast with back-test.</a:t>
+              <a:t>Change-points, concentration index, collision-risk index, SGP4 close-approach screening, survival curves, Poisson regression, periodogram, classifier with out-of-time test, damped-trend forecast.</a:t>
             </a:r>
             <a:endParaRPr lang="en-US" sz="1300" dirty="0"/>
           </a:p>
@@ -18883,7 +20954,7 @@
                 <a:ea typeface="Calibri" pitchFamily="34" charset="-122"/>
                 <a:cs typeface="Calibri" pitchFamily="34" charset="-120"/>
               </a:rPr>
-              <a:t>Booklet (PDF and Word), this deck, Power BI tables, annotated code.</a:t>
+              <a:t>Booklet and Technical Annex (PDF and Word), this deck, Power BI tables, annotated code.</a:t>
             </a:r>
             <a:endParaRPr lang="en-US" sz="1300" dirty="0"/>
           </a:p>
@@ -18961,7 +21032,7 @@
                 <a:ea typeface="Calibri" pitchFamily="34" charset="-122"/>
                 <a:cs typeface="Calibri" pitchFamily="34" charset="-120"/>
               </a:rPr>
-              <a:t>16 / 17</a:t>
+              <a:t>18 / 19</a:t>
             </a:r>
             <a:endParaRPr lang="en-US" sz="1000" dirty="0"/>
           </a:p>
@@ -18975,9 +21046,9 @@
 </p:sld>
 </file>
 
-<file path=ppt/slides/slide17.xml><?xml version="1.0" encoding="utf-8"?>
+<file path=ppt/slides/slide19.xml><?xml version="1.0" encoding="utf-8"?>
 <p:sld xmlns:a="http://schemas.openxmlformats.org/drawingml/2006/main" xmlns:r="http://schemas.openxmlformats.org/officeDocument/2006/relationships" xmlns:p="http://schemas.openxmlformats.org/presentationml/2006/main">
-  <p:cSld name="Slide 17">
+  <p:cSld name="Slide 19">
     <p:bg>
       <p:bgPr>
         <a:solidFill>
@@ -19254,7 +21325,7 @@
                 <a:ea typeface="Calibri" pitchFamily="34" charset="-122"/>
                 <a:cs typeface="Calibri" pitchFamily="34" charset="-120"/>
               </a:rPr>
-              <a:t>17 / 17</a:t>
+              <a:t>19 / 19</a:t>
             </a:r>
             <a:endParaRPr lang="en-US" sz="1000" dirty="0"/>
           </a:p>
@@ -19957,7 +22028,7 @@
                 <a:ea typeface="Calibri" pitchFamily="34" charset="-122"/>
                 <a:cs typeface="Calibri" pitchFamily="34" charset="-120"/>
               </a:rPr>
-              <a:t>2 / 17</a:t>
+              <a:t>2 / 19</a:t>
             </a:r>
             <a:endParaRPr lang="en-US" sz="1000" dirty="0"/>
           </a:p>
@@ -21509,7 +23580,7 @@
                 <a:ea typeface="Calibri" pitchFamily="34" charset="-122"/>
                 <a:cs typeface="Calibri" pitchFamily="34" charset="-120"/>
               </a:rPr>
-              <a:t>3 / 17</a:t>
+              <a:t>3 / 19</a:t>
             </a:r>
             <a:endParaRPr lang="en-US" sz="1000" dirty="0"/>
           </a:p>
@@ -21768,7 +23839,7 @@
                 <a:ea typeface="Calibri" pitchFamily="34" charset="-122"/>
                 <a:cs typeface="Calibri" pitchFamily="34" charset="-120"/>
               </a:rPr>
-              <a:t>4 / 17</a:t>
+              <a:t>4 / 19</a:t>
             </a:r>
             <a:endParaRPr lang="en-US" sz="1000" dirty="0"/>
           </a:p>
@@ -22206,7 +24277,7 @@
                 <a:ea typeface="Calibri" pitchFamily="34" charset="-122"/>
                 <a:cs typeface="Calibri" pitchFamily="34" charset="-120"/>
               </a:rPr>
-              <a:t>5 / 17</a:t>
+              <a:t>5 / 19</a:t>
             </a:r>
             <a:endParaRPr lang="en-US" sz="1000" dirty="0"/>
           </a:p>
@@ -22644,7 +24715,7 @@
                 <a:ea typeface="Calibri" pitchFamily="34" charset="-122"/>
                 <a:cs typeface="Calibri" pitchFamily="34" charset="-120"/>
               </a:rPr>
-              <a:t>6 / 17</a:t>
+              <a:t>6 / 19</a:t>
             </a:r>
             <a:endParaRPr lang="en-US" sz="1000" dirty="0"/>
           </a:p>
@@ -24306,7 +26377,7 @@
                 <a:ea typeface="Calibri" pitchFamily="34" charset="-122"/>
                 <a:cs typeface="Calibri" pitchFamily="34" charset="-120"/>
               </a:rPr>
-              <a:t>7 / 17</a:t>
+              <a:t>7 / 19</a:t>
             </a:r>
             <a:endParaRPr lang="en-US" sz="1000" dirty="0"/>
           </a:p>
@@ -24323,6 +26394,2205 @@
 <file path=ppt/slides/slide8.xml><?xml version="1.0" encoding="utf-8"?>
 <p:sld xmlns:a="http://schemas.openxmlformats.org/drawingml/2006/main" xmlns:r="http://schemas.openxmlformats.org/officeDocument/2006/relationships" xmlns:p="http://schemas.openxmlformats.org/presentationml/2006/main">
   <p:cSld name="Slide 8">
+    <p:bg>
+      <p:bgPr>
+        <a:solidFill>
+          <a:srgbClr val="FFFFFF"/>
+        </a:solidFill>
+      </p:bgPr>
+    </p:bg>
+    <p:spTree>
+      <p:nvGrpSpPr>
+        <p:cNvPr id="1" name=""/>
+        <p:cNvGrpSpPr/>
+        <p:nvPr/>
+      </p:nvGrpSpPr>
+      <p:grpSpPr>
+        <a:xfrm>
+          <a:off x="0" y="0"/>
+          <a:ext cx="0" cy="0"/>
+          <a:chOff x="0" y="0"/>
+          <a:chExt cx="0" cy="0"/>
+        </a:xfrm>
+      </p:grpSpPr>
+      <p:sp>
+        <p:nvSpPr>
+          <p:cNvPr id="2" name="Text 0"/>
+          <p:cNvSpPr txBox="1"/>
+          <p:nvPr/>
+        </p:nvSpPr>
+        <p:spPr>
+          <a:xfrm>
+            <a:off x="548640" y="365760"/>
+            <a:ext cx="10972800" cy="274320"/>
+          </a:xfrm>
+          <a:prstGeom prst="rect">
+            <a:avLst/>
+          </a:prstGeom>
+          <a:noFill/>
+          <a:ln/>
+        </p:spPr>
+        <p:txBody>
+          <a:bodyPr wrap="square" lIns="0" tIns="0" rIns="0" bIns="0" rtlCol="0" anchor="ctr"/>
+          <a:lstStyle/>
+          <a:p>
+            <a:pPr indent="0" marL="0">
+              <a:buNone/>
+            </a:pPr>
+            <a:r>
+              <a:rPr lang="en-US" sz="1200" b="1" spc="200" kern="0" dirty="0">
+                <a:solidFill>
+                  <a:srgbClr val="D99A1E"/>
+                </a:solidFill>
+                <a:latin typeface="Calibri" pitchFamily="34" charset="0"/>
+                <a:ea typeface="Calibri" pitchFamily="34" charset="-122"/>
+                <a:cs typeface="Calibri" pitchFamily="34" charset="-120"/>
+              </a:rPr>
+              <a:t>FINDING 4B · CLOSE CALLS</a:t>
+            </a:r>
+            <a:endParaRPr lang="en-US" sz="1200" dirty="0"/>
+          </a:p>
+        </p:txBody>
+      </p:sp>
+      <p:sp>
+        <p:nvSpPr>
+          <p:cNvPr id="3" name="Text 1"/>
+          <p:cNvSpPr txBox="1"/>
+          <p:nvPr/>
+        </p:nvSpPr>
+        <p:spPr>
+          <a:xfrm>
+            <a:off x="548640" y="658368"/>
+            <a:ext cx="11064240" cy="685800"/>
+          </a:xfrm>
+          <a:prstGeom prst="rect">
+            <a:avLst/>
+          </a:prstGeom>
+          <a:noFill/>
+          <a:ln/>
+        </p:spPr>
+        <p:txBody>
+          <a:bodyPr wrap="square" lIns="0" tIns="0" rIns="0" bIns="0" rtlCol="0" anchor="t"/>
+          <a:lstStyle/>
+          <a:p>
+            <a:pPr indent="0" marL="0">
+              <a:buNone/>
+            </a:pPr>
+            <a:r>
+              <a:rPr lang="en-US" sz="2800" b="1" dirty="0">
+                <a:solidFill>
+                  <a:srgbClr val="0B1D3A"/>
+                </a:solidFill>
+                <a:latin typeface="Cambria" pitchFamily="34" charset="0"/>
+                <a:ea typeface="Cambria" pitchFamily="34" charset="-122"/>
+                <a:cs typeface="Cambria" pitchFamily="34" charset="-120"/>
+              </a:rPr>
+              <a:t>One day of screening: thousands of near misses</a:t>
+            </a:r>
+            <a:endParaRPr lang="en-US" sz="2800" dirty="0"/>
+          </a:p>
+        </p:txBody>
+      </p:sp>
+      <p:graphicFrame>
+        <p:nvGraphicFramePr>
+          <p:cNvPr id="4" name="Chart 0" descr=""/>
+          <p:cNvGraphicFramePr/>
+          <p:nvPr/>
+        </p:nvGraphicFramePr>
+        <p:xfrm>
+          <a:off x="548640" y="1554480"/>
+          <a:ext cx="5669280" cy="3108960"/>
+        </p:xfrm>
+        <a:graphic xmlns:a="http://schemas.openxmlformats.org/drawingml/2006/main">
+          <a:graphicData uri="http://schemas.openxmlformats.org/drawingml/2006/chart">
+            <c:chart xmlns:c="http://schemas.openxmlformats.org/drawingml/2006/chart" r:id="rId1"/>
+          </a:graphicData>
+        </a:graphic>
+      </p:graphicFrame>
+      <p:sp>
+        <p:nvSpPr>
+          <p:cNvPr id="5" name="Text 2"/>
+          <p:cNvSpPr txBox="1"/>
+          <p:nvPr/>
+        </p:nvSpPr>
+        <p:spPr>
+          <a:xfrm>
+            <a:off x="548640" y="4846320"/>
+            <a:ext cx="5669280" cy="566928"/>
+          </a:xfrm>
+          <a:prstGeom prst="rect">
+            <a:avLst/>
+          </a:prstGeom>
+          <a:noFill/>
+          <a:ln/>
+        </p:spPr>
+        <p:txBody>
+          <a:bodyPr wrap="square" lIns="0" tIns="0" rIns="0" bIns="0" rtlCol="0" anchor="b"/>
+          <a:lstStyle/>
+          <a:p>
+            <a:pPr indent="0" marL="0">
+              <a:buNone/>
+            </a:pPr>
+            <a:r>
+              <a:rPr lang="en-US" sz="3600" b="1" dirty="0">
+                <a:solidFill>
+                  <a:srgbClr val="C0392B"/>
+                </a:solidFill>
+                <a:latin typeface="Cambria" pitchFamily="34" charset="0"/>
+                <a:ea typeface="Cambria" pitchFamily="34" charset="-122"/>
+                <a:cs typeface="Cambria" pitchFamily="34" charset="-120"/>
+              </a:rPr>
+              <a:t>10 Indian satellites</a:t>
+            </a:r>
+            <a:endParaRPr lang="en-US" sz="3600" dirty="0"/>
+          </a:p>
+        </p:txBody>
+      </p:sp>
+      <p:sp>
+        <p:nvSpPr>
+          <p:cNvPr id="6" name="Text 3"/>
+          <p:cNvSpPr txBox="1"/>
+          <p:nvPr/>
+        </p:nvSpPr>
+        <p:spPr>
+          <a:xfrm>
+            <a:off x="548640" y="5449824"/>
+            <a:ext cx="5669280" cy="566928"/>
+          </a:xfrm>
+          <a:prstGeom prst="rect">
+            <a:avLst/>
+          </a:prstGeom>
+          <a:noFill/>
+          <a:ln/>
+        </p:spPr>
+        <p:txBody>
+          <a:bodyPr wrap="square" lIns="0" tIns="0" rIns="0" bIns="0" rtlCol="0" anchor="t"/>
+          <a:lstStyle/>
+          <a:p>
+            <a:pPr indent="0" marL="0">
+              <a:buNone/>
+            </a:pPr>
+            <a:r>
+              <a:rPr lang="en-US" sz="1300" dirty="0">
+                <a:solidFill>
+                  <a:srgbClr val="5B6573"/>
+                </a:solidFill>
+                <a:latin typeface="Calibri" pitchFamily="34" charset="0"/>
+                <a:ea typeface="Calibri" pitchFamily="34" charset="-122"/>
+                <a:cs typeface="Calibri" pitchFamily="34" charset="-120"/>
+              </a:rPr>
+              <a:t>passed within 5 km of weapon-test or collision debris in a single day</a:t>
+            </a:r>
+            <a:endParaRPr lang="en-US" sz="1300" dirty="0"/>
+          </a:p>
+        </p:txBody>
+      </p:sp>
+      <p:graphicFrame>
+        <p:nvGraphicFramePr>
+          <p:cNvPr id="9" name="Table 0"/>
+          <p:cNvGraphicFramePr>
+            <a:graphicFrameLocks noGrp="1"/>
+          </p:cNvGraphicFramePr>
+          <p:nvPr>
+            <p:extLst>
+              <p:ext uri="{D42A27DB-BD31-4B8C-83A1-F6EECF244321}">
+                <p14:modId xmlns:p14="http://schemas.microsoft.com/office/powerpoint/2010/main" val="1579011935"/>
+              </p:ext>
+            </p:extLst>
+          </p:nvPr>
+        </p:nvGraphicFramePr>
+        <p:xfrm>
+          <a:off x="6583680" y="1645920"/>
+          <a:ext cx="5029200" cy="914400"/>
+        </p:xfrm>
+        <a:graphic>
+          <a:graphicData uri="http://schemas.openxmlformats.org/drawingml/2006/table">
+            <a:tbl>
+              <a:tblPr/>
+              <a:tblGrid>
+                <a:gridCol w="1737360"/>
+                <a:gridCol w="1737360"/>
+                <a:gridCol w="822960"/>
+                <a:gridCol w="731520"/>
+              </a:tblGrid>
+              <a:tr h="384048">
+                <a:tc>
+                  <a:txBody>
+                    <a:bodyPr/>
+                    <a:lstStyle/>
+                    <a:p>
+                      <a:pPr indent="0" marL="0">
+                        <a:buNone/>
+                      </a:pPr>
+                      <a:r>
+                        <a:rPr lang="en-US" sz="1200" b="1" dirty="0">
+                          <a:solidFill>
+                            <a:srgbClr val="FFFFFF"/>
+                          </a:solidFill>
+                          <a:latin typeface="Calibri" pitchFamily="34" charset="0"/>
+                          <a:ea typeface="Calibri" pitchFamily="34" charset="-122"/>
+                          <a:cs typeface="Calibri" pitchFamily="34" charset="-120"/>
+                        </a:rPr>
+                        <a:t>Indian satellite</a:t>
+                      </a:r>
+                      <a:endParaRPr lang="en-US" sz="1200" dirty="0">
+                        <a:latin typeface="Calibri" charset="0"/>
+                        <a:ea typeface="Calibri" charset="0"/>
+                        <a:cs typeface="Calibri" charset="0"/>
+                      </a:endParaRPr>
+                    </a:p>
+                  </a:txBody>
+                  <a:tcPr marL="91440" marR="91440" marT="45720" marB="45720">
+                    <a:lnL w="6350" cap="flat" cmpd="sng" algn="ctr">
+                      <a:solidFill>
+                        <a:srgbClr val="D5DAE1"/>
+                      </a:solidFill>
+                      <a:prstDash val="solid"/>
+                      <a:round/>
+                      <a:headEnd type="none" w="med" len="med"/>
+                      <a:tailEnd type="none" w="med" len="med"/>
+                    </a:lnL>
+                    <a:lnR w="6350" cap="flat" cmpd="sng" algn="ctr">
+                      <a:solidFill>
+                        <a:srgbClr val="D5DAE1"/>
+                      </a:solidFill>
+                      <a:prstDash val="solid"/>
+                      <a:round/>
+                      <a:headEnd type="none" w="med" len="med"/>
+                      <a:tailEnd type="none" w="med" len="med"/>
+                    </a:lnR>
+                    <a:lnT w="6350" cap="flat" cmpd="sng" algn="ctr">
+                      <a:solidFill>
+                        <a:srgbClr val="D5DAE1"/>
+                      </a:solidFill>
+                      <a:prstDash val="solid"/>
+                      <a:round/>
+                      <a:headEnd type="none" w="med" len="med"/>
+                      <a:tailEnd type="none" w="med" len="med"/>
+                    </a:lnT>
+                    <a:lnB w="6350" cap="flat" cmpd="sng" algn="ctr">
+                      <a:solidFill>
+                        <a:srgbClr val="D5DAE1"/>
+                      </a:solidFill>
+                      <a:prstDash val="solid"/>
+                      <a:round/>
+                      <a:headEnd type="none" w="med" len="med"/>
+                      <a:tailEnd type="none" w="med" len="med"/>
+                    </a:lnB>
+                    <a:solidFill>
+                      <a:srgbClr val="0B1D3A"/>
+                    </a:solidFill>
+                  </a:tcPr>
+                </a:tc>
+                <a:tc>
+                  <a:txBody>
+                    <a:bodyPr/>
+                    <a:lstStyle/>
+                    <a:p>
+                      <a:pPr indent="0" marL="0">
+                        <a:buNone/>
+                      </a:pPr>
+                      <a:r>
+                        <a:rPr lang="en-US" sz="1200" b="1" dirty="0">
+                          <a:solidFill>
+                            <a:srgbClr val="FFFFFF"/>
+                          </a:solidFill>
+                          <a:latin typeface="Calibri" pitchFamily="34" charset="0"/>
+                          <a:ea typeface="Calibri" pitchFamily="34" charset="-122"/>
+                          <a:cs typeface="Calibri" pitchFamily="34" charset="-120"/>
+                        </a:rPr>
+                        <a:t>Debris</a:t>
+                      </a:r>
+                      <a:endParaRPr lang="en-US" sz="1200" dirty="0">
+                        <a:latin typeface="Calibri" charset="0"/>
+                        <a:ea typeface="Calibri" charset="0"/>
+                        <a:cs typeface="Calibri" charset="0"/>
+                      </a:endParaRPr>
+                    </a:p>
+                  </a:txBody>
+                  <a:tcPr marL="91440" marR="91440" marT="45720" marB="45720">
+                    <a:lnL w="6350" cap="flat" cmpd="sng" algn="ctr">
+                      <a:solidFill>
+                        <a:srgbClr val="D5DAE1"/>
+                      </a:solidFill>
+                      <a:prstDash val="solid"/>
+                      <a:round/>
+                      <a:headEnd type="none" w="med" len="med"/>
+                      <a:tailEnd type="none" w="med" len="med"/>
+                    </a:lnL>
+                    <a:lnR w="6350" cap="flat" cmpd="sng" algn="ctr">
+                      <a:solidFill>
+                        <a:srgbClr val="D5DAE1"/>
+                      </a:solidFill>
+                      <a:prstDash val="solid"/>
+                      <a:round/>
+                      <a:headEnd type="none" w="med" len="med"/>
+                      <a:tailEnd type="none" w="med" len="med"/>
+                    </a:lnR>
+                    <a:lnT w="6350" cap="flat" cmpd="sng" algn="ctr">
+                      <a:solidFill>
+                        <a:srgbClr val="D5DAE1"/>
+                      </a:solidFill>
+                      <a:prstDash val="solid"/>
+                      <a:round/>
+                      <a:headEnd type="none" w="med" len="med"/>
+                      <a:tailEnd type="none" w="med" len="med"/>
+                    </a:lnT>
+                    <a:lnB w="6350" cap="flat" cmpd="sng" algn="ctr">
+                      <a:solidFill>
+                        <a:srgbClr val="D5DAE1"/>
+                      </a:solidFill>
+                      <a:prstDash val="solid"/>
+                      <a:round/>
+                      <a:headEnd type="none" w="med" len="med"/>
+                      <a:tailEnd type="none" w="med" len="med"/>
+                    </a:lnB>
+                    <a:solidFill>
+                      <a:srgbClr val="0B1D3A"/>
+                    </a:solidFill>
+                  </a:tcPr>
+                </a:tc>
+                <a:tc>
+                  <a:txBody>
+                    <a:bodyPr/>
+                    <a:lstStyle/>
+                    <a:p>
+                      <a:pPr indent="0" marL="0">
+                        <a:buNone/>
+                      </a:pPr>
+                      <a:r>
+                        <a:rPr lang="en-US" sz="1200" b="1" dirty="0">
+                          <a:solidFill>
+                            <a:srgbClr val="FFFFFF"/>
+                          </a:solidFill>
+                          <a:latin typeface="Calibri" pitchFamily="34" charset="0"/>
+                          <a:ea typeface="Calibri" pitchFamily="34" charset="-122"/>
+                          <a:cs typeface="Calibri" pitchFamily="34" charset="-120"/>
+                        </a:rPr>
+                        <a:t>Miss (km)</a:t>
+                      </a:r>
+                      <a:endParaRPr lang="en-US" sz="1200" dirty="0">
+                        <a:latin typeface="Calibri" charset="0"/>
+                        <a:ea typeface="Calibri" charset="0"/>
+                        <a:cs typeface="Calibri" charset="0"/>
+                      </a:endParaRPr>
+                    </a:p>
+                  </a:txBody>
+                  <a:tcPr marL="91440" marR="91440" marT="45720" marB="45720">
+                    <a:lnL w="6350" cap="flat" cmpd="sng" algn="ctr">
+                      <a:solidFill>
+                        <a:srgbClr val="D5DAE1"/>
+                      </a:solidFill>
+                      <a:prstDash val="solid"/>
+                      <a:round/>
+                      <a:headEnd type="none" w="med" len="med"/>
+                      <a:tailEnd type="none" w="med" len="med"/>
+                    </a:lnL>
+                    <a:lnR w="6350" cap="flat" cmpd="sng" algn="ctr">
+                      <a:solidFill>
+                        <a:srgbClr val="D5DAE1"/>
+                      </a:solidFill>
+                      <a:prstDash val="solid"/>
+                      <a:round/>
+                      <a:headEnd type="none" w="med" len="med"/>
+                      <a:tailEnd type="none" w="med" len="med"/>
+                    </a:lnR>
+                    <a:lnT w="6350" cap="flat" cmpd="sng" algn="ctr">
+                      <a:solidFill>
+                        <a:srgbClr val="D5DAE1"/>
+                      </a:solidFill>
+                      <a:prstDash val="solid"/>
+                      <a:round/>
+                      <a:headEnd type="none" w="med" len="med"/>
+                      <a:tailEnd type="none" w="med" len="med"/>
+                    </a:lnT>
+                    <a:lnB w="6350" cap="flat" cmpd="sng" algn="ctr">
+                      <a:solidFill>
+                        <a:srgbClr val="D5DAE1"/>
+                      </a:solidFill>
+                      <a:prstDash val="solid"/>
+                      <a:round/>
+                      <a:headEnd type="none" w="med" len="med"/>
+                      <a:tailEnd type="none" w="med" len="med"/>
+                    </a:lnB>
+                    <a:solidFill>
+                      <a:srgbClr val="0B1D3A"/>
+                    </a:solidFill>
+                  </a:tcPr>
+                </a:tc>
+                <a:tc>
+                  <a:txBody>
+                    <a:bodyPr/>
+                    <a:lstStyle/>
+                    <a:p>
+                      <a:pPr indent="0" marL="0">
+                        <a:buNone/>
+                      </a:pPr>
+                      <a:r>
+                        <a:rPr lang="en-US" sz="1200" b="1" dirty="0">
+                          <a:solidFill>
+                            <a:srgbClr val="FFFFFF"/>
+                          </a:solidFill>
+                          <a:latin typeface="Calibri" pitchFamily="34" charset="0"/>
+                          <a:ea typeface="Calibri" pitchFamily="34" charset="-122"/>
+                          <a:cs typeface="Calibri" pitchFamily="34" charset="-120"/>
+                        </a:rPr>
+                        <a:t>km/s</a:t>
+                      </a:r>
+                      <a:endParaRPr lang="en-US" sz="1200" dirty="0">
+                        <a:latin typeface="Calibri" charset="0"/>
+                        <a:ea typeface="Calibri" charset="0"/>
+                        <a:cs typeface="Calibri" charset="0"/>
+                      </a:endParaRPr>
+                    </a:p>
+                  </a:txBody>
+                  <a:tcPr marL="91440" marR="91440" marT="45720" marB="45720">
+                    <a:lnL w="6350" cap="flat" cmpd="sng" algn="ctr">
+                      <a:solidFill>
+                        <a:srgbClr val="D5DAE1"/>
+                      </a:solidFill>
+                      <a:prstDash val="solid"/>
+                      <a:round/>
+                      <a:headEnd type="none" w="med" len="med"/>
+                      <a:tailEnd type="none" w="med" len="med"/>
+                    </a:lnL>
+                    <a:lnR w="6350" cap="flat" cmpd="sng" algn="ctr">
+                      <a:solidFill>
+                        <a:srgbClr val="D5DAE1"/>
+                      </a:solidFill>
+                      <a:prstDash val="solid"/>
+                      <a:round/>
+                      <a:headEnd type="none" w="med" len="med"/>
+                      <a:tailEnd type="none" w="med" len="med"/>
+                    </a:lnR>
+                    <a:lnT w="6350" cap="flat" cmpd="sng" algn="ctr">
+                      <a:solidFill>
+                        <a:srgbClr val="D5DAE1"/>
+                      </a:solidFill>
+                      <a:prstDash val="solid"/>
+                      <a:round/>
+                      <a:headEnd type="none" w="med" len="med"/>
+                      <a:tailEnd type="none" w="med" len="med"/>
+                    </a:lnT>
+                    <a:lnB w="6350" cap="flat" cmpd="sng" algn="ctr">
+                      <a:solidFill>
+                        <a:srgbClr val="D5DAE1"/>
+                      </a:solidFill>
+                      <a:prstDash val="solid"/>
+                      <a:round/>
+                      <a:headEnd type="none" w="med" len="med"/>
+                      <a:tailEnd type="none" w="med" len="med"/>
+                    </a:lnB>
+                    <a:solidFill>
+                      <a:srgbClr val="0B1D3A"/>
+                    </a:solidFill>
+                  </a:tcPr>
+                </a:tc>
+              </a:tr>
+              <a:tr h="384048">
+                <a:tc>
+                  <a:txBody>
+                    <a:bodyPr/>
+                    <a:lstStyle/>
+                    <a:p>
+                      <a:pPr indent="0" marL="0">
+                        <a:buNone/>
+                      </a:pPr>
+                      <a:r>
+                        <a:rPr lang="en-US" sz="1200" dirty="0">
+                          <a:solidFill>
+                            <a:srgbClr val="1B2433"/>
+                          </a:solidFill>
+                          <a:latin typeface="Calibri" pitchFamily="34" charset="0"/>
+                          <a:ea typeface="Calibri" pitchFamily="34" charset="-122"/>
+                          <a:cs typeface="Calibri" pitchFamily="34" charset="-120"/>
+                        </a:rPr>
+                        <a:t>SARAL</a:t>
+                      </a:r>
+                      <a:endParaRPr lang="en-US" sz="1200" dirty="0">
+                        <a:latin typeface="Calibri" charset="0"/>
+                        <a:ea typeface="Calibri" charset="0"/>
+                        <a:cs typeface="Calibri" charset="0"/>
+                      </a:endParaRPr>
+                    </a:p>
+                  </a:txBody>
+                  <a:tcPr marL="91440" marR="91440" marT="45720" marB="45720">
+                    <a:lnL w="6350" cap="flat" cmpd="sng" algn="ctr">
+                      <a:solidFill>
+                        <a:srgbClr val="D5DAE1"/>
+                      </a:solidFill>
+                      <a:prstDash val="solid"/>
+                      <a:round/>
+                      <a:headEnd type="none" w="med" len="med"/>
+                      <a:tailEnd type="none" w="med" len="med"/>
+                    </a:lnL>
+                    <a:lnR w="6350" cap="flat" cmpd="sng" algn="ctr">
+                      <a:solidFill>
+                        <a:srgbClr val="D5DAE1"/>
+                      </a:solidFill>
+                      <a:prstDash val="solid"/>
+                      <a:round/>
+                      <a:headEnd type="none" w="med" len="med"/>
+                      <a:tailEnd type="none" w="med" len="med"/>
+                    </a:lnR>
+                    <a:lnT w="6350" cap="flat" cmpd="sng" algn="ctr">
+                      <a:solidFill>
+                        <a:srgbClr val="D5DAE1"/>
+                      </a:solidFill>
+                      <a:prstDash val="solid"/>
+                      <a:round/>
+                      <a:headEnd type="none" w="med" len="med"/>
+                      <a:tailEnd type="none" w="med" len="med"/>
+                    </a:lnT>
+                    <a:lnB w="6350" cap="flat" cmpd="sng" algn="ctr">
+                      <a:solidFill>
+                        <a:srgbClr val="D5DAE1"/>
+                      </a:solidFill>
+                      <a:prstDash val="solid"/>
+                      <a:round/>
+                      <a:headEnd type="none" w="med" len="med"/>
+                      <a:tailEnd type="none" w="med" len="med"/>
+                    </a:lnB>
+                  </a:tcPr>
+                </a:tc>
+                <a:tc>
+                  <a:txBody>
+                    <a:bodyPr/>
+                    <a:lstStyle/>
+                    <a:p>
+                      <a:pPr indent="0" marL="0">
+                        <a:buNone/>
+                      </a:pPr>
+                      <a:r>
+                        <a:rPr lang="en-US" sz="1200" dirty="0">
+                          <a:solidFill>
+                            <a:srgbClr val="1B2433"/>
+                          </a:solidFill>
+                          <a:latin typeface="Calibri" pitchFamily="34" charset="0"/>
+                          <a:ea typeface="Calibri" pitchFamily="34" charset="-122"/>
+                          <a:cs typeface="Calibri" pitchFamily="34" charset="-120"/>
+                        </a:rPr>
+                        <a:t>COSMOS 2251 DEB</a:t>
+                      </a:r>
+                      <a:endParaRPr lang="en-US" sz="1200" dirty="0">
+                        <a:latin typeface="Calibri" charset="0"/>
+                        <a:ea typeface="Calibri" charset="0"/>
+                        <a:cs typeface="Calibri" charset="0"/>
+                      </a:endParaRPr>
+                    </a:p>
+                  </a:txBody>
+                  <a:tcPr marL="91440" marR="91440" marT="45720" marB="45720">
+                    <a:lnL w="6350" cap="flat" cmpd="sng" algn="ctr">
+                      <a:solidFill>
+                        <a:srgbClr val="D5DAE1"/>
+                      </a:solidFill>
+                      <a:prstDash val="solid"/>
+                      <a:round/>
+                      <a:headEnd type="none" w="med" len="med"/>
+                      <a:tailEnd type="none" w="med" len="med"/>
+                    </a:lnL>
+                    <a:lnR w="6350" cap="flat" cmpd="sng" algn="ctr">
+                      <a:solidFill>
+                        <a:srgbClr val="D5DAE1"/>
+                      </a:solidFill>
+                      <a:prstDash val="solid"/>
+                      <a:round/>
+                      <a:headEnd type="none" w="med" len="med"/>
+                      <a:tailEnd type="none" w="med" len="med"/>
+                    </a:lnR>
+                    <a:lnT w="6350" cap="flat" cmpd="sng" algn="ctr">
+                      <a:solidFill>
+                        <a:srgbClr val="D5DAE1"/>
+                      </a:solidFill>
+                      <a:prstDash val="solid"/>
+                      <a:round/>
+                      <a:headEnd type="none" w="med" len="med"/>
+                      <a:tailEnd type="none" w="med" len="med"/>
+                    </a:lnT>
+                    <a:lnB w="6350" cap="flat" cmpd="sng" algn="ctr">
+                      <a:solidFill>
+                        <a:srgbClr val="D5DAE1"/>
+                      </a:solidFill>
+                      <a:prstDash val="solid"/>
+                      <a:round/>
+                      <a:headEnd type="none" w="med" len="med"/>
+                      <a:tailEnd type="none" w="med" len="med"/>
+                    </a:lnB>
+                  </a:tcPr>
+                </a:tc>
+                <a:tc>
+                  <a:txBody>
+                    <a:bodyPr/>
+                    <a:lstStyle/>
+                    <a:p>
+                      <a:pPr indent="0" marL="0">
+                        <a:buNone/>
+                      </a:pPr>
+                      <a:r>
+                        <a:rPr lang="en-US" sz="1200" dirty="0">
+                          <a:solidFill>
+                            <a:srgbClr val="1B2433"/>
+                          </a:solidFill>
+                          <a:latin typeface="Calibri" pitchFamily="34" charset="0"/>
+                          <a:ea typeface="Calibri" pitchFamily="34" charset="-122"/>
+                          <a:cs typeface="Calibri" pitchFamily="34" charset="-120"/>
+                        </a:rPr>
+                        <a:t>1.44</a:t>
+                      </a:r>
+                      <a:endParaRPr lang="en-US" sz="1200" dirty="0">
+                        <a:latin typeface="Calibri" charset="0"/>
+                        <a:ea typeface="Calibri" charset="0"/>
+                        <a:cs typeface="Calibri" charset="0"/>
+                      </a:endParaRPr>
+                    </a:p>
+                  </a:txBody>
+                  <a:tcPr marL="91440" marR="91440" marT="45720" marB="45720">
+                    <a:lnL w="6350" cap="flat" cmpd="sng" algn="ctr">
+                      <a:solidFill>
+                        <a:srgbClr val="D5DAE1"/>
+                      </a:solidFill>
+                      <a:prstDash val="solid"/>
+                      <a:round/>
+                      <a:headEnd type="none" w="med" len="med"/>
+                      <a:tailEnd type="none" w="med" len="med"/>
+                    </a:lnL>
+                    <a:lnR w="6350" cap="flat" cmpd="sng" algn="ctr">
+                      <a:solidFill>
+                        <a:srgbClr val="D5DAE1"/>
+                      </a:solidFill>
+                      <a:prstDash val="solid"/>
+                      <a:round/>
+                      <a:headEnd type="none" w="med" len="med"/>
+                      <a:tailEnd type="none" w="med" len="med"/>
+                    </a:lnR>
+                    <a:lnT w="6350" cap="flat" cmpd="sng" algn="ctr">
+                      <a:solidFill>
+                        <a:srgbClr val="D5DAE1"/>
+                      </a:solidFill>
+                      <a:prstDash val="solid"/>
+                      <a:round/>
+                      <a:headEnd type="none" w="med" len="med"/>
+                      <a:tailEnd type="none" w="med" len="med"/>
+                    </a:lnT>
+                    <a:lnB w="6350" cap="flat" cmpd="sng" algn="ctr">
+                      <a:solidFill>
+                        <a:srgbClr val="D5DAE1"/>
+                      </a:solidFill>
+                      <a:prstDash val="solid"/>
+                      <a:round/>
+                      <a:headEnd type="none" w="med" len="med"/>
+                      <a:tailEnd type="none" w="med" len="med"/>
+                    </a:lnB>
+                  </a:tcPr>
+                </a:tc>
+                <a:tc>
+                  <a:txBody>
+                    <a:bodyPr/>
+                    <a:lstStyle/>
+                    <a:p>
+                      <a:pPr indent="0" marL="0">
+                        <a:buNone/>
+                      </a:pPr>
+                      <a:r>
+                        <a:rPr lang="en-US" sz="1200" dirty="0">
+                          <a:solidFill>
+                            <a:srgbClr val="1B2433"/>
+                          </a:solidFill>
+                          <a:latin typeface="Calibri" pitchFamily="34" charset="0"/>
+                          <a:ea typeface="Calibri" pitchFamily="34" charset="-122"/>
+                          <a:cs typeface="Calibri" pitchFamily="34" charset="-120"/>
+                        </a:rPr>
+                        <a:t>4.73</a:t>
+                      </a:r>
+                      <a:endParaRPr lang="en-US" sz="1200" dirty="0">
+                        <a:latin typeface="Calibri" charset="0"/>
+                        <a:ea typeface="Calibri" charset="0"/>
+                        <a:cs typeface="Calibri" charset="0"/>
+                      </a:endParaRPr>
+                    </a:p>
+                  </a:txBody>
+                  <a:tcPr marL="91440" marR="91440" marT="45720" marB="45720">
+                    <a:lnL w="6350" cap="flat" cmpd="sng" algn="ctr">
+                      <a:solidFill>
+                        <a:srgbClr val="D5DAE1"/>
+                      </a:solidFill>
+                      <a:prstDash val="solid"/>
+                      <a:round/>
+                      <a:headEnd type="none" w="med" len="med"/>
+                      <a:tailEnd type="none" w="med" len="med"/>
+                    </a:lnL>
+                    <a:lnR w="6350" cap="flat" cmpd="sng" algn="ctr">
+                      <a:solidFill>
+                        <a:srgbClr val="D5DAE1"/>
+                      </a:solidFill>
+                      <a:prstDash val="solid"/>
+                      <a:round/>
+                      <a:headEnd type="none" w="med" len="med"/>
+                      <a:tailEnd type="none" w="med" len="med"/>
+                    </a:lnR>
+                    <a:lnT w="6350" cap="flat" cmpd="sng" algn="ctr">
+                      <a:solidFill>
+                        <a:srgbClr val="D5DAE1"/>
+                      </a:solidFill>
+                      <a:prstDash val="solid"/>
+                      <a:round/>
+                      <a:headEnd type="none" w="med" len="med"/>
+                      <a:tailEnd type="none" w="med" len="med"/>
+                    </a:lnT>
+                    <a:lnB w="6350" cap="flat" cmpd="sng" algn="ctr">
+                      <a:solidFill>
+                        <a:srgbClr val="D5DAE1"/>
+                      </a:solidFill>
+                      <a:prstDash val="solid"/>
+                      <a:round/>
+                      <a:headEnd type="none" w="med" len="med"/>
+                      <a:tailEnd type="none" w="med" len="med"/>
+                    </a:lnB>
+                  </a:tcPr>
+                </a:tc>
+              </a:tr>
+              <a:tr h="384048">
+                <a:tc>
+                  <a:txBody>
+                    <a:bodyPr/>
+                    <a:lstStyle/>
+                    <a:p>
+                      <a:pPr indent="0" marL="0">
+                        <a:buNone/>
+                      </a:pPr>
+                      <a:r>
+                        <a:rPr lang="en-US" sz="1200" dirty="0">
+                          <a:solidFill>
+                            <a:srgbClr val="1B2433"/>
+                          </a:solidFill>
+                          <a:latin typeface="Calibri" pitchFamily="34" charset="0"/>
+                          <a:ea typeface="Calibri" pitchFamily="34" charset="-122"/>
+                          <a:cs typeface="Calibri" pitchFamily="34" charset="-120"/>
+                        </a:rPr>
+                        <a:t>SCATSAT 1</a:t>
+                      </a:r>
+                      <a:endParaRPr lang="en-US" sz="1200" dirty="0">
+                        <a:latin typeface="Calibri" charset="0"/>
+                        <a:ea typeface="Calibri" charset="0"/>
+                        <a:cs typeface="Calibri" charset="0"/>
+                      </a:endParaRPr>
+                    </a:p>
+                  </a:txBody>
+                  <a:tcPr marL="91440" marR="91440" marT="45720" marB="45720">
+                    <a:lnL w="6350" cap="flat" cmpd="sng" algn="ctr">
+                      <a:solidFill>
+                        <a:srgbClr val="D5DAE1"/>
+                      </a:solidFill>
+                      <a:prstDash val="solid"/>
+                      <a:round/>
+                      <a:headEnd type="none" w="med" len="med"/>
+                      <a:tailEnd type="none" w="med" len="med"/>
+                    </a:lnL>
+                    <a:lnR w="6350" cap="flat" cmpd="sng" algn="ctr">
+                      <a:solidFill>
+                        <a:srgbClr val="D5DAE1"/>
+                      </a:solidFill>
+                      <a:prstDash val="solid"/>
+                      <a:round/>
+                      <a:headEnd type="none" w="med" len="med"/>
+                      <a:tailEnd type="none" w="med" len="med"/>
+                    </a:lnR>
+                    <a:lnT w="6350" cap="flat" cmpd="sng" algn="ctr">
+                      <a:solidFill>
+                        <a:srgbClr val="D5DAE1"/>
+                      </a:solidFill>
+                      <a:prstDash val="solid"/>
+                      <a:round/>
+                      <a:headEnd type="none" w="med" len="med"/>
+                      <a:tailEnd type="none" w="med" len="med"/>
+                    </a:lnT>
+                    <a:lnB w="6350" cap="flat" cmpd="sng" algn="ctr">
+                      <a:solidFill>
+                        <a:srgbClr val="D5DAE1"/>
+                      </a:solidFill>
+                      <a:prstDash val="solid"/>
+                      <a:round/>
+                      <a:headEnd type="none" w="med" len="med"/>
+                      <a:tailEnd type="none" w="med" len="med"/>
+                    </a:lnB>
+                  </a:tcPr>
+                </a:tc>
+                <a:tc>
+                  <a:txBody>
+                    <a:bodyPr/>
+                    <a:lstStyle/>
+                    <a:p>
+                      <a:pPr indent="0" marL="0">
+                        <a:buNone/>
+                      </a:pPr>
+                      <a:r>
+                        <a:rPr lang="en-US" sz="1200" dirty="0">
+                          <a:solidFill>
+                            <a:srgbClr val="1B2433"/>
+                          </a:solidFill>
+                          <a:latin typeface="Calibri" pitchFamily="34" charset="0"/>
+                          <a:ea typeface="Calibri" pitchFamily="34" charset="-122"/>
+                          <a:cs typeface="Calibri" pitchFamily="34" charset="-120"/>
+                        </a:rPr>
+                        <a:t>COSMOS 2251 DEB</a:t>
+                      </a:r>
+                      <a:endParaRPr lang="en-US" sz="1200" dirty="0">
+                        <a:latin typeface="Calibri" charset="0"/>
+                        <a:ea typeface="Calibri" charset="0"/>
+                        <a:cs typeface="Calibri" charset="0"/>
+                      </a:endParaRPr>
+                    </a:p>
+                  </a:txBody>
+                  <a:tcPr marL="91440" marR="91440" marT="45720" marB="45720">
+                    <a:lnL w="6350" cap="flat" cmpd="sng" algn="ctr">
+                      <a:solidFill>
+                        <a:srgbClr val="D5DAE1"/>
+                      </a:solidFill>
+                      <a:prstDash val="solid"/>
+                      <a:round/>
+                      <a:headEnd type="none" w="med" len="med"/>
+                      <a:tailEnd type="none" w="med" len="med"/>
+                    </a:lnL>
+                    <a:lnR w="6350" cap="flat" cmpd="sng" algn="ctr">
+                      <a:solidFill>
+                        <a:srgbClr val="D5DAE1"/>
+                      </a:solidFill>
+                      <a:prstDash val="solid"/>
+                      <a:round/>
+                      <a:headEnd type="none" w="med" len="med"/>
+                      <a:tailEnd type="none" w="med" len="med"/>
+                    </a:lnR>
+                    <a:lnT w="6350" cap="flat" cmpd="sng" algn="ctr">
+                      <a:solidFill>
+                        <a:srgbClr val="D5DAE1"/>
+                      </a:solidFill>
+                      <a:prstDash val="solid"/>
+                      <a:round/>
+                      <a:headEnd type="none" w="med" len="med"/>
+                      <a:tailEnd type="none" w="med" len="med"/>
+                    </a:lnT>
+                    <a:lnB w="6350" cap="flat" cmpd="sng" algn="ctr">
+                      <a:solidFill>
+                        <a:srgbClr val="D5DAE1"/>
+                      </a:solidFill>
+                      <a:prstDash val="solid"/>
+                      <a:round/>
+                      <a:headEnd type="none" w="med" len="med"/>
+                      <a:tailEnd type="none" w="med" len="med"/>
+                    </a:lnB>
+                  </a:tcPr>
+                </a:tc>
+                <a:tc>
+                  <a:txBody>
+                    <a:bodyPr/>
+                    <a:lstStyle/>
+                    <a:p>
+                      <a:pPr indent="0" marL="0">
+                        <a:buNone/>
+                      </a:pPr>
+                      <a:r>
+                        <a:rPr lang="en-US" sz="1200" dirty="0">
+                          <a:solidFill>
+                            <a:srgbClr val="1B2433"/>
+                          </a:solidFill>
+                          <a:latin typeface="Calibri" pitchFamily="34" charset="0"/>
+                          <a:ea typeface="Calibri" pitchFamily="34" charset="-122"/>
+                          <a:cs typeface="Calibri" pitchFamily="34" charset="-120"/>
+                        </a:rPr>
+                        <a:t>2.71</a:t>
+                      </a:r>
+                      <a:endParaRPr lang="en-US" sz="1200" dirty="0">
+                        <a:latin typeface="Calibri" charset="0"/>
+                        <a:ea typeface="Calibri" charset="0"/>
+                        <a:cs typeface="Calibri" charset="0"/>
+                      </a:endParaRPr>
+                    </a:p>
+                  </a:txBody>
+                  <a:tcPr marL="91440" marR="91440" marT="45720" marB="45720">
+                    <a:lnL w="6350" cap="flat" cmpd="sng" algn="ctr">
+                      <a:solidFill>
+                        <a:srgbClr val="D5DAE1"/>
+                      </a:solidFill>
+                      <a:prstDash val="solid"/>
+                      <a:round/>
+                      <a:headEnd type="none" w="med" len="med"/>
+                      <a:tailEnd type="none" w="med" len="med"/>
+                    </a:lnL>
+                    <a:lnR w="6350" cap="flat" cmpd="sng" algn="ctr">
+                      <a:solidFill>
+                        <a:srgbClr val="D5DAE1"/>
+                      </a:solidFill>
+                      <a:prstDash val="solid"/>
+                      <a:round/>
+                      <a:headEnd type="none" w="med" len="med"/>
+                      <a:tailEnd type="none" w="med" len="med"/>
+                    </a:lnR>
+                    <a:lnT w="6350" cap="flat" cmpd="sng" algn="ctr">
+                      <a:solidFill>
+                        <a:srgbClr val="D5DAE1"/>
+                      </a:solidFill>
+                      <a:prstDash val="solid"/>
+                      <a:round/>
+                      <a:headEnd type="none" w="med" len="med"/>
+                      <a:tailEnd type="none" w="med" len="med"/>
+                    </a:lnT>
+                    <a:lnB w="6350" cap="flat" cmpd="sng" algn="ctr">
+                      <a:solidFill>
+                        <a:srgbClr val="D5DAE1"/>
+                      </a:solidFill>
+                      <a:prstDash val="solid"/>
+                      <a:round/>
+                      <a:headEnd type="none" w="med" len="med"/>
+                      <a:tailEnd type="none" w="med" len="med"/>
+                    </a:lnB>
+                  </a:tcPr>
+                </a:tc>
+                <a:tc>
+                  <a:txBody>
+                    <a:bodyPr/>
+                    <a:lstStyle/>
+                    <a:p>
+                      <a:pPr indent="0" marL="0">
+                        <a:buNone/>
+                      </a:pPr>
+                      <a:r>
+                        <a:rPr lang="en-US" sz="1200" dirty="0">
+                          <a:solidFill>
+                            <a:srgbClr val="1B2433"/>
+                          </a:solidFill>
+                          <a:latin typeface="Calibri" pitchFamily="34" charset="0"/>
+                          <a:ea typeface="Calibri" pitchFamily="34" charset="-122"/>
+                          <a:cs typeface="Calibri" pitchFamily="34" charset="-120"/>
+                        </a:rPr>
+                        <a:t>14.23</a:t>
+                      </a:r>
+                      <a:endParaRPr lang="en-US" sz="1200" dirty="0">
+                        <a:latin typeface="Calibri" charset="0"/>
+                        <a:ea typeface="Calibri" charset="0"/>
+                        <a:cs typeface="Calibri" charset="0"/>
+                      </a:endParaRPr>
+                    </a:p>
+                  </a:txBody>
+                  <a:tcPr marL="91440" marR="91440" marT="45720" marB="45720">
+                    <a:lnL w="6350" cap="flat" cmpd="sng" algn="ctr">
+                      <a:solidFill>
+                        <a:srgbClr val="D5DAE1"/>
+                      </a:solidFill>
+                      <a:prstDash val="solid"/>
+                      <a:round/>
+                      <a:headEnd type="none" w="med" len="med"/>
+                      <a:tailEnd type="none" w="med" len="med"/>
+                    </a:lnL>
+                    <a:lnR w="6350" cap="flat" cmpd="sng" algn="ctr">
+                      <a:solidFill>
+                        <a:srgbClr val="D5DAE1"/>
+                      </a:solidFill>
+                      <a:prstDash val="solid"/>
+                      <a:round/>
+                      <a:headEnd type="none" w="med" len="med"/>
+                      <a:tailEnd type="none" w="med" len="med"/>
+                    </a:lnR>
+                    <a:lnT w="6350" cap="flat" cmpd="sng" algn="ctr">
+                      <a:solidFill>
+                        <a:srgbClr val="D5DAE1"/>
+                      </a:solidFill>
+                      <a:prstDash val="solid"/>
+                      <a:round/>
+                      <a:headEnd type="none" w="med" len="med"/>
+                      <a:tailEnd type="none" w="med" len="med"/>
+                    </a:lnT>
+                    <a:lnB w="6350" cap="flat" cmpd="sng" algn="ctr">
+                      <a:solidFill>
+                        <a:srgbClr val="D5DAE1"/>
+                      </a:solidFill>
+                      <a:prstDash val="solid"/>
+                      <a:round/>
+                      <a:headEnd type="none" w="med" len="med"/>
+                      <a:tailEnd type="none" w="med" len="med"/>
+                    </a:lnB>
+                  </a:tcPr>
+                </a:tc>
+              </a:tr>
+              <a:tr h="384048">
+                <a:tc>
+                  <a:txBody>
+                    <a:bodyPr/>
+                    <a:lstStyle/>
+                    <a:p>
+                      <a:pPr indent="0" marL="0">
+                        <a:buNone/>
+                      </a:pPr>
+                      <a:r>
+                        <a:rPr lang="en-US" sz="1200" dirty="0">
+                          <a:solidFill>
+                            <a:srgbClr val="1B2433"/>
+                          </a:solidFill>
+                          <a:latin typeface="Calibri" pitchFamily="34" charset="0"/>
+                          <a:ea typeface="Calibri" pitchFamily="34" charset="-122"/>
+                          <a:cs typeface="Calibri" pitchFamily="34" charset="-120"/>
+                        </a:rPr>
+                        <a:t>HYSIS</a:t>
+                      </a:r>
+                      <a:endParaRPr lang="en-US" sz="1200" dirty="0">
+                        <a:latin typeface="Calibri" charset="0"/>
+                        <a:ea typeface="Calibri" charset="0"/>
+                        <a:cs typeface="Calibri" charset="0"/>
+                      </a:endParaRPr>
+                    </a:p>
+                  </a:txBody>
+                  <a:tcPr marL="91440" marR="91440" marT="45720" marB="45720">
+                    <a:lnL w="6350" cap="flat" cmpd="sng" algn="ctr">
+                      <a:solidFill>
+                        <a:srgbClr val="D5DAE1"/>
+                      </a:solidFill>
+                      <a:prstDash val="solid"/>
+                      <a:round/>
+                      <a:headEnd type="none" w="med" len="med"/>
+                      <a:tailEnd type="none" w="med" len="med"/>
+                    </a:lnL>
+                    <a:lnR w="6350" cap="flat" cmpd="sng" algn="ctr">
+                      <a:solidFill>
+                        <a:srgbClr val="D5DAE1"/>
+                      </a:solidFill>
+                      <a:prstDash val="solid"/>
+                      <a:round/>
+                      <a:headEnd type="none" w="med" len="med"/>
+                      <a:tailEnd type="none" w="med" len="med"/>
+                    </a:lnR>
+                    <a:lnT w="6350" cap="flat" cmpd="sng" algn="ctr">
+                      <a:solidFill>
+                        <a:srgbClr val="D5DAE1"/>
+                      </a:solidFill>
+                      <a:prstDash val="solid"/>
+                      <a:round/>
+                      <a:headEnd type="none" w="med" len="med"/>
+                      <a:tailEnd type="none" w="med" len="med"/>
+                    </a:lnT>
+                    <a:lnB w="6350" cap="flat" cmpd="sng" algn="ctr">
+                      <a:solidFill>
+                        <a:srgbClr val="D5DAE1"/>
+                      </a:solidFill>
+                      <a:prstDash val="solid"/>
+                      <a:round/>
+                      <a:headEnd type="none" w="med" len="med"/>
+                      <a:tailEnd type="none" w="med" len="med"/>
+                    </a:lnB>
+                  </a:tcPr>
+                </a:tc>
+                <a:tc>
+                  <a:txBody>
+                    <a:bodyPr/>
+                    <a:lstStyle/>
+                    <a:p>
+                      <a:pPr indent="0" marL="0">
+                        <a:buNone/>
+                      </a:pPr>
+                      <a:r>
+                        <a:rPr lang="en-US" sz="1200" dirty="0">
+                          <a:solidFill>
+                            <a:srgbClr val="1B2433"/>
+                          </a:solidFill>
+                          <a:latin typeface="Calibri" pitchFamily="34" charset="0"/>
+                          <a:ea typeface="Calibri" pitchFamily="34" charset="-122"/>
+                          <a:cs typeface="Calibri" pitchFamily="34" charset="-120"/>
+                        </a:rPr>
+                        <a:t>FENGYUN 1C DEB</a:t>
+                      </a:r>
+                      <a:endParaRPr lang="en-US" sz="1200" dirty="0">
+                        <a:latin typeface="Calibri" charset="0"/>
+                        <a:ea typeface="Calibri" charset="0"/>
+                        <a:cs typeface="Calibri" charset="0"/>
+                      </a:endParaRPr>
+                    </a:p>
+                  </a:txBody>
+                  <a:tcPr marL="91440" marR="91440" marT="45720" marB="45720">
+                    <a:lnL w="6350" cap="flat" cmpd="sng" algn="ctr">
+                      <a:solidFill>
+                        <a:srgbClr val="D5DAE1"/>
+                      </a:solidFill>
+                      <a:prstDash val="solid"/>
+                      <a:round/>
+                      <a:headEnd type="none" w="med" len="med"/>
+                      <a:tailEnd type="none" w="med" len="med"/>
+                    </a:lnL>
+                    <a:lnR w="6350" cap="flat" cmpd="sng" algn="ctr">
+                      <a:solidFill>
+                        <a:srgbClr val="D5DAE1"/>
+                      </a:solidFill>
+                      <a:prstDash val="solid"/>
+                      <a:round/>
+                      <a:headEnd type="none" w="med" len="med"/>
+                      <a:tailEnd type="none" w="med" len="med"/>
+                    </a:lnR>
+                    <a:lnT w="6350" cap="flat" cmpd="sng" algn="ctr">
+                      <a:solidFill>
+                        <a:srgbClr val="D5DAE1"/>
+                      </a:solidFill>
+                      <a:prstDash val="solid"/>
+                      <a:round/>
+                      <a:headEnd type="none" w="med" len="med"/>
+                      <a:tailEnd type="none" w="med" len="med"/>
+                    </a:lnT>
+                    <a:lnB w="6350" cap="flat" cmpd="sng" algn="ctr">
+                      <a:solidFill>
+                        <a:srgbClr val="D5DAE1"/>
+                      </a:solidFill>
+                      <a:prstDash val="solid"/>
+                      <a:round/>
+                      <a:headEnd type="none" w="med" len="med"/>
+                      <a:tailEnd type="none" w="med" len="med"/>
+                    </a:lnB>
+                  </a:tcPr>
+                </a:tc>
+                <a:tc>
+                  <a:txBody>
+                    <a:bodyPr/>
+                    <a:lstStyle/>
+                    <a:p>
+                      <a:pPr indent="0" marL="0">
+                        <a:buNone/>
+                      </a:pPr>
+                      <a:r>
+                        <a:rPr lang="en-US" sz="1200" dirty="0">
+                          <a:solidFill>
+                            <a:srgbClr val="1B2433"/>
+                          </a:solidFill>
+                          <a:latin typeface="Calibri" pitchFamily="34" charset="0"/>
+                          <a:ea typeface="Calibri" pitchFamily="34" charset="-122"/>
+                          <a:cs typeface="Calibri" pitchFamily="34" charset="-120"/>
+                        </a:rPr>
+                        <a:t>3.02</a:t>
+                      </a:r>
+                      <a:endParaRPr lang="en-US" sz="1200" dirty="0">
+                        <a:latin typeface="Calibri" charset="0"/>
+                        <a:ea typeface="Calibri" charset="0"/>
+                        <a:cs typeface="Calibri" charset="0"/>
+                      </a:endParaRPr>
+                    </a:p>
+                  </a:txBody>
+                  <a:tcPr marL="91440" marR="91440" marT="45720" marB="45720">
+                    <a:lnL w="6350" cap="flat" cmpd="sng" algn="ctr">
+                      <a:solidFill>
+                        <a:srgbClr val="D5DAE1"/>
+                      </a:solidFill>
+                      <a:prstDash val="solid"/>
+                      <a:round/>
+                      <a:headEnd type="none" w="med" len="med"/>
+                      <a:tailEnd type="none" w="med" len="med"/>
+                    </a:lnL>
+                    <a:lnR w="6350" cap="flat" cmpd="sng" algn="ctr">
+                      <a:solidFill>
+                        <a:srgbClr val="D5DAE1"/>
+                      </a:solidFill>
+                      <a:prstDash val="solid"/>
+                      <a:round/>
+                      <a:headEnd type="none" w="med" len="med"/>
+                      <a:tailEnd type="none" w="med" len="med"/>
+                    </a:lnR>
+                    <a:lnT w="6350" cap="flat" cmpd="sng" algn="ctr">
+                      <a:solidFill>
+                        <a:srgbClr val="D5DAE1"/>
+                      </a:solidFill>
+                      <a:prstDash val="solid"/>
+                      <a:round/>
+                      <a:headEnd type="none" w="med" len="med"/>
+                      <a:tailEnd type="none" w="med" len="med"/>
+                    </a:lnT>
+                    <a:lnB w="6350" cap="flat" cmpd="sng" algn="ctr">
+                      <a:solidFill>
+                        <a:srgbClr val="D5DAE1"/>
+                      </a:solidFill>
+                      <a:prstDash val="solid"/>
+                      <a:round/>
+                      <a:headEnd type="none" w="med" len="med"/>
+                      <a:tailEnd type="none" w="med" len="med"/>
+                    </a:lnB>
+                  </a:tcPr>
+                </a:tc>
+                <a:tc>
+                  <a:txBody>
+                    <a:bodyPr/>
+                    <a:lstStyle/>
+                    <a:p>
+                      <a:pPr indent="0" marL="0">
+                        <a:buNone/>
+                      </a:pPr>
+                      <a:r>
+                        <a:rPr lang="en-US" sz="1200" dirty="0">
+                          <a:solidFill>
+                            <a:srgbClr val="1B2433"/>
+                          </a:solidFill>
+                          <a:latin typeface="Calibri" pitchFamily="34" charset="0"/>
+                          <a:ea typeface="Calibri" pitchFamily="34" charset="-122"/>
+                          <a:cs typeface="Calibri" pitchFamily="34" charset="-120"/>
+                        </a:rPr>
+                        <a:t>4.07</a:t>
+                      </a:r>
+                      <a:endParaRPr lang="en-US" sz="1200" dirty="0">
+                        <a:latin typeface="Calibri" charset="0"/>
+                        <a:ea typeface="Calibri" charset="0"/>
+                        <a:cs typeface="Calibri" charset="0"/>
+                      </a:endParaRPr>
+                    </a:p>
+                  </a:txBody>
+                  <a:tcPr marL="91440" marR="91440" marT="45720" marB="45720">
+                    <a:lnL w="6350" cap="flat" cmpd="sng" algn="ctr">
+                      <a:solidFill>
+                        <a:srgbClr val="D5DAE1"/>
+                      </a:solidFill>
+                      <a:prstDash val="solid"/>
+                      <a:round/>
+                      <a:headEnd type="none" w="med" len="med"/>
+                      <a:tailEnd type="none" w="med" len="med"/>
+                    </a:lnL>
+                    <a:lnR w="6350" cap="flat" cmpd="sng" algn="ctr">
+                      <a:solidFill>
+                        <a:srgbClr val="D5DAE1"/>
+                      </a:solidFill>
+                      <a:prstDash val="solid"/>
+                      <a:round/>
+                      <a:headEnd type="none" w="med" len="med"/>
+                      <a:tailEnd type="none" w="med" len="med"/>
+                    </a:lnR>
+                    <a:lnT w="6350" cap="flat" cmpd="sng" algn="ctr">
+                      <a:solidFill>
+                        <a:srgbClr val="D5DAE1"/>
+                      </a:solidFill>
+                      <a:prstDash val="solid"/>
+                      <a:round/>
+                      <a:headEnd type="none" w="med" len="med"/>
+                      <a:tailEnd type="none" w="med" len="med"/>
+                    </a:lnT>
+                    <a:lnB w="6350" cap="flat" cmpd="sng" algn="ctr">
+                      <a:solidFill>
+                        <a:srgbClr val="D5DAE1"/>
+                      </a:solidFill>
+                      <a:prstDash val="solid"/>
+                      <a:round/>
+                      <a:headEnd type="none" w="med" len="med"/>
+                      <a:tailEnd type="none" w="med" len="med"/>
+                    </a:lnB>
+                  </a:tcPr>
+                </a:tc>
+              </a:tr>
+              <a:tr h="384048">
+                <a:tc>
+                  <a:txBody>
+                    <a:bodyPr/>
+                    <a:lstStyle/>
+                    <a:p>
+                      <a:pPr indent="0" marL="0">
+                        <a:buNone/>
+                      </a:pPr>
+                      <a:r>
+                        <a:rPr lang="en-US" sz="1200" dirty="0">
+                          <a:solidFill>
+                            <a:srgbClr val="1B2433"/>
+                          </a:solidFill>
+                          <a:latin typeface="Calibri" pitchFamily="34" charset="0"/>
+                          <a:ea typeface="Calibri" pitchFamily="34" charset="-122"/>
+                          <a:cs typeface="Calibri" pitchFamily="34" charset="-120"/>
+                        </a:rPr>
+                        <a:t>EMISAT</a:t>
+                      </a:r>
+                      <a:endParaRPr lang="en-US" sz="1200" dirty="0">
+                        <a:latin typeface="Calibri" charset="0"/>
+                        <a:ea typeface="Calibri" charset="0"/>
+                        <a:cs typeface="Calibri" charset="0"/>
+                      </a:endParaRPr>
+                    </a:p>
+                  </a:txBody>
+                  <a:tcPr marL="91440" marR="91440" marT="45720" marB="45720">
+                    <a:lnL w="6350" cap="flat" cmpd="sng" algn="ctr">
+                      <a:solidFill>
+                        <a:srgbClr val="D5DAE1"/>
+                      </a:solidFill>
+                      <a:prstDash val="solid"/>
+                      <a:round/>
+                      <a:headEnd type="none" w="med" len="med"/>
+                      <a:tailEnd type="none" w="med" len="med"/>
+                    </a:lnL>
+                    <a:lnR w="6350" cap="flat" cmpd="sng" algn="ctr">
+                      <a:solidFill>
+                        <a:srgbClr val="D5DAE1"/>
+                      </a:solidFill>
+                      <a:prstDash val="solid"/>
+                      <a:round/>
+                      <a:headEnd type="none" w="med" len="med"/>
+                      <a:tailEnd type="none" w="med" len="med"/>
+                    </a:lnR>
+                    <a:lnT w="6350" cap="flat" cmpd="sng" algn="ctr">
+                      <a:solidFill>
+                        <a:srgbClr val="D5DAE1"/>
+                      </a:solidFill>
+                      <a:prstDash val="solid"/>
+                      <a:round/>
+                      <a:headEnd type="none" w="med" len="med"/>
+                      <a:tailEnd type="none" w="med" len="med"/>
+                    </a:lnT>
+                    <a:lnB w="6350" cap="flat" cmpd="sng" algn="ctr">
+                      <a:solidFill>
+                        <a:srgbClr val="D5DAE1"/>
+                      </a:solidFill>
+                      <a:prstDash val="solid"/>
+                      <a:round/>
+                      <a:headEnd type="none" w="med" len="med"/>
+                      <a:tailEnd type="none" w="med" len="med"/>
+                    </a:lnB>
+                  </a:tcPr>
+                </a:tc>
+                <a:tc>
+                  <a:txBody>
+                    <a:bodyPr/>
+                    <a:lstStyle/>
+                    <a:p>
+                      <a:pPr indent="0" marL="0">
+                        <a:buNone/>
+                      </a:pPr>
+                      <a:r>
+                        <a:rPr lang="en-US" sz="1200" dirty="0">
+                          <a:solidFill>
+                            <a:srgbClr val="1B2433"/>
+                          </a:solidFill>
+                          <a:latin typeface="Calibri" pitchFamily="34" charset="0"/>
+                          <a:ea typeface="Calibri" pitchFamily="34" charset="-122"/>
+                          <a:cs typeface="Calibri" pitchFamily="34" charset="-120"/>
+                        </a:rPr>
+                        <a:t>COSMOS 2251 DEB</a:t>
+                      </a:r>
+                      <a:endParaRPr lang="en-US" sz="1200" dirty="0">
+                        <a:latin typeface="Calibri" charset="0"/>
+                        <a:ea typeface="Calibri" charset="0"/>
+                        <a:cs typeface="Calibri" charset="0"/>
+                      </a:endParaRPr>
+                    </a:p>
+                  </a:txBody>
+                  <a:tcPr marL="91440" marR="91440" marT="45720" marB="45720">
+                    <a:lnL w="6350" cap="flat" cmpd="sng" algn="ctr">
+                      <a:solidFill>
+                        <a:srgbClr val="D5DAE1"/>
+                      </a:solidFill>
+                      <a:prstDash val="solid"/>
+                      <a:round/>
+                      <a:headEnd type="none" w="med" len="med"/>
+                      <a:tailEnd type="none" w="med" len="med"/>
+                    </a:lnL>
+                    <a:lnR w="6350" cap="flat" cmpd="sng" algn="ctr">
+                      <a:solidFill>
+                        <a:srgbClr val="D5DAE1"/>
+                      </a:solidFill>
+                      <a:prstDash val="solid"/>
+                      <a:round/>
+                      <a:headEnd type="none" w="med" len="med"/>
+                      <a:tailEnd type="none" w="med" len="med"/>
+                    </a:lnR>
+                    <a:lnT w="6350" cap="flat" cmpd="sng" algn="ctr">
+                      <a:solidFill>
+                        <a:srgbClr val="D5DAE1"/>
+                      </a:solidFill>
+                      <a:prstDash val="solid"/>
+                      <a:round/>
+                      <a:headEnd type="none" w="med" len="med"/>
+                      <a:tailEnd type="none" w="med" len="med"/>
+                    </a:lnT>
+                    <a:lnB w="6350" cap="flat" cmpd="sng" algn="ctr">
+                      <a:solidFill>
+                        <a:srgbClr val="D5DAE1"/>
+                      </a:solidFill>
+                      <a:prstDash val="solid"/>
+                      <a:round/>
+                      <a:headEnd type="none" w="med" len="med"/>
+                      <a:tailEnd type="none" w="med" len="med"/>
+                    </a:lnB>
+                  </a:tcPr>
+                </a:tc>
+                <a:tc>
+                  <a:txBody>
+                    <a:bodyPr/>
+                    <a:lstStyle/>
+                    <a:p>
+                      <a:pPr indent="0" marL="0">
+                        <a:buNone/>
+                      </a:pPr>
+                      <a:r>
+                        <a:rPr lang="en-US" sz="1200" dirty="0">
+                          <a:solidFill>
+                            <a:srgbClr val="1B2433"/>
+                          </a:solidFill>
+                          <a:latin typeface="Calibri" pitchFamily="34" charset="0"/>
+                          <a:ea typeface="Calibri" pitchFamily="34" charset="-122"/>
+                          <a:cs typeface="Calibri" pitchFamily="34" charset="-120"/>
+                        </a:rPr>
+                        <a:t>3.72</a:t>
+                      </a:r>
+                      <a:endParaRPr lang="en-US" sz="1200" dirty="0">
+                        <a:latin typeface="Calibri" charset="0"/>
+                        <a:ea typeface="Calibri" charset="0"/>
+                        <a:cs typeface="Calibri" charset="0"/>
+                      </a:endParaRPr>
+                    </a:p>
+                  </a:txBody>
+                  <a:tcPr marL="91440" marR="91440" marT="45720" marB="45720">
+                    <a:lnL w="6350" cap="flat" cmpd="sng" algn="ctr">
+                      <a:solidFill>
+                        <a:srgbClr val="D5DAE1"/>
+                      </a:solidFill>
+                      <a:prstDash val="solid"/>
+                      <a:round/>
+                      <a:headEnd type="none" w="med" len="med"/>
+                      <a:tailEnd type="none" w="med" len="med"/>
+                    </a:lnL>
+                    <a:lnR w="6350" cap="flat" cmpd="sng" algn="ctr">
+                      <a:solidFill>
+                        <a:srgbClr val="D5DAE1"/>
+                      </a:solidFill>
+                      <a:prstDash val="solid"/>
+                      <a:round/>
+                      <a:headEnd type="none" w="med" len="med"/>
+                      <a:tailEnd type="none" w="med" len="med"/>
+                    </a:lnR>
+                    <a:lnT w="6350" cap="flat" cmpd="sng" algn="ctr">
+                      <a:solidFill>
+                        <a:srgbClr val="D5DAE1"/>
+                      </a:solidFill>
+                      <a:prstDash val="solid"/>
+                      <a:round/>
+                      <a:headEnd type="none" w="med" len="med"/>
+                      <a:tailEnd type="none" w="med" len="med"/>
+                    </a:lnT>
+                    <a:lnB w="6350" cap="flat" cmpd="sng" algn="ctr">
+                      <a:solidFill>
+                        <a:srgbClr val="D5DAE1"/>
+                      </a:solidFill>
+                      <a:prstDash val="solid"/>
+                      <a:round/>
+                      <a:headEnd type="none" w="med" len="med"/>
+                      <a:tailEnd type="none" w="med" len="med"/>
+                    </a:lnB>
+                  </a:tcPr>
+                </a:tc>
+                <a:tc>
+                  <a:txBody>
+                    <a:bodyPr/>
+                    <a:lstStyle/>
+                    <a:p>
+                      <a:pPr indent="0" marL="0">
+                        <a:buNone/>
+                      </a:pPr>
+                      <a:r>
+                        <a:rPr lang="en-US" sz="1200" dirty="0">
+                          <a:solidFill>
+                            <a:srgbClr val="1B2433"/>
+                          </a:solidFill>
+                          <a:latin typeface="Calibri" pitchFamily="34" charset="0"/>
+                          <a:ea typeface="Calibri" pitchFamily="34" charset="-122"/>
+                          <a:cs typeface="Calibri" pitchFamily="34" charset="-120"/>
+                        </a:rPr>
+                        <a:t>14.53</a:t>
+                      </a:r>
+                      <a:endParaRPr lang="en-US" sz="1200" dirty="0">
+                        <a:latin typeface="Calibri" charset="0"/>
+                        <a:ea typeface="Calibri" charset="0"/>
+                        <a:cs typeface="Calibri" charset="0"/>
+                      </a:endParaRPr>
+                    </a:p>
+                  </a:txBody>
+                  <a:tcPr marL="91440" marR="91440" marT="45720" marB="45720">
+                    <a:lnL w="6350" cap="flat" cmpd="sng" algn="ctr">
+                      <a:solidFill>
+                        <a:srgbClr val="D5DAE1"/>
+                      </a:solidFill>
+                      <a:prstDash val="solid"/>
+                      <a:round/>
+                      <a:headEnd type="none" w="med" len="med"/>
+                      <a:tailEnd type="none" w="med" len="med"/>
+                    </a:lnL>
+                    <a:lnR w="6350" cap="flat" cmpd="sng" algn="ctr">
+                      <a:solidFill>
+                        <a:srgbClr val="D5DAE1"/>
+                      </a:solidFill>
+                      <a:prstDash val="solid"/>
+                      <a:round/>
+                      <a:headEnd type="none" w="med" len="med"/>
+                      <a:tailEnd type="none" w="med" len="med"/>
+                    </a:lnR>
+                    <a:lnT w="6350" cap="flat" cmpd="sng" algn="ctr">
+                      <a:solidFill>
+                        <a:srgbClr val="D5DAE1"/>
+                      </a:solidFill>
+                      <a:prstDash val="solid"/>
+                      <a:round/>
+                      <a:headEnd type="none" w="med" len="med"/>
+                      <a:tailEnd type="none" w="med" len="med"/>
+                    </a:lnT>
+                    <a:lnB w="6350" cap="flat" cmpd="sng" algn="ctr">
+                      <a:solidFill>
+                        <a:srgbClr val="D5DAE1"/>
+                      </a:solidFill>
+                      <a:prstDash val="solid"/>
+                      <a:round/>
+                      <a:headEnd type="none" w="med" len="med"/>
+                      <a:tailEnd type="none" w="med" len="med"/>
+                    </a:lnB>
+                  </a:tcPr>
+                </a:tc>
+              </a:tr>
+              <a:tr h="384048">
+                <a:tc>
+                  <a:txBody>
+                    <a:bodyPr/>
+                    <a:lstStyle/>
+                    <a:p>
+                      <a:pPr indent="0" marL="0">
+                        <a:buNone/>
+                      </a:pPr>
+                      <a:r>
+                        <a:rPr lang="en-US" sz="1200" dirty="0">
+                          <a:solidFill>
+                            <a:srgbClr val="1B2433"/>
+                          </a:solidFill>
+                          <a:latin typeface="Calibri" pitchFamily="34" charset="0"/>
+                          <a:ea typeface="Calibri" pitchFamily="34" charset="-122"/>
+                          <a:cs typeface="Calibri" pitchFamily="34" charset="-120"/>
+                        </a:rPr>
+                        <a:t>ASTROSAT</a:t>
+                      </a:r>
+                      <a:endParaRPr lang="en-US" sz="1200" dirty="0">
+                        <a:latin typeface="Calibri" charset="0"/>
+                        <a:ea typeface="Calibri" charset="0"/>
+                        <a:cs typeface="Calibri" charset="0"/>
+                      </a:endParaRPr>
+                    </a:p>
+                  </a:txBody>
+                  <a:tcPr marL="91440" marR="91440" marT="45720" marB="45720">
+                    <a:lnL w="6350" cap="flat" cmpd="sng" algn="ctr">
+                      <a:solidFill>
+                        <a:srgbClr val="D5DAE1"/>
+                      </a:solidFill>
+                      <a:prstDash val="solid"/>
+                      <a:round/>
+                      <a:headEnd type="none" w="med" len="med"/>
+                      <a:tailEnd type="none" w="med" len="med"/>
+                    </a:lnL>
+                    <a:lnR w="6350" cap="flat" cmpd="sng" algn="ctr">
+                      <a:solidFill>
+                        <a:srgbClr val="D5DAE1"/>
+                      </a:solidFill>
+                      <a:prstDash val="solid"/>
+                      <a:round/>
+                      <a:headEnd type="none" w="med" len="med"/>
+                      <a:tailEnd type="none" w="med" len="med"/>
+                    </a:lnR>
+                    <a:lnT w="6350" cap="flat" cmpd="sng" algn="ctr">
+                      <a:solidFill>
+                        <a:srgbClr val="D5DAE1"/>
+                      </a:solidFill>
+                      <a:prstDash val="solid"/>
+                      <a:round/>
+                      <a:headEnd type="none" w="med" len="med"/>
+                      <a:tailEnd type="none" w="med" len="med"/>
+                    </a:lnT>
+                    <a:lnB w="6350" cap="flat" cmpd="sng" algn="ctr">
+                      <a:solidFill>
+                        <a:srgbClr val="D5DAE1"/>
+                      </a:solidFill>
+                      <a:prstDash val="solid"/>
+                      <a:round/>
+                      <a:headEnd type="none" w="med" len="med"/>
+                      <a:tailEnd type="none" w="med" len="med"/>
+                    </a:lnB>
+                  </a:tcPr>
+                </a:tc>
+                <a:tc>
+                  <a:txBody>
+                    <a:bodyPr/>
+                    <a:lstStyle/>
+                    <a:p>
+                      <a:pPr indent="0" marL="0">
+                        <a:buNone/>
+                      </a:pPr>
+                      <a:r>
+                        <a:rPr lang="en-US" sz="1200" dirty="0">
+                          <a:solidFill>
+                            <a:srgbClr val="1B2433"/>
+                          </a:solidFill>
+                          <a:latin typeface="Calibri" pitchFamily="34" charset="0"/>
+                          <a:ea typeface="Calibri" pitchFamily="34" charset="-122"/>
+                          <a:cs typeface="Calibri" pitchFamily="34" charset="-120"/>
+                        </a:rPr>
+                        <a:t>COSMOS 2251 DEB</a:t>
+                      </a:r>
+                      <a:endParaRPr lang="en-US" sz="1200" dirty="0">
+                        <a:latin typeface="Calibri" charset="0"/>
+                        <a:ea typeface="Calibri" charset="0"/>
+                        <a:cs typeface="Calibri" charset="0"/>
+                      </a:endParaRPr>
+                    </a:p>
+                  </a:txBody>
+                  <a:tcPr marL="91440" marR="91440" marT="45720" marB="45720">
+                    <a:lnL w="6350" cap="flat" cmpd="sng" algn="ctr">
+                      <a:solidFill>
+                        <a:srgbClr val="D5DAE1"/>
+                      </a:solidFill>
+                      <a:prstDash val="solid"/>
+                      <a:round/>
+                      <a:headEnd type="none" w="med" len="med"/>
+                      <a:tailEnd type="none" w="med" len="med"/>
+                    </a:lnL>
+                    <a:lnR w="6350" cap="flat" cmpd="sng" algn="ctr">
+                      <a:solidFill>
+                        <a:srgbClr val="D5DAE1"/>
+                      </a:solidFill>
+                      <a:prstDash val="solid"/>
+                      <a:round/>
+                      <a:headEnd type="none" w="med" len="med"/>
+                      <a:tailEnd type="none" w="med" len="med"/>
+                    </a:lnR>
+                    <a:lnT w="6350" cap="flat" cmpd="sng" algn="ctr">
+                      <a:solidFill>
+                        <a:srgbClr val="D5DAE1"/>
+                      </a:solidFill>
+                      <a:prstDash val="solid"/>
+                      <a:round/>
+                      <a:headEnd type="none" w="med" len="med"/>
+                      <a:tailEnd type="none" w="med" len="med"/>
+                    </a:lnT>
+                    <a:lnB w="6350" cap="flat" cmpd="sng" algn="ctr">
+                      <a:solidFill>
+                        <a:srgbClr val="D5DAE1"/>
+                      </a:solidFill>
+                      <a:prstDash val="solid"/>
+                      <a:round/>
+                      <a:headEnd type="none" w="med" len="med"/>
+                      <a:tailEnd type="none" w="med" len="med"/>
+                    </a:lnB>
+                  </a:tcPr>
+                </a:tc>
+                <a:tc>
+                  <a:txBody>
+                    <a:bodyPr/>
+                    <a:lstStyle/>
+                    <a:p>
+                      <a:pPr indent="0" marL="0">
+                        <a:buNone/>
+                      </a:pPr>
+                      <a:r>
+                        <a:rPr lang="en-US" sz="1200" dirty="0">
+                          <a:solidFill>
+                            <a:srgbClr val="1B2433"/>
+                          </a:solidFill>
+                          <a:latin typeface="Calibri" pitchFamily="34" charset="0"/>
+                          <a:ea typeface="Calibri" pitchFamily="34" charset="-122"/>
+                          <a:cs typeface="Calibri" pitchFamily="34" charset="-120"/>
+                        </a:rPr>
+                        <a:t>3.93</a:t>
+                      </a:r>
+                      <a:endParaRPr lang="en-US" sz="1200" dirty="0">
+                        <a:latin typeface="Calibri" charset="0"/>
+                        <a:ea typeface="Calibri" charset="0"/>
+                        <a:cs typeface="Calibri" charset="0"/>
+                      </a:endParaRPr>
+                    </a:p>
+                  </a:txBody>
+                  <a:tcPr marL="91440" marR="91440" marT="45720" marB="45720">
+                    <a:lnL w="6350" cap="flat" cmpd="sng" algn="ctr">
+                      <a:solidFill>
+                        <a:srgbClr val="D5DAE1"/>
+                      </a:solidFill>
+                      <a:prstDash val="solid"/>
+                      <a:round/>
+                      <a:headEnd type="none" w="med" len="med"/>
+                      <a:tailEnd type="none" w="med" len="med"/>
+                    </a:lnL>
+                    <a:lnR w="6350" cap="flat" cmpd="sng" algn="ctr">
+                      <a:solidFill>
+                        <a:srgbClr val="D5DAE1"/>
+                      </a:solidFill>
+                      <a:prstDash val="solid"/>
+                      <a:round/>
+                      <a:headEnd type="none" w="med" len="med"/>
+                      <a:tailEnd type="none" w="med" len="med"/>
+                    </a:lnR>
+                    <a:lnT w="6350" cap="flat" cmpd="sng" algn="ctr">
+                      <a:solidFill>
+                        <a:srgbClr val="D5DAE1"/>
+                      </a:solidFill>
+                      <a:prstDash val="solid"/>
+                      <a:round/>
+                      <a:headEnd type="none" w="med" len="med"/>
+                      <a:tailEnd type="none" w="med" len="med"/>
+                    </a:lnT>
+                    <a:lnB w="6350" cap="flat" cmpd="sng" algn="ctr">
+                      <a:solidFill>
+                        <a:srgbClr val="D5DAE1"/>
+                      </a:solidFill>
+                      <a:prstDash val="solid"/>
+                      <a:round/>
+                      <a:headEnd type="none" w="med" len="med"/>
+                      <a:tailEnd type="none" w="med" len="med"/>
+                    </a:lnB>
+                  </a:tcPr>
+                </a:tc>
+                <a:tc>
+                  <a:txBody>
+                    <a:bodyPr/>
+                    <a:lstStyle/>
+                    <a:p>
+                      <a:pPr indent="0" marL="0">
+                        <a:buNone/>
+                      </a:pPr>
+                      <a:r>
+                        <a:rPr lang="en-US" sz="1200" dirty="0">
+                          <a:solidFill>
+                            <a:srgbClr val="1B2433"/>
+                          </a:solidFill>
+                          <a:latin typeface="Calibri" pitchFamily="34" charset="0"/>
+                          <a:ea typeface="Calibri" pitchFamily="34" charset="-122"/>
+                          <a:cs typeface="Calibri" pitchFamily="34" charset="-120"/>
+                        </a:rPr>
+                        <a:t>9.35</a:t>
+                      </a:r>
+                      <a:endParaRPr lang="en-US" sz="1200" dirty="0">
+                        <a:latin typeface="Calibri" charset="0"/>
+                        <a:ea typeface="Calibri" charset="0"/>
+                        <a:cs typeface="Calibri" charset="0"/>
+                      </a:endParaRPr>
+                    </a:p>
+                  </a:txBody>
+                  <a:tcPr marL="91440" marR="91440" marT="45720" marB="45720">
+                    <a:lnL w="6350" cap="flat" cmpd="sng" algn="ctr">
+                      <a:solidFill>
+                        <a:srgbClr val="D5DAE1"/>
+                      </a:solidFill>
+                      <a:prstDash val="solid"/>
+                      <a:round/>
+                      <a:headEnd type="none" w="med" len="med"/>
+                      <a:tailEnd type="none" w="med" len="med"/>
+                    </a:lnL>
+                    <a:lnR w="6350" cap="flat" cmpd="sng" algn="ctr">
+                      <a:solidFill>
+                        <a:srgbClr val="D5DAE1"/>
+                      </a:solidFill>
+                      <a:prstDash val="solid"/>
+                      <a:round/>
+                      <a:headEnd type="none" w="med" len="med"/>
+                      <a:tailEnd type="none" w="med" len="med"/>
+                    </a:lnR>
+                    <a:lnT w="6350" cap="flat" cmpd="sng" algn="ctr">
+                      <a:solidFill>
+                        <a:srgbClr val="D5DAE1"/>
+                      </a:solidFill>
+                      <a:prstDash val="solid"/>
+                      <a:round/>
+                      <a:headEnd type="none" w="med" len="med"/>
+                      <a:tailEnd type="none" w="med" len="med"/>
+                    </a:lnT>
+                    <a:lnB w="6350" cap="flat" cmpd="sng" algn="ctr">
+                      <a:solidFill>
+                        <a:srgbClr val="D5DAE1"/>
+                      </a:solidFill>
+                      <a:prstDash val="solid"/>
+                      <a:round/>
+                      <a:headEnd type="none" w="med" len="med"/>
+                      <a:tailEnd type="none" w="med" len="med"/>
+                    </a:lnB>
+                  </a:tcPr>
+                </a:tc>
+              </a:tr>
+              <a:tr h="384048">
+                <a:tc>
+                  <a:txBody>
+                    <a:bodyPr/>
+                    <a:lstStyle/>
+                    <a:p>
+                      <a:pPr indent="0" marL="0">
+                        <a:buNone/>
+                      </a:pPr>
+                      <a:r>
+                        <a:rPr lang="en-US" sz="1200" dirty="0">
+                          <a:solidFill>
+                            <a:srgbClr val="1B2433"/>
+                          </a:solidFill>
+                          <a:latin typeface="Calibri" pitchFamily="34" charset="0"/>
+                          <a:ea typeface="Calibri" pitchFamily="34" charset="-122"/>
+                          <a:cs typeface="Calibri" pitchFamily="34" charset="-120"/>
+                        </a:rPr>
+                        <a:t>EOS-6 (OCEANSAT-3)</a:t>
+                      </a:r>
+                      <a:endParaRPr lang="en-US" sz="1200" dirty="0">
+                        <a:latin typeface="Calibri" charset="0"/>
+                        <a:ea typeface="Calibri" charset="0"/>
+                        <a:cs typeface="Calibri" charset="0"/>
+                      </a:endParaRPr>
+                    </a:p>
+                  </a:txBody>
+                  <a:tcPr marL="91440" marR="91440" marT="45720" marB="45720">
+                    <a:lnL w="6350" cap="flat" cmpd="sng" algn="ctr">
+                      <a:solidFill>
+                        <a:srgbClr val="D5DAE1"/>
+                      </a:solidFill>
+                      <a:prstDash val="solid"/>
+                      <a:round/>
+                      <a:headEnd type="none" w="med" len="med"/>
+                      <a:tailEnd type="none" w="med" len="med"/>
+                    </a:lnL>
+                    <a:lnR w="6350" cap="flat" cmpd="sng" algn="ctr">
+                      <a:solidFill>
+                        <a:srgbClr val="D5DAE1"/>
+                      </a:solidFill>
+                      <a:prstDash val="solid"/>
+                      <a:round/>
+                      <a:headEnd type="none" w="med" len="med"/>
+                      <a:tailEnd type="none" w="med" len="med"/>
+                    </a:lnR>
+                    <a:lnT w="6350" cap="flat" cmpd="sng" algn="ctr">
+                      <a:solidFill>
+                        <a:srgbClr val="D5DAE1"/>
+                      </a:solidFill>
+                      <a:prstDash val="solid"/>
+                      <a:round/>
+                      <a:headEnd type="none" w="med" len="med"/>
+                      <a:tailEnd type="none" w="med" len="med"/>
+                    </a:lnT>
+                    <a:lnB w="6350" cap="flat" cmpd="sng" algn="ctr">
+                      <a:solidFill>
+                        <a:srgbClr val="D5DAE1"/>
+                      </a:solidFill>
+                      <a:prstDash val="solid"/>
+                      <a:round/>
+                      <a:headEnd type="none" w="med" len="med"/>
+                      <a:tailEnd type="none" w="med" len="med"/>
+                    </a:lnB>
+                  </a:tcPr>
+                </a:tc>
+                <a:tc>
+                  <a:txBody>
+                    <a:bodyPr/>
+                    <a:lstStyle/>
+                    <a:p>
+                      <a:pPr indent="0" marL="0">
+                        <a:buNone/>
+                      </a:pPr>
+                      <a:r>
+                        <a:rPr lang="en-US" sz="1200" dirty="0">
+                          <a:solidFill>
+                            <a:srgbClr val="1B2433"/>
+                          </a:solidFill>
+                          <a:latin typeface="Calibri" pitchFamily="34" charset="0"/>
+                          <a:ea typeface="Calibri" pitchFamily="34" charset="-122"/>
+                          <a:cs typeface="Calibri" pitchFamily="34" charset="-120"/>
+                        </a:rPr>
+                        <a:t>COSMOS 2251 DEB</a:t>
+                      </a:r>
+                      <a:endParaRPr lang="en-US" sz="1200" dirty="0">
+                        <a:latin typeface="Calibri" charset="0"/>
+                        <a:ea typeface="Calibri" charset="0"/>
+                        <a:cs typeface="Calibri" charset="0"/>
+                      </a:endParaRPr>
+                    </a:p>
+                  </a:txBody>
+                  <a:tcPr marL="91440" marR="91440" marT="45720" marB="45720">
+                    <a:lnL w="6350" cap="flat" cmpd="sng" algn="ctr">
+                      <a:solidFill>
+                        <a:srgbClr val="D5DAE1"/>
+                      </a:solidFill>
+                      <a:prstDash val="solid"/>
+                      <a:round/>
+                      <a:headEnd type="none" w="med" len="med"/>
+                      <a:tailEnd type="none" w="med" len="med"/>
+                    </a:lnL>
+                    <a:lnR w="6350" cap="flat" cmpd="sng" algn="ctr">
+                      <a:solidFill>
+                        <a:srgbClr val="D5DAE1"/>
+                      </a:solidFill>
+                      <a:prstDash val="solid"/>
+                      <a:round/>
+                      <a:headEnd type="none" w="med" len="med"/>
+                      <a:tailEnd type="none" w="med" len="med"/>
+                    </a:lnR>
+                    <a:lnT w="6350" cap="flat" cmpd="sng" algn="ctr">
+                      <a:solidFill>
+                        <a:srgbClr val="D5DAE1"/>
+                      </a:solidFill>
+                      <a:prstDash val="solid"/>
+                      <a:round/>
+                      <a:headEnd type="none" w="med" len="med"/>
+                      <a:tailEnd type="none" w="med" len="med"/>
+                    </a:lnT>
+                    <a:lnB w="6350" cap="flat" cmpd="sng" algn="ctr">
+                      <a:solidFill>
+                        <a:srgbClr val="D5DAE1"/>
+                      </a:solidFill>
+                      <a:prstDash val="solid"/>
+                      <a:round/>
+                      <a:headEnd type="none" w="med" len="med"/>
+                      <a:tailEnd type="none" w="med" len="med"/>
+                    </a:lnB>
+                  </a:tcPr>
+                </a:tc>
+                <a:tc>
+                  <a:txBody>
+                    <a:bodyPr/>
+                    <a:lstStyle/>
+                    <a:p>
+                      <a:pPr indent="0" marL="0">
+                        <a:buNone/>
+                      </a:pPr>
+                      <a:r>
+                        <a:rPr lang="en-US" sz="1200" dirty="0">
+                          <a:solidFill>
+                            <a:srgbClr val="1B2433"/>
+                          </a:solidFill>
+                          <a:latin typeface="Calibri" pitchFamily="34" charset="0"/>
+                          <a:ea typeface="Calibri" pitchFamily="34" charset="-122"/>
+                          <a:cs typeface="Calibri" pitchFamily="34" charset="-120"/>
+                        </a:rPr>
+                        <a:t>3.94</a:t>
+                      </a:r>
+                      <a:endParaRPr lang="en-US" sz="1200" dirty="0">
+                        <a:latin typeface="Calibri" charset="0"/>
+                        <a:ea typeface="Calibri" charset="0"/>
+                        <a:cs typeface="Calibri" charset="0"/>
+                      </a:endParaRPr>
+                    </a:p>
+                  </a:txBody>
+                  <a:tcPr marL="91440" marR="91440" marT="45720" marB="45720">
+                    <a:lnL w="6350" cap="flat" cmpd="sng" algn="ctr">
+                      <a:solidFill>
+                        <a:srgbClr val="D5DAE1"/>
+                      </a:solidFill>
+                      <a:prstDash val="solid"/>
+                      <a:round/>
+                      <a:headEnd type="none" w="med" len="med"/>
+                      <a:tailEnd type="none" w="med" len="med"/>
+                    </a:lnL>
+                    <a:lnR w="6350" cap="flat" cmpd="sng" algn="ctr">
+                      <a:solidFill>
+                        <a:srgbClr val="D5DAE1"/>
+                      </a:solidFill>
+                      <a:prstDash val="solid"/>
+                      <a:round/>
+                      <a:headEnd type="none" w="med" len="med"/>
+                      <a:tailEnd type="none" w="med" len="med"/>
+                    </a:lnR>
+                    <a:lnT w="6350" cap="flat" cmpd="sng" algn="ctr">
+                      <a:solidFill>
+                        <a:srgbClr val="D5DAE1"/>
+                      </a:solidFill>
+                      <a:prstDash val="solid"/>
+                      <a:round/>
+                      <a:headEnd type="none" w="med" len="med"/>
+                      <a:tailEnd type="none" w="med" len="med"/>
+                    </a:lnT>
+                    <a:lnB w="6350" cap="flat" cmpd="sng" algn="ctr">
+                      <a:solidFill>
+                        <a:srgbClr val="D5DAE1"/>
+                      </a:solidFill>
+                      <a:prstDash val="solid"/>
+                      <a:round/>
+                      <a:headEnd type="none" w="med" len="med"/>
+                      <a:tailEnd type="none" w="med" len="med"/>
+                    </a:lnB>
+                  </a:tcPr>
+                </a:tc>
+                <a:tc>
+                  <a:txBody>
+                    <a:bodyPr/>
+                    <a:lstStyle/>
+                    <a:p>
+                      <a:pPr indent="0" marL="0">
+                        <a:buNone/>
+                      </a:pPr>
+                      <a:r>
+                        <a:rPr lang="en-US" sz="1200" dirty="0">
+                          <a:solidFill>
+                            <a:srgbClr val="1B2433"/>
+                          </a:solidFill>
+                          <a:latin typeface="Calibri" pitchFamily="34" charset="0"/>
+                          <a:ea typeface="Calibri" pitchFamily="34" charset="-122"/>
+                          <a:cs typeface="Calibri" pitchFamily="34" charset="-120"/>
+                        </a:rPr>
+                        <a:t>10.39</a:t>
+                      </a:r>
+                      <a:endParaRPr lang="en-US" sz="1200" dirty="0">
+                        <a:latin typeface="Calibri" charset="0"/>
+                        <a:ea typeface="Calibri" charset="0"/>
+                        <a:cs typeface="Calibri" charset="0"/>
+                      </a:endParaRPr>
+                    </a:p>
+                  </a:txBody>
+                  <a:tcPr marL="91440" marR="91440" marT="45720" marB="45720">
+                    <a:lnL w="6350" cap="flat" cmpd="sng" algn="ctr">
+                      <a:solidFill>
+                        <a:srgbClr val="D5DAE1"/>
+                      </a:solidFill>
+                      <a:prstDash val="solid"/>
+                      <a:round/>
+                      <a:headEnd type="none" w="med" len="med"/>
+                      <a:tailEnd type="none" w="med" len="med"/>
+                    </a:lnL>
+                    <a:lnR w="6350" cap="flat" cmpd="sng" algn="ctr">
+                      <a:solidFill>
+                        <a:srgbClr val="D5DAE1"/>
+                      </a:solidFill>
+                      <a:prstDash val="solid"/>
+                      <a:round/>
+                      <a:headEnd type="none" w="med" len="med"/>
+                      <a:tailEnd type="none" w="med" len="med"/>
+                    </a:lnR>
+                    <a:lnT w="6350" cap="flat" cmpd="sng" algn="ctr">
+                      <a:solidFill>
+                        <a:srgbClr val="D5DAE1"/>
+                      </a:solidFill>
+                      <a:prstDash val="solid"/>
+                      <a:round/>
+                      <a:headEnd type="none" w="med" len="med"/>
+                      <a:tailEnd type="none" w="med" len="med"/>
+                    </a:lnT>
+                    <a:lnB w="6350" cap="flat" cmpd="sng" algn="ctr">
+                      <a:solidFill>
+                        <a:srgbClr val="D5DAE1"/>
+                      </a:solidFill>
+                      <a:prstDash val="solid"/>
+                      <a:round/>
+                      <a:headEnd type="none" w="med" len="med"/>
+                      <a:tailEnd type="none" w="med" len="med"/>
+                    </a:lnB>
+                  </a:tcPr>
+                </a:tc>
+              </a:tr>
+            </a:tbl>
+          </a:graphicData>
+        </a:graphic>
+      </p:graphicFrame>
+      <p:sp>
+        <p:nvSpPr>
+          <p:cNvPr id="8" name="Text 4"/>
+          <p:cNvSpPr txBox="1"/>
+          <p:nvPr/>
+        </p:nvSpPr>
+        <p:spPr>
+          <a:xfrm>
+            <a:off x="6583680" y="4572000"/>
+            <a:ext cx="5029200" cy="1371600"/>
+          </a:xfrm>
+          <a:prstGeom prst="rect">
+            <a:avLst/>
+          </a:prstGeom>
+          <a:noFill/>
+          <a:ln/>
+        </p:spPr>
+        <p:txBody>
+          <a:bodyPr wrap="square" lIns="0" tIns="0" rIns="0" bIns="0" rtlCol="0" anchor="t"/>
+          <a:lstStyle/>
+          <a:p>
+            <a:pPr indent="0" marL="0">
+              <a:buNone/>
+            </a:pPr>
+            <a:r>
+              <a:rPr lang="en-US" sz="1300" i="1" dirty="0">
+                <a:solidFill>
+                  <a:srgbClr val="5B6573"/>
+                </a:solidFill>
+                <a:latin typeface="Calibri" pitchFamily="34" charset="0"/>
+                <a:ea typeface="Calibri" pitchFamily="34" charset="-122"/>
+                <a:cs typeface="Calibri" pitchFamily="34" charset="-120"/>
+              </a:rPr>
+              <a:t>Every active satellite propagated every 10 s for 24 h; every pair checked. Public elements are good to about 1 km: this is screening, the daily watch ORBITWATCH would run.</a:t>
+            </a:r>
+            <a:endParaRPr lang="en-US" sz="1300" dirty="0"/>
+          </a:p>
+        </p:txBody>
+      </p:sp>
+      <p:sp>
+        <p:nvSpPr>
+          <p:cNvPr id="9" name="Text 5"/>
+          <p:cNvSpPr txBox="1"/>
+          <p:nvPr/>
+        </p:nvSpPr>
+        <p:spPr>
+          <a:xfrm>
+            <a:off x="548640" y="6400800"/>
+            <a:ext cx="7315200" cy="274320"/>
+          </a:xfrm>
+          <a:prstGeom prst="rect">
+            <a:avLst/>
+          </a:prstGeom>
+          <a:noFill/>
+          <a:ln/>
+        </p:spPr>
+        <p:txBody>
+          <a:bodyPr wrap="square" lIns="0" tIns="0" rIns="0" bIns="0" rtlCol="0" anchor="ctr"/>
+          <a:lstStyle/>
+          <a:p>
+            <a:pPr indent="0" marL="0">
+              <a:buNone/>
+            </a:pPr>
+            <a:r>
+              <a:rPr lang="en-US" sz="1000" dirty="0">
+                <a:solidFill>
+                  <a:srgbClr val="5B6573"/>
+                </a:solidFill>
+                <a:latin typeface="Calibri" pitchFamily="34" charset="0"/>
+                <a:ea typeface="Calibri" pitchFamily="34" charset="-122"/>
+                <a:cs typeface="Calibri" pitchFamily="34" charset="-120"/>
+              </a:rPr>
+              <a:t>PROJECT HIGH GROUND  ·  CDM Datathon-2026  ·  Theme 6.1</a:t>
+            </a:r>
+            <a:endParaRPr lang="en-US" sz="1000" dirty="0"/>
+          </a:p>
+        </p:txBody>
+      </p:sp>
+      <p:sp>
+        <p:nvSpPr>
+          <p:cNvPr id="10" name="Text 6"/>
+          <p:cNvSpPr txBox="1"/>
+          <p:nvPr/>
+        </p:nvSpPr>
+        <p:spPr>
+          <a:xfrm>
+            <a:off x="10725912" y="6400800"/>
+            <a:ext cx="914400" cy="274320"/>
+          </a:xfrm>
+          <a:prstGeom prst="rect">
+            <a:avLst/>
+          </a:prstGeom>
+          <a:noFill/>
+          <a:ln/>
+        </p:spPr>
+        <p:txBody>
+          <a:bodyPr wrap="square" lIns="0" tIns="0" rIns="0" bIns="0" rtlCol="0" anchor="ctr"/>
+          <a:lstStyle/>
+          <a:p>
+            <a:pPr algn="r" indent="0" marL="0">
+              <a:buNone/>
+            </a:pPr>
+            <a:r>
+              <a:rPr lang="en-US" sz="1000" dirty="0">
+                <a:solidFill>
+                  <a:srgbClr val="5B6573"/>
+                </a:solidFill>
+                <a:latin typeface="Calibri" pitchFamily="34" charset="0"/>
+                <a:ea typeface="Calibri" pitchFamily="34" charset="-122"/>
+                <a:cs typeface="Calibri" pitchFamily="34" charset="-120"/>
+              </a:rPr>
+              <a:t>8 / 19</a:t>
+            </a:r>
+            <a:endParaRPr lang="en-US" sz="1000" dirty="0"/>
+          </a:p>
+        </p:txBody>
+      </p:sp>
+    </p:spTree>
+  </p:cSld>
+  <p:clrMapOvr>
+    <a:masterClrMapping/>
+  </p:clrMapOvr>
+</p:sld>
+</file>
+
+<file path=ppt/slides/slide9.xml><?xml version="1.0" encoding="utf-8"?>
+<p:sld xmlns:a="http://schemas.openxmlformats.org/drawingml/2006/main" xmlns:r="http://schemas.openxmlformats.org/officeDocument/2006/relationships" xmlns:p="http://schemas.openxmlformats.org/presentationml/2006/main">
+  <p:cSld name="Slide 9">
     <p:bg>
       <p:bgPr>
         <a:solidFill>
@@ -24744,289 +29014,7 @@
                 <a:ea typeface="Calibri" pitchFamily="34" charset="-122"/>
                 <a:cs typeface="Calibri" pitchFamily="34" charset="-120"/>
               </a:rPr>
-              <a:t>8 / 17</a:t>
-            </a:r>
-            <a:endParaRPr lang="en-US" sz="1000" dirty="0"/>
-          </a:p>
-        </p:txBody>
-      </p:sp>
-    </p:spTree>
-  </p:cSld>
-  <p:clrMapOvr>
-    <a:masterClrMapping/>
-  </p:clrMapOvr>
-</p:sld>
-</file>
-
-<file path=ppt/slides/slide9.xml><?xml version="1.0" encoding="utf-8"?>
-<p:sld xmlns:a="http://schemas.openxmlformats.org/drawingml/2006/main" xmlns:r="http://schemas.openxmlformats.org/officeDocument/2006/relationships" xmlns:p="http://schemas.openxmlformats.org/presentationml/2006/main">
-  <p:cSld name="Slide 9">
-    <p:bg>
-      <p:bgPr>
-        <a:solidFill>
-          <a:srgbClr val="FFFFFF"/>
-        </a:solidFill>
-      </p:bgPr>
-    </p:bg>
-    <p:spTree>
-      <p:nvGrpSpPr>
-        <p:cNvPr id="1" name=""/>
-        <p:cNvGrpSpPr/>
-        <p:nvPr/>
-      </p:nvGrpSpPr>
-      <p:grpSpPr>
-        <a:xfrm>
-          <a:off x="0" y="0"/>
-          <a:ext cx="0" cy="0"/>
-          <a:chOff x="0" y="0"/>
-          <a:chExt cx="0" cy="0"/>
-        </a:xfrm>
-      </p:grpSpPr>
-      <p:sp>
-        <p:nvSpPr>
-          <p:cNvPr id="2" name="Text 0"/>
-          <p:cNvSpPr txBox="1"/>
-          <p:nvPr/>
-        </p:nvSpPr>
-        <p:spPr>
-          <a:xfrm>
-            <a:off x="548640" y="365760"/>
-            <a:ext cx="10972800" cy="274320"/>
-          </a:xfrm>
-          <a:prstGeom prst="rect">
-            <a:avLst/>
-          </a:prstGeom>
-          <a:noFill/>
-          <a:ln/>
-        </p:spPr>
-        <p:txBody>
-          <a:bodyPr wrap="square" lIns="0" tIns="0" rIns="0" bIns="0" rtlCol="0" anchor="ctr"/>
-          <a:lstStyle/>
-          <a:p>
-            <a:pPr indent="0" marL="0">
-              <a:buNone/>
-            </a:pPr>
-            <a:r>
-              <a:rPr lang="en-US" sz="1200" b="1" spc="200" kern="0" dirty="0">
-                <a:solidFill>
-                  <a:srgbClr val="D99A1E"/>
-                </a:solidFill>
-                <a:latin typeface="Calibri" pitchFamily="34" charset="0"/>
-                <a:ea typeface="Calibri" pitchFamily="34" charset="-122"/>
-                <a:cs typeface="Calibri" pitchFamily="34" charset="-120"/>
-              </a:rPr>
-              <a:t>FINDING 6 · THE NATURAL ADVERSARY</a:t>
-            </a:r>
-            <a:endParaRPr lang="en-US" sz="1200" dirty="0"/>
-          </a:p>
-        </p:txBody>
-      </p:sp>
-      <p:sp>
-        <p:nvSpPr>
-          <p:cNvPr id="3" name="Text 1"/>
-          <p:cNvSpPr txBox="1"/>
-          <p:nvPr/>
-        </p:nvSpPr>
-        <p:spPr>
-          <a:xfrm>
-            <a:off x="548640" y="658368"/>
-            <a:ext cx="11064240" cy="685800"/>
-          </a:xfrm>
-          <a:prstGeom prst="rect">
-            <a:avLst/>
-          </a:prstGeom>
-          <a:noFill/>
-          <a:ln/>
-        </p:spPr>
-        <p:txBody>
-          <a:bodyPr wrap="square" lIns="0" tIns="0" rIns="0" bIns="0" rtlCol="0" anchor="t"/>
-          <a:lstStyle/>
-          <a:p>
-            <a:pPr indent="0" marL="0">
-              <a:buNone/>
-            </a:pPr>
-            <a:r>
-              <a:rPr lang="en-US" sz="2800" b="1" dirty="0">
-                <a:solidFill>
-                  <a:srgbClr val="0B1D3A"/>
-                </a:solidFill>
-                <a:latin typeface="Cambria" pitchFamily="34" charset="0"/>
-                <a:ea typeface="Cambria" pitchFamily="34" charset="-122"/>
-                <a:cs typeface="Cambria" pitchFamily="34" charset="-120"/>
-              </a:rPr>
-              <a:t>Storm odds rise ~7-fold when the Sun is active</a:t>
-            </a:r>
-            <a:endParaRPr lang="en-US" sz="2800" dirty="0"/>
-          </a:p>
-        </p:txBody>
-      </p:sp>
-      <p:graphicFrame>
-        <p:nvGraphicFramePr>
-          <p:cNvPr id="4" name="Chart 0" descr=""/>
-          <p:cNvGraphicFramePr/>
-          <p:nvPr/>
-        </p:nvGraphicFramePr>
-        <p:xfrm>
-          <a:off x="548640" y="1554480"/>
-          <a:ext cx="4572000" cy="4572000"/>
-        </p:xfrm>
-        <a:graphic xmlns:a="http://schemas.openxmlformats.org/drawingml/2006/main">
-          <a:graphicData uri="http://schemas.openxmlformats.org/drawingml/2006/chart">
-            <c:chart xmlns:c="http://schemas.openxmlformats.org/drawingml/2006/chart" r:id="rId1"/>
-          </a:graphicData>
-        </a:graphic>
-      </p:graphicFrame>
-      <p:graphicFrame>
-        <p:nvGraphicFramePr>
-          <p:cNvPr id="5" name="Chart 1" descr=""/>
-          <p:cNvGraphicFramePr/>
-          <p:nvPr/>
-        </p:nvGraphicFramePr>
-        <p:xfrm>
-          <a:off x="5303520" y="1554480"/>
-          <a:ext cx="6309360" cy="3017520"/>
-        </p:xfrm>
-        <a:graphic xmlns:a="http://schemas.openxmlformats.org/drawingml/2006/main">
-          <a:graphicData uri="http://schemas.openxmlformats.org/drawingml/2006/chart">
-            <c:chart xmlns:c="http://schemas.openxmlformats.org/drawingml/2006/chart" r:id="rId2"/>
-          </a:graphicData>
-        </a:graphic>
-      </p:graphicFrame>
-      <p:sp>
-        <p:nvSpPr>
-          <p:cNvPr id="6" name="Text 2"/>
-          <p:cNvSpPr txBox="1"/>
-          <p:nvPr/>
-        </p:nvSpPr>
-        <p:spPr>
-          <a:xfrm>
-            <a:off x="5303520" y="4754880"/>
-            <a:ext cx="6309360" cy="1371600"/>
-          </a:xfrm>
-          <a:prstGeom prst="rect">
-            <a:avLst/>
-          </a:prstGeom>
-          <a:noFill/>
-          <a:ln/>
-        </p:spPr>
-        <p:txBody>
-          <a:bodyPr wrap="square" lIns="0" tIns="0" rIns="0" bIns="0" rtlCol="0" anchor="ctr"/>
-          <a:lstStyle/>
-          <a:p>
-            <a:pPr indent="0" marL="0">
-              <a:spcAft>
-                <a:spcPts val="400"/>
-              </a:spcAft>
-              <a:buNone/>
-            </a:pPr>
-            <a:r>
-              <a:rPr lang="en-US" sz="1400" b="1" dirty="0">
-                <a:solidFill>
-                  <a:srgbClr val="C0392B"/>
-                </a:solidFill>
-                <a:latin typeface="Calibri" pitchFamily="34" charset="0"/>
-                <a:ea typeface="Calibri" pitchFamily="34" charset="-122"/>
-                <a:cs typeface="Calibri" pitchFamily="34" charset="-120"/>
-              </a:rPr>
-              <a:t>39% vs 6%</a:t>
-            </a:r>
-            <a:endParaRPr lang="en-US" sz="1400" dirty="0"/>
-          </a:p>
-          <a:p>
-            <a:pPr indent="0" marL="0">
-              <a:spcAft>
-                <a:spcPts val="400"/>
-              </a:spcAft>
-              <a:buNone/>
-            </a:pPr>
-            <a:r>
-              <a:rPr lang="en-US" sz="1400" dirty="0">
-                <a:solidFill>
-                  <a:srgbClr val="1B2433"/>
-                </a:solidFill>
-                <a:latin typeface="Calibri" pitchFamily="34" charset="0"/>
-                <a:ea typeface="Calibri" pitchFamily="34" charset="-122"/>
-                <a:cs typeface="Calibri" pitchFamily="34" charset="-120"/>
-              </a:rPr>
-              <a:t>chance of an intense storm in any 30 days, active vs quiet Sun. Storms killed 38 new Starlink satellites (Feb 2022); solar cycle 25 peaked in Oct 2024.</a:t>
-            </a:r>
-            <a:endParaRPr lang="en-US" sz="1400" dirty="0"/>
-          </a:p>
-        </p:txBody>
-      </p:sp>
-      <p:sp>
-        <p:nvSpPr>
-          <p:cNvPr id="7" name="Text 3"/>
-          <p:cNvSpPr txBox="1"/>
-          <p:nvPr/>
-        </p:nvSpPr>
-        <p:spPr>
-          <a:xfrm>
-            <a:off x="548640" y="6400800"/>
-            <a:ext cx="7315200" cy="274320"/>
-          </a:xfrm>
-          <a:prstGeom prst="rect">
-            <a:avLst/>
-          </a:prstGeom>
-          <a:noFill/>
-          <a:ln/>
-        </p:spPr>
-        <p:txBody>
-          <a:bodyPr wrap="square" lIns="0" tIns="0" rIns="0" bIns="0" rtlCol="0" anchor="ctr"/>
-          <a:lstStyle/>
-          <a:p>
-            <a:pPr indent="0" marL="0">
-              <a:buNone/>
-            </a:pPr>
-            <a:r>
-              <a:rPr lang="en-US" sz="1000" dirty="0">
-                <a:solidFill>
-                  <a:srgbClr val="5B6573"/>
-                </a:solidFill>
-                <a:latin typeface="Calibri" pitchFamily="34" charset="0"/>
-                <a:ea typeface="Calibri" pitchFamily="34" charset="-122"/>
-                <a:cs typeface="Calibri" pitchFamily="34" charset="-120"/>
-              </a:rPr>
-              <a:t>PROJECT HIGH GROUND  ·  CDM Datathon-2026  ·  Theme 6.1</a:t>
-            </a:r>
-            <a:endParaRPr lang="en-US" sz="1000" dirty="0"/>
-          </a:p>
-        </p:txBody>
-      </p:sp>
-      <p:sp>
-        <p:nvSpPr>
-          <p:cNvPr id="8" name="Text 4"/>
-          <p:cNvSpPr txBox="1"/>
-          <p:nvPr/>
-        </p:nvSpPr>
-        <p:spPr>
-          <a:xfrm>
-            <a:off x="10725912" y="6400800"/>
-            <a:ext cx="914400" cy="274320"/>
-          </a:xfrm>
-          <a:prstGeom prst="rect">
-            <a:avLst/>
-          </a:prstGeom>
-          <a:noFill/>
-          <a:ln/>
-        </p:spPr>
-        <p:txBody>
-          <a:bodyPr wrap="square" lIns="0" tIns="0" rIns="0" bIns="0" rtlCol="0" anchor="ctr"/>
-          <a:lstStyle/>
-          <a:p>
-            <a:pPr algn="r" indent="0" marL="0">
-              <a:buNone/>
-            </a:pPr>
-            <a:r>
-              <a:rPr lang="en-US" sz="1000" dirty="0">
-                <a:solidFill>
-                  <a:srgbClr val="5B6573"/>
-                </a:solidFill>
-                <a:latin typeface="Calibri" pitchFamily="34" charset="0"/>
-                <a:ea typeface="Calibri" pitchFamily="34" charset="-122"/>
-                <a:cs typeface="Calibri" pitchFamily="34" charset="-120"/>
-              </a:rPr>
-              <a:t>9 / 17</a:t>
+              <a:t>9 / 19</a:t>
             </a:r>
             <a:endParaRPr lang="en-US" sz="1000" dirty="0"/>
           </a:p>
